--- a/Red_Neurodifusa_TS0_Presion_Arterial.pptx
+++ b/Red_Neurodifusa_TS0_Presion_Arterial.pptx
@@ -4,22 +4,24 @@
   <p:sldMasterIdLst>
     <p:sldMasterId id="2147483648" r:id="rId1"/>
   </p:sldMasterIdLst>
+  <p:notesMasterIdLst>
+    <p:notesMasterId r:id="rId14"/>
+  </p:notesMasterIdLst>
   <p:sldIdLst>
     <p:sldId id="256" r:id="rId2"/>
     <p:sldId id="257" r:id="rId3"/>
     <p:sldId id="258" r:id="rId4"/>
     <p:sldId id="259" r:id="rId5"/>
     <p:sldId id="260" r:id="rId6"/>
-    <p:sldId id="261" r:id="rId7"/>
-    <p:sldId id="262" r:id="rId8"/>
-    <p:sldId id="263" r:id="rId9"/>
-    <p:sldId id="264" r:id="rId10"/>
-    <p:sldId id="265" r:id="rId11"/>
+    <p:sldId id="267" r:id="rId7"/>
+    <p:sldId id="261" r:id="rId8"/>
+    <p:sldId id="262" r:id="rId9"/>
+    <p:sldId id="263" r:id="rId10"/>
+    <p:sldId id="264" r:id="rId11"/>
+    <p:sldId id="268" r:id="rId12"/>
+    <p:sldId id="265" r:id="rId13"/>
   </p:sldIdLst>
-  <p:notesMasterIdLst>
-    <p:notesMasterId r:id="rId12"/>
-  </p:notesMasterIdLst>
-  <p:sldSz cx="9144000" cy="5143500"/>
+  <p:sldSz cx="9144000" cy="5143500" type="screen16x9"/>
   <p:notesSz cx="5143500" cy="9144000"/>
   <p:defaultTextStyle>
     <a:lvl1pPr marL="0" algn="l" defTabSz="914400" rtl="0" eaLnBrk="1" latinLnBrk="0" hangingPunct="1">
@@ -113,6 +115,11 @@
       </a:defRPr>
     </a:lvl9pPr>
   </p:defaultTextStyle>
+  <p:extLst>
+    <p:ext uri="{EFAFB233-063F-42B5-8137-9DF3F51BA10A}">
+      <p15:sldGuideLst xmlns:p15="http://schemas.microsoft.com/office/powerpoint/2012/main"/>
+    </p:ext>
+  </p:extLst>
 </p:presentation>
 </file>
 
@@ -138,234 +145,10 @@
           <a:chExt cx="0" cy="0"/>
         </a:xfrm>
       </p:grpSpPr>
-      <p:sp>
-        <p:nvSpPr>
-          <p:cNvPr id="2" name="Header Placeholder 1"/>
-          <p:cNvSpPr>
-            <a:spLocks noGrp="1"/>
-          </p:cNvSpPr>
-          <p:nvPr>
-            <p:ph type="hdr" sz="quarter"/>
-          </p:nvPr>
-        </p:nvSpPr>
-        <p:spPr>
-          <a:xfrm>
-            <a:off x="0" y="0"/>
-            <a:ext cx="2971800" cy="458788"/>
-          </a:xfrm>
-          <a:prstGeom prst="rect">
-            <a:avLst/>
-          </a:prstGeom>
-        </p:spPr>
-        <p:txBody>
-          <a:bodyPr vert="horz" lIns="91440" tIns="45720" rIns="91440" bIns="45720" rtlCol="0"/>
-          <a:lstStyle>
-            <a:lvl1pPr algn="l">
-              <a:defRPr sz="1200"/>
-            </a:lvl1pPr>
-          </a:lstStyle>
-          <a:p>
-            <a:endParaRPr lang="en-US"/>
-          </a:p>
-        </p:txBody>
-      </p:sp>
-      <p:sp>
-        <p:nvSpPr>
-          <p:cNvPr id="3" name="Date Placeholder 2"/>
-          <p:cNvSpPr>
-            <a:spLocks noGrp="1"/>
-          </p:cNvSpPr>
-          <p:nvPr>
-            <p:ph type="dt" idx="1"/>
-          </p:nvPr>
-        </p:nvSpPr>
-        <p:spPr>
-          <a:xfrm>
-            <a:off x="3884613" y="0"/>
-            <a:ext cx="2971800" cy="458788"/>
-          </a:xfrm>
-          <a:prstGeom prst="rect">
-            <a:avLst/>
-          </a:prstGeom>
-        </p:spPr>
-        <p:txBody>
-          <a:bodyPr vert="horz" lIns="91440" tIns="45720" rIns="91440" bIns="45720" rtlCol="0"/>
-          <a:lstStyle>
-            <a:lvl1pPr algn="r">
-              <a:defRPr sz="1200"/>
-            </a:lvl1pPr>
-          </a:lstStyle>
-          <a:p>
-            <a:fld id="{5282F153-3F37-0F45-9E97-73ACFA13230C}" type="datetimeFigureOut">
-              <a:rPr lang="en-US"/>
-              <a:t>7/23/19</a:t>
-            </a:fld>
-            <a:endParaRPr lang="en-US"/>
-          </a:p>
-        </p:txBody>
-      </p:sp>
-      <p:sp>
-        <p:nvSpPr>
-          <p:cNvPr id="4" name="Slide Image Placeholder 3"/>
-          <p:cNvSpPr>
-            <a:spLocks noGrp="1" noRot="1" noChangeAspect="1"/>
-          </p:cNvSpPr>
-          <p:nvPr>
-            <p:ph type="sldImg" idx="2"/>
-          </p:nvPr>
-        </p:nvSpPr>
-        <p:spPr>
-          <a:xfrm>
-            <a:off x="685800" y="1143000"/>
-            <a:ext cx="5486400" cy="3086100"/>
-          </a:xfrm>
-          <a:prstGeom prst="rect">
-            <a:avLst/>
-          </a:prstGeom>
-          <a:noFill/>
-          <a:ln w="12700">
-            <a:solidFill>
-              <a:prstClr val="black"/>
-            </a:solidFill>
-          </a:ln>
-        </p:spPr>
-        <p:txBody>
-          <a:bodyPr vert="horz" lIns="91440" tIns="45720" rIns="91440" bIns="45720" rtlCol="0" anchor="ctr"/>
-          <a:lstStyle/>
-          <a:p>
-            <a:endParaRPr lang="en-US"/>
-          </a:p>
-        </p:txBody>
-      </p:sp>
-      <p:sp>
-        <p:nvSpPr>
-          <p:cNvPr id="5" name="Notes Placeholder 4"/>
-          <p:cNvSpPr>
-            <a:spLocks noGrp="1"/>
-          </p:cNvSpPr>
-          <p:nvPr>
-            <p:ph type="body" sz="quarter" idx="3"/>
-          </p:nvPr>
-        </p:nvSpPr>
-        <p:spPr>
-          <a:xfrm>
-            <a:off x="685800" y="4400550"/>
-            <a:ext cx="5486400" cy="3600450"/>
-          </a:xfrm>
-          <a:prstGeom prst="rect">
-            <a:avLst/>
-          </a:prstGeom>
-        </p:spPr>
-        <p:txBody>
-          <a:bodyPr vert="horz" lIns="91440" tIns="45720" rIns="91440" bIns="45720" rtlCol="0"/>
-          <a:lstStyle/>
-          <a:p>
-            <a:pPr lvl="0"/>
-            <a:r>
-              <a:rPr lang="en-US"/>
-              <a:t>Click to edit Master text styles</a:t>
-            </a:r>
-          </a:p>
-          <a:p>
-            <a:pPr lvl="1"/>
-            <a:r>
-              <a:rPr lang="en-US"/>
-              <a:t>Second level</a:t>
-            </a:r>
-          </a:p>
-          <a:p>
-            <a:pPr lvl="2"/>
-            <a:r>
-              <a:rPr lang="en-US"/>
-              <a:t>Third level</a:t>
-            </a:r>
-          </a:p>
-          <a:p>
-            <a:pPr lvl="3"/>
-            <a:r>
-              <a:rPr lang="en-US"/>
-              <a:t>Fourth level</a:t>
-            </a:r>
-          </a:p>
-          <a:p>
-            <a:pPr lvl="4"/>
-            <a:r>
-              <a:rPr lang="en-US"/>
-              <a:t>Fifth level</a:t>
-            </a:r>
-          </a:p>
-        </p:txBody>
-      </p:sp>
-      <p:sp>
-        <p:nvSpPr>
-          <p:cNvPr id="6" name="Footer Placeholder 5"/>
-          <p:cNvSpPr>
-            <a:spLocks noGrp="1"/>
-          </p:cNvSpPr>
-          <p:nvPr>
-            <p:ph type="ftr" sz="quarter" idx="4"/>
-          </p:nvPr>
-        </p:nvSpPr>
-        <p:spPr>
-          <a:xfrm>
-            <a:off x="0" y="8685213"/>
-            <a:ext cx="2971800" cy="458787"/>
-          </a:xfrm>
-          <a:prstGeom prst="rect">
-            <a:avLst/>
-          </a:prstGeom>
-        </p:spPr>
-        <p:txBody>
-          <a:bodyPr vert="horz" lIns="91440" tIns="45720" rIns="91440" bIns="45720" rtlCol="0" anchor="b"/>
-          <a:lstStyle>
-            <a:lvl1pPr algn="l">
-              <a:defRPr sz="1200"/>
-            </a:lvl1pPr>
-          </a:lstStyle>
-          <a:p>
-            <a:endParaRPr lang="en-US"/>
-          </a:p>
-        </p:txBody>
-      </p:sp>
-      <p:sp>
-        <p:nvSpPr>
-          <p:cNvPr id="7" name="Slide Number Placeholder 6"/>
-          <p:cNvSpPr>
-            <a:spLocks noGrp="1"/>
-          </p:cNvSpPr>
-          <p:nvPr>
-            <p:ph type="sldNum" sz="quarter" idx="5"/>
-          </p:nvPr>
-        </p:nvSpPr>
-        <p:spPr>
-          <a:xfrm>
-            <a:off x="3884613" y="8685213"/>
-            <a:ext cx="2971800" cy="458787"/>
-          </a:xfrm>
-          <a:prstGeom prst="rect">
-            <a:avLst/>
-          </a:prstGeom>
-        </p:spPr>
-        <p:txBody>
-          <a:bodyPr vert="horz" lIns="91440" tIns="45720" rIns="91440" bIns="45720" rtlCol="0" anchor="b"/>
-          <a:lstStyle>
-            <a:lvl1pPr algn="r">
-              <a:defRPr sz="1200"/>
-            </a:lvl1pPr>
-          </a:lstStyle>
-          <a:p>
-            <a:fld id="{CE5E9CC1-C706-0F49-92D6-E571CC5EEA8F}" type="slidenum">
-              <a:rPr lang="en-US"/>
-              <a:t>‹#›</a:t>
-            </a:fld>
-            <a:endParaRPr lang="en-US"/>
-          </a:p>
-        </p:txBody>
-      </p:sp>
     </p:spTree>
     <p:extLst>
       <p:ext uri="{BB962C8B-B14F-4D97-AF65-F5344CB8AC3E}">
-        <p14:creationId xmlns:p14="http://schemas.microsoft.com/office/powerpoint/2010/main" val="1024086991"/>
+        <p14:creationId xmlns:p14="http://schemas.microsoft.com/office/powerpoint/2010/main" val="1972618485"/>
       </p:ext>
     </p:extLst>
   </p:cSld>
@@ -509,10 +292,6 @@
           <a:bodyPr/>
           <a:lstStyle/>
           <a:p>
-            <a:r>
-              <a:rPr lang="en-US" dirty="0"/>
-              <a:t/>
-            </a:r>
             <a:endParaRPr lang="en-US" dirty="0"/>
           </a:p>
         </p:txBody>
@@ -597,10 +376,6 @@
           <a:bodyPr/>
           <a:lstStyle/>
           <a:p>
-            <a:r>
-              <a:rPr lang="en-US" dirty="0"/>
-              <a:t/>
-            </a:r>
             <a:endParaRPr lang="en-US" dirty="0"/>
           </a:p>
         </p:txBody>
@@ -623,6 +398,198 @@
             <a:fld id="{F7021451-1387-4CA6-816F-3879F97B5CBC}" type="slidenum">
               <a:rPr lang="en-US"/>
               <a:t>10</a:t>
+            </a:fld>
+            <a:endParaRPr lang="en-US"/>
+          </a:p>
+        </p:txBody>
+      </p:sp>
+    </p:spTree>
+    <p:extLst>
+      <p:ext uri="{BB962C8B-B14F-4D97-AF65-F5344CB8AC3E}">
+        <p14:creationId xmlns:p14="http://schemas.microsoft.com/office/powerpoint/2010/main" val="1024086991"/>
+      </p:ext>
+    </p:extLst>
+  </p:cSld>
+  <p:clrMapOvr>
+    <a:masterClrMapping/>
+  </p:clrMapOvr>
+</p:notes>
+</file>
+
+<file path=ppt/notesSlides/notesSlide11.xml><?xml version="1.0" encoding="utf-8"?>
+<p:notes xmlns:a="http://schemas.openxmlformats.org/drawingml/2006/main" xmlns:r="http://schemas.openxmlformats.org/officeDocument/2006/relationships" xmlns:p="http://schemas.openxmlformats.org/presentationml/2006/main">
+  <p:cSld>
+    <p:spTree>
+      <p:nvGrpSpPr>
+        <p:cNvPr id="1" name="">
+          <a:extLst>
+            <a:ext uri="{FF2B5EF4-FFF2-40B4-BE49-F238E27FC236}">
+              <a16:creationId xmlns:a16="http://schemas.microsoft.com/office/drawing/2014/main" id="{618077CC-D889-5B9F-51CA-9521A28F32EF}"/>
+            </a:ext>
+          </a:extLst>
+        </p:cNvPr>
+        <p:cNvGrpSpPr/>
+        <p:nvPr/>
+      </p:nvGrpSpPr>
+      <p:grpSpPr>
+        <a:xfrm>
+          <a:off x="0" y="0"/>
+          <a:ext cx="0" cy="0"/>
+          <a:chOff x="0" y="0"/>
+          <a:chExt cx="0" cy="0"/>
+        </a:xfrm>
+      </p:grpSpPr>
+      <p:sp>
+        <p:nvSpPr>
+          <p:cNvPr id="2" name="Slide Image Placeholder 1">
+            <a:extLst>
+              <a:ext uri="{FF2B5EF4-FFF2-40B4-BE49-F238E27FC236}">
+                <a16:creationId xmlns:a16="http://schemas.microsoft.com/office/drawing/2014/main" id="{7B726FBA-B145-0D75-50D0-5C805F2ACF0E}"/>
+              </a:ext>
+            </a:extLst>
+          </p:cNvPr>
+          <p:cNvSpPr>
+            <a:spLocks noGrp="1" noRot="1" noChangeAspect="1"/>
+          </p:cNvSpPr>
+          <p:nvPr>
+            <p:ph type="sldImg"/>
+          </p:nvPr>
+        </p:nvSpPr>
+        <p:spPr/>
+      </p:sp>
+      <p:sp>
+        <p:nvSpPr>
+          <p:cNvPr id="3" name="Notes Placeholder 2">
+            <a:extLst>
+              <a:ext uri="{FF2B5EF4-FFF2-40B4-BE49-F238E27FC236}">
+                <a16:creationId xmlns:a16="http://schemas.microsoft.com/office/drawing/2014/main" id="{2D5FFEDE-00D0-D5D8-CA0F-FFD3119C61E1}"/>
+              </a:ext>
+            </a:extLst>
+          </p:cNvPr>
+          <p:cNvSpPr>
+            <a:spLocks noGrp="1"/>
+          </p:cNvSpPr>
+          <p:nvPr>
+            <p:ph type="body" idx="1"/>
+          </p:nvPr>
+        </p:nvSpPr>
+        <p:spPr/>
+        <p:txBody>
+          <a:bodyPr/>
+          <a:lstStyle/>
+          <a:p>
+            <a:endParaRPr lang="en-US" dirty="0"/>
+          </a:p>
+        </p:txBody>
+      </p:sp>
+      <p:sp>
+        <p:nvSpPr>
+          <p:cNvPr id="4" name="Slide Number Placeholder 3">
+            <a:extLst>
+              <a:ext uri="{FF2B5EF4-FFF2-40B4-BE49-F238E27FC236}">
+                <a16:creationId xmlns:a16="http://schemas.microsoft.com/office/drawing/2014/main" id="{F712508A-11BF-178E-7895-78AFC289EDE6}"/>
+              </a:ext>
+            </a:extLst>
+          </p:cNvPr>
+          <p:cNvSpPr>
+            <a:spLocks noGrp="1"/>
+          </p:cNvSpPr>
+          <p:nvPr>
+            <p:ph type="sldNum" sz="quarter" idx="10"/>
+          </p:nvPr>
+        </p:nvSpPr>
+        <p:spPr/>
+        <p:txBody>
+          <a:bodyPr/>
+          <a:lstStyle/>
+          <a:p>
+            <a:fld id="{F7021451-1387-4CA6-816F-3879F97B5CBC}" type="slidenum">
+              <a:rPr lang="en-US"/>
+              <a:t>11</a:t>
+            </a:fld>
+            <a:endParaRPr lang="en-US"/>
+          </a:p>
+        </p:txBody>
+      </p:sp>
+    </p:spTree>
+    <p:extLst>
+      <p:ext uri="{BB962C8B-B14F-4D97-AF65-F5344CB8AC3E}">
+        <p14:creationId xmlns:p14="http://schemas.microsoft.com/office/powerpoint/2010/main" val="1081263998"/>
+      </p:ext>
+    </p:extLst>
+  </p:cSld>
+  <p:clrMapOvr>
+    <a:masterClrMapping/>
+  </p:clrMapOvr>
+</p:notes>
+</file>
+
+<file path=ppt/notesSlides/notesSlide12.xml><?xml version="1.0" encoding="utf-8"?>
+<p:notes xmlns:a="http://schemas.openxmlformats.org/drawingml/2006/main" xmlns:r="http://schemas.openxmlformats.org/officeDocument/2006/relationships" xmlns:p="http://schemas.openxmlformats.org/presentationml/2006/main">
+  <p:cSld>
+    <p:spTree>
+      <p:nvGrpSpPr>
+        <p:cNvPr id="1" name=""/>
+        <p:cNvGrpSpPr/>
+        <p:nvPr/>
+      </p:nvGrpSpPr>
+      <p:grpSpPr>
+        <a:xfrm>
+          <a:off x="0" y="0"/>
+          <a:ext cx="0" cy="0"/>
+          <a:chOff x="0" y="0"/>
+          <a:chExt cx="0" cy="0"/>
+        </a:xfrm>
+      </p:grpSpPr>
+      <p:sp>
+        <p:nvSpPr>
+          <p:cNvPr id="2" name="Slide Image Placeholder 1"/>
+          <p:cNvSpPr>
+            <a:spLocks noGrp="1" noRot="1" noChangeAspect="1"/>
+          </p:cNvSpPr>
+          <p:nvPr>
+            <p:ph type="sldImg"/>
+          </p:nvPr>
+        </p:nvSpPr>
+        <p:spPr/>
+      </p:sp>
+      <p:sp>
+        <p:nvSpPr>
+          <p:cNvPr id="3" name="Notes Placeholder 2"/>
+          <p:cNvSpPr>
+            <a:spLocks noGrp="1"/>
+          </p:cNvSpPr>
+          <p:nvPr>
+            <p:ph type="body" idx="1"/>
+          </p:nvPr>
+        </p:nvSpPr>
+        <p:spPr/>
+        <p:txBody>
+          <a:bodyPr/>
+          <a:lstStyle/>
+          <a:p>
+            <a:endParaRPr lang="en-US" dirty="0"/>
+          </a:p>
+        </p:txBody>
+      </p:sp>
+      <p:sp>
+        <p:nvSpPr>
+          <p:cNvPr id="4" name="Slide Number Placeholder 3"/>
+          <p:cNvSpPr>
+            <a:spLocks noGrp="1"/>
+          </p:cNvSpPr>
+          <p:nvPr>
+            <p:ph type="sldNum" sz="quarter" idx="10"/>
+          </p:nvPr>
+        </p:nvSpPr>
+        <p:spPr/>
+        <p:txBody>
+          <a:bodyPr/>
+          <a:lstStyle/>
+          <a:p>
+            <a:fld id="{F7021451-1387-4CA6-816F-3879F97B5CBC}" type="slidenum">
+              <a:rPr lang="en-US"/>
+              <a:t>12</a:t>
             </a:fld>
             <a:endParaRPr lang="en-US"/>
           </a:p>
@@ -685,10 +652,6 @@
           <a:bodyPr/>
           <a:lstStyle/>
           <a:p>
-            <a:r>
-              <a:rPr lang="en-US" dirty="0"/>
-              <a:t/>
-            </a:r>
             <a:endParaRPr lang="en-US" dirty="0"/>
           </a:p>
         </p:txBody>
@@ -773,10 +736,6 @@
           <a:bodyPr/>
           <a:lstStyle/>
           <a:p>
-            <a:r>
-              <a:rPr lang="en-US" dirty="0"/>
-              <a:t/>
-            </a:r>
             <a:endParaRPr lang="en-US" dirty="0"/>
           </a:p>
         </p:txBody>
@@ -861,10 +820,6 @@
           <a:bodyPr/>
           <a:lstStyle/>
           <a:p>
-            <a:r>
-              <a:rPr lang="en-US" dirty="0"/>
-              <a:t/>
-            </a:r>
             <a:endParaRPr lang="en-US" dirty="0"/>
           </a:p>
         </p:txBody>
@@ -949,10 +904,6 @@
           <a:bodyPr/>
           <a:lstStyle/>
           <a:p>
-            <a:r>
-              <a:rPr lang="en-US" dirty="0"/>
-              <a:t/>
-            </a:r>
             <a:endParaRPr lang="en-US" dirty="0"/>
           </a:p>
         </p:txBody>
@@ -998,7 +949,13 @@
   <p:cSld>
     <p:spTree>
       <p:nvGrpSpPr>
-        <p:cNvPr id="1" name=""/>
+        <p:cNvPr id="1" name="">
+          <a:extLst>
+            <a:ext uri="{FF2B5EF4-FFF2-40B4-BE49-F238E27FC236}">
+              <a16:creationId xmlns:a16="http://schemas.microsoft.com/office/drawing/2014/main" id="{620AABD8-711A-0E0F-91C4-F03778A0DE9E}"/>
+            </a:ext>
+          </a:extLst>
+        </p:cNvPr>
         <p:cNvGrpSpPr/>
         <p:nvPr/>
       </p:nvGrpSpPr>
@@ -1012,7 +969,13 @@
       </p:grpSpPr>
       <p:sp>
         <p:nvSpPr>
-          <p:cNvPr id="2" name="Slide Image Placeholder 1"/>
+          <p:cNvPr id="2" name="Slide Image Placeholder 1">
+            <a:extLst>
+              <a:ext uri="{FF2B5EF4-FFF2-40B4-BE49-F238E27FC236}">
+                <a16:creationId xmlns:a16="http://schemas.microsoft.com/office/drawing/2014/main" id="{FFE2F44A-62F1-9857-7685-DB1865294164}"/>
+              </a:ext>
+            </a:extLst>
+          </p:cNvPr>
           <p:cNvSpPr>
             <a:spLocks noGrp="1" noRot="1" noChangeAspect="1"/>
           </p:cNvSpPr>
@@ -1024,7 +987,13 @@
       </p:sp>
       <p:sp>
         <p:nvSpPr>
-          <p:cNvPr id="3" name="Notes Placeholder 2"/>
+          <p:cNvPr id="3" name="Notes Placeholder 2">
+            <a:extLst>
+              <a:ext uri="{FF2B5EF4-FFF2-40B4-BE49-F238E27FC236}">
+                <a16:creationId xmlns:a16="http://schemas.microsoft.com/office/drawing/2014/main" id="{6C2154E4-BE35-772C-9ACE-0CA47ADE0902}"/>
+              </a:ext>
+            </a:extLst>
+          </p:cNvPr>
           <p:cNvSpPr>
             <a:spLocks noGrp="1"/>
           </p:cNvSpPr>
@@ -1037,17 +1006,19 @@
           <a:bodyPr/>
           <a:lstStyle/>
           <a:p>
-            <a:r>
-              <a:rPr lang="en-US" dirty="0"/>
-              <a:t/>
-            </a:r>
             <a:endParaRPr lang="en-US" dirty="0"/>
           </a:p>
         </p:txBody>
       </p:sp>
       <p:sp>
         <p:nvSpPr>
-          <p:cNvPr id="4" name="Slide Number Placeholder 3"/>
+          <p:cNvPr id="4" name="Slide Number Placeholder 3">
+            <a:extLst>
+              <a:ext uri="{FF2B5EF4-FFF2-40B4-BE49-F238E27FC236}">
+                <a16:creationId xmlns:a16="http://schemas.microsoft.com/office/drawing/2014/main" id="{211D304C-C576-0E35-B497-8B02B87F65E5}"/>
+              </a:ext>
+            </a:extLst>
+          </p:cNvPr>
           <p:cNvSpPr>
             <a:spLocks noGrp="1"/>
           </p:cNvSpPr>
@@ -1071,7 +1042,7 @@
     </p:spTree>
     <p:extLst>
       <p:ext uri="{BB962C8B-B14F-4D97-AF65-F5344CB8AC3E}">
-        <p14:creationId xmlns:p14="http://schemas.microsoft.com/office/powerpoint/2010/main" val="1024086991"/>
+        <p14:creationId xmlns:p14="http://schemas.microsoft.com/office/powerpoint/2010/main" val="69356008"/>
       </p:ext>
     </p:extLst>
   </p:cSld>
@@ -1125,10 +1096,6 @@
           <a:bodyPr/>
           <a:lstStyle/>
           <a:p>
-            <a:r>
-              <a:rPr lang="en-US" dirty="0"/>
-              <a:t/>
-            </a:r>
             <a:endParaRPr lang="en-US" dirty="0"/>
           </a:p>
         </p:txBody>
@@ -1213,10 +1180,6 @@
           <a:bodyPr/>
           <a:lstStyle/>
           <a:p>
-            <a:r>
-              <a:rPr lang="en-US" dirty="0"/>
-              <a:t/>
-            </a:r>
             <a:endParaRPr lang="en-US" dirty="0"/>
           </a:p>
         </p:txBody>
@@ -1301,10 +1264,6 @@
           <a:bodyPr/>
           <a:lstStyle/>
           <a:p>
-            <a:r>
-              <a:rPr lang="en-US" dirty="0"/>
-              <a:t/>
-            </a:r>
             <a:endParaRPr lang="en-US" dirty="0"/>
           </a:p>
         </p:txBody>
@@ -1378,6 +1337,11 @@
 <file path=ppt/slideMasters/slideMaster1.xml><?xml version="1.0" encoding="utf-8"?>
 <p:sldMaster xmlns:a="http://schemas.openxmlformats.org/drawingml/2006/main" xmlns:r="http://schemas.openxmlformats.org/officeDocument/2006/relationships" xmlns:p="http://schemas.openxmlformats.org/presentationml/2006/main">
   <p:cSld>
+    <p:bg>
+      <p:bgRef idx="1001">
+        <a:schemeClr val="bg1"/>
+      </p:bgRef>
+    </p:bg>
     <p:spTree>
       <p:nvGrpSpPr>
         <p:cNvPr id="1" name=""/>
@@ -1660,6 +1624,7 @@
         <a:solidFill>
           <a:srgbClr val="142850"/>
         </a:solidFill>
+        <a:effectLst/>
       </p:bgPr>
     </p:bg>
     <p:spTree>
@@ -1700,6 +1665,13 @@
             <a:prstDash val="solid"/>
           </a:ln>
         </p:spPr>
+        <p:txBody>
+          <a:bodyPr/>
+          <a:lstStyle/>
+          <a:p>
+            <a:endParaRPr lang="en-US"/>
+          </a:p>
+        </p:txBody>
       </p:sp>
       <p:sp>
         <p:nvSpPr>
@@ -1722,7 +1694,7 @@
           <a:bodyPr wrap="square" lIns="0" tIns="0" rIns="0" bIns="0" rtlCol="0" anchor="ctr"/>
           <a:lstStyle/>
           <a:p>
-            <a:pPr algn="l" indent="0" marL="0">
+            <a:pPr marL="0" indent="0" algn="l">
               <a:buNone/>
             </a:pPr>
             <a:r>
@@ -1761,7 +1733,7 @@
           <a:bodyPr wrap="square" lIns="0" tIns="0" rIns="0" bIns="0" rtlCol="0" anchor="ctr"/>
           <a:lstStyle/>
           <a:p>
-            <a:pPr algn="l" indent="0" marL="0">
+            <a:pPr marL="0" indent="0" algn="l">
               <a:buNone/>
             </a:pPr>
             <a:r>
@@ -1773,7 +1745,29 @@
                 <a:ea typeface="Calibri" pitchFamily="34" charset="-122"/>
                 <a:cs typeface="Calibri" pitchFamily="34" charset="-120"/>
               </a:rPr>
-              <a:t>Takagi-Sugeno Orden 0</a:t>
+              <a:t>Modelo Takagi-</a:t>
+            </a:r>
+            <a:r>
+              <a:rPr lang="en-US" sz="3600" dirty="0" err="1">
+                <a:solidFill>
+                  <a:srgbClr val="A8D4F5"/>
+                </a:solidFill>
+                <a:latin typeface="Calibri" pitchFamily="34" charset="0"/>
+                <a:ea typeface="Calibri" pitchFamily="34" charset="-122"/>
+                <a:cs typeface="Calibri" pitchFamily="34" charset="-120"/>
+              </a:rPr>
+              <a:t>Sugeno</a:t>
+            </a:r>
+            <a:r>
+              <a:rPr lang="en-US" sz="3600" dirty="0">
+                <a:solidFill>
+                  <a:srgbClr val="A8D4F5"/>
+                </a:solidFill>
+                <a:latin typeface="Calibri" pitchFamily="34" charset="0"/>
+                <a:ea typeface="Calibri" pitchFamily="34" charset="-122"/>
+                <a:cs typeface="Calibri" pitchFamily="34" charset="-120"/>
+              </a:rPr>
+              <a:t> de Orden 0</a:t>
             </a:r>
             <a:endParaRPr lang="en-US" sz="3600" dirty="0"/>
           </a:p>
@@ -1803,6 +1797,13 @@
             <a:prstDash val="solid"/>
           </a:ln>
         </p:spPr>
+        <p:txBody>
+          <a:bodyPr/>
+          <a:lstStyle/>
+          <a:p>
+            <a:endParaRPr lang="en-US"/>
+          </a:p>
+        </p:txBody>
       </p:sp>
       <p:sp>
         <p:nvSpPr>
@@ -1825,7 +1826,7 @@
           <a:bodyPr wrap="square" lIns="0" tIns="0" rIns="0" bIns="0" rtlCol="0" anchor="ctr"/>
           <a:lstStyle/>
           <a:p>
-            <a:pPr algn="l" indent="0" marL="0">
+            <a:pPr marL="0" indent="0" algn="l">
               <a:buNone/>
             </a:pPr>
             <a:r>
@@ -1869,6 +1870,13 @@
             <a:prstDash val="solid"/>
           </a:ln>
         </p:spPr>
+        <p:txBody>
+          <a:bodyPr/>
+          <a:lstStyle/>
+          <a:p>
+            <a:endParaRPr lang="en-US"/>
+          </a:p>
+        </p:txBody>
       </p:sp>
       <p:sp>
         <p:nvSpPr>
@@ -1891,7 +1899,7 @@
           <a:bodyPr wrap="square" lIns="0" tIns="0" rIns="0" bIns="0" rtlCol="0" anchor="ctr"/>
           <a:lstStyle/>
           <a:p>
-            <a:pPr algn="ctr" indent="0" marL="0">
+            <a:pPr marL="0" indent="0" algn="ctr">
               <a:buNone/>
             </a:pPr>
             <a:r>
@@ -1935,6 +1943,13 @@
             <a:prstDash val="solid"/>
           </a:ln>
         </p:spPr>
+        <p:txBody>
+          <a:bodyPr/>
+          <a:lstStyle/>
+          <a:p>
+            <a:endParaRPr lang="en-US"/>
+          </a:p>
+        </p:txBody>
       </p:sp>
       <p:sp>
         <p:nvSpPr>
@@ -1957,7 +1972,7 @@
           <a:bodyPr wrap="square" lIns="0" tIns="0" rIns="0" bIns="0" rtlCol="0" anchor="ctr"/>
           <a:lstStyle/>
           <a:p>
-            <a:pPr algn="ctr" indent="0" marL="0">
+            <a:pPr marL="0" indent="0" algn="ctr">
               <a:buNone/>
             </a:pPr>
             <a:r>
@@ -2001,6 +2016,13 @@
             <a:prstDash val="solid"/>
           </a:ln>
         </p:spPr>
+        <p:txBody>
+          <a:bodyPr/>
+          <a:lstStyle/>
+          <a:p>
+            <a:endParaRPr lang="en-US"/>
+          </a:p>
+        </p:txBody>
       </p:sp>
       <p:sp>
         <p:nvSpPr>
@@ -2023,7 +2045,7 @@
           <a:bodyPr wrap="square" lIns="0" tIns="0" rIns="0" bIns="0" rtlCol="0" anchor="ctr"/>
           <a:lstStyle/>
           <a:p>
-            <a:pPr algn="ctr" indent="0" marL="0">
+            <a:pPr marL="0" indent="0" algn="ctr">
               <a:buNone/>
             </a:pPr>
             <a:r>
@@ -2067,6 +2089,13 @@
             <a:prstDash val="solid"/>
           </a:ln>
         </p:spPr>
+        <p:txBody>
+          <a:bodyPr/>
+          <a:lstStyle/>
+          <a:p>
+            <a:endParaRPr lang="en-US"/>
+          </a:p>
+        </p:txBody>
       </p:sp>
       <p:sp>
         <p:nvSpPr>
@@ -2089,7 +2118,7 @@
           <a:bodyPr wrap="square" lIns="0" tIns="0" rIns="0" bIns="0" rtlCol="0" anchor="ctr"/>
           <a:lstStyle/>
           <a:p>
-            <a:pPr algn="ctr" indent="0" marL="0">
+            <a:pPr marL="0" indent="0" algn="ctr">
               <a:buNone/>
             </a:pPr>
             <a:r>
@@ -2128,7 +2157,7 @@
           <a:bodyPr wrap="square" lIns="0" tIns="0" rIns="0" bIns="0" rtlCol="0" anchor="ctr"/>
           <a:lstStyle/>
           <a:p>
-            <a:pPr algn="l" indent="0" marL="0">
+            <a:pPr marL="0" indent="0" algn="l">
               <a:buNone/>
             </a:pPr>
             <a:r>
@@ -2156,12 +2185,2884 @@
 
 <file path=ppt/slides/slide10.xml><?xml version="1.0" encoding="utf-8"?>
 <p:sld xmlns:a="http://schemas.openxmlformats.org/drawingml/2006/main" xmlns:r="http://schemas.openxmlformats.org/officeDocument/2006/relationships" xmlns:p="http://schemas.openxmlformats.org/presentationml/2006/main">
+  <p:cSld name="Slide 9">
+    <p:bg>
+      <p:bgPr>
+        <a:solidFill>
+          <a:srgbClr val="F8FBFD"/>
+        </a:solidFill>
+        <a:effectLst/>
+      </p:bgPr>
+    </p:bg>
+    <p:spTree>
+      <p:nvGrpSpPr>
+        <p:cNvPr id="1" name=""/>
+        <p:cNvGrpSpPr/>
+        <p:nvPr/>
+      </p:nvGrpSpPr>
+      <p:grpSpPr>
+        <a:xfrm>
+          <a:off x="0" y="0"/>
+          <a:ext cx="0" cy="0"/>
+          <a:chOff x="0" y="0"/>
+          <a:chExt cx="0" cy="0"/>
+        </a:xfrm>
+      </p:grpSpPr>
+      <p:sp>
+        <p:nvSpPr>
+          <p:cNvPr id="2" name="Shape 0"/>
+          <p:cNvSpPr/>
+          <p:nvPr/>
+        </p:nvSpPr>
+        <p:spPr>
+          <a:xfrm>
+            <a:off x="0" y="0"/>
+            <a:ext cx="9144000" cy="777240"/>
+          </a:xfrm>
+          <a:prstGeom prst="rect">
+            <a:avLst/>
+          </a:prstGeom>
+          <a:solidFill>
+            <a:srgbClr val="142850"/>
+          </a:solidFill>
+          <a:ln w="12700">
+            <a:solidFill>
+              <a:srgbClr val="142850"/>
+            </a:solidFill>
+            <a:prstDash val="solid"/>
+          </a:ln>
+        </p:spPr>
+        <p:txBody>
+          <a:bodyPr/>
+          <a:lstStyle/>
+          <a:p>
+            <a:endParaRPr lang="en-US"/>
+          </a:p>
+        </p:txBody>
+      </p:sp>
+      <p:sp>
+        <p:nvSpPr>
+          <p:cNvPr id="3" name="Text 1"/>
+          <p:cNvSpPr/>
+          <p:nvPr/>
+        </p:nvSpPr>
+        <p:spPr>
+          <a:xfrm>
+            <a:off x="365760" y="0"/>
+            <a:ext cx="8412480" cy="777240"/>
+          </a:xfrm>
+          <a:prstGeom prst="rect">
+            <a:avLst/>
+          </a:prstGeom>
+          <a:noFill/>
+          <a:ln/>
+        </p:spPr>
+        <p:txBody>
+          <a:bodyPr wrap="square" lIns="0" tIns="0" rIns="0" bIns="0" rtlCol="0" anchor="ctr"/>
+          <a:lstStyle/>
+          <a:p>
+            <a:pPr marL="0" indent="0" algn="l">
+              <a:buNone/>
+            </a:pPr>
+            <a:r>
+              <a:rPr lang="en-US" sz="2400" b="1" dirty="0">
+                <a:solidFill>
+                  <a:srgbClr val="FFFFFF"/>
+                </a:solidFill>
+                <a:latin typeface="Calibri" pitchFamily="34" charset="0"/>
+                <a:ea typeface="Calibri" pitchFamily="34" charset="-122"/>
+                <a:cs typeface="Calibri" pitchFamily="34" charset="-120"/>
+              </a:rPr>
+              <a:t>Ejemplos de Inferencia Puntual</a:t>
+            </a:r>
+            <a:endParaRPr lang="en-US" sz="2400" dirty="0"/>
+          </a:p>
+        </p:txBody>
+      </p:sp>
+      <p:graphicFrame>
+        <p:nvGraphicFramePr>
+          <p:cNvPr id="10" name="Table 0"/>
+          <p:cNvGraphicFramePr>
+            <a:graphicFrameLocks noGrp="1"/>
+          </p:cNvGraphicFramePr>
+          <p:nvPr>
+            <p:extLst>
+              <p:ext uri="{D42A27DB-BD31-4B8C-83A1-F6EECF244321}">
+                <p14:modId xmlns:p14="http://schemas.microsoft.com/office/powerpoint/2010/main" val="1579011935"/>
+              </p:ext>
+            </p:extLst>
+          </p:nvPr>
+        </p:nvGraphicFramePr>
+        <p:xfrm>
+          <a:off x="365760" y="914400"/>
+          <a:ext cx="8412480" cy="2377440"/>
+        </p:xfrm>
+        <a:graphic>
+          <a:graphicData uri="http://schemas.openxmlformats.org/drawingml/2006/table">
+            <a:tbl>
+              <a:tblPr/>
+              <a:tblGrid>
+                <a:gridCol w="1371600">
+                  <a:extLst>
+                    <a:ext uri="{9D8B030D-6E8A-4147-A177-3AD203B41FA5}">
+                      <a16:colId xmlns:a16="http://schemas.microsoft.com/office/drawing/2014/main" val="20000"/>
+                    </a:ext>
+                  </a:extLst>
+                </a:gridCol>
+                <a:gridCol w="1097280">
+                  <a:extLst>
+                    <a:ext uri="{9D8B030D-6E8A-4147-A177-3AD203B41FA5}">
+                      <a16:colId xmlns:a16="http://schemas.microsoft.com/office/drawing/2014/main" val="20001"/>
+                    </a:ext>
+                  </a:extLst>
+                </a:gridCol>
+                <a:gridCol w="1097280">
+                  <a:extLst>
+                    <a:ext uri="{9D8B030D-6E8A-4147-A177-3AD203B41FA5}">
+                      <a16:colId xmlns:a16="http://schemas.microsoft.com/office/drawing/2014/main" val="20002"/>
+                    </a:ext>
+                  </a:extLst>
+                </a:gridCol>
+                <a:gridCol w="1097280">
+                  <a:extLst>
+                    <a:ext uri="{9D8B030D-6E8A-4147-A177-3AD203B41FA5}">
+                      <a16:colId xmlns:a16="http://schemas.microsoft.com/office/drawing/2014/main" val="20003"/>
+                    </a:ext>
+                  </a:extLst>
+                </a:gridCol>
+                <a:gridCol w="1097280">
+                  <a:extLst>
+                    <a:ext uri="{9D8B030D-6E8A-4147-A177-3AD203B41FA5}">
+                      <a16:colId xmlns:a16="http://schemas.microsoft.com/office/drawing/2014/main" val="20004"/>
+                    </a:ext>
+                  </a:extLst>
+                </a:gridCol>
+                <a:gridCol w="1188720">
+                  <a:extLst>
+                    <a:ext uri="{9D8B030D-6E8A-4147-A177-3AD203B41FA5}">
+                      <a16:colId xmlns:a16="http://schemas.microsoft.com/office/drawing/2014/main" val="20005"/>
+                    </a:ext>
+                  </a:extLst>
+                </a:gridCol>
+                <a:gridCol w="1463040">
+                  <a:extLst>
+                    <a:ext uri="{9D8B030D-6E8A-4147-A177-3AD203B41FA5}">
+                      <a16:colId xmlns:a16="http://schemas.microsoft.com/office/drawing/2014/main" val="20006"/>
+                    </a:ext>
+                  </a:extLst>
+                </a:gridCol>
+              </a:tblGrid>
+              <a:tr h="475488">
+                <a:tc>
+                  <a:txBody>
+                    <a:bodyPr/>
+                    <a:lstStyle/>
+                    <a:p>
+                      <a:pPr marL="0" indent="0" algn="ctr">
+                        <a:buNone/>
+                      </a:pPr>
+                      <a:r>
+                        <a:rPr lang="en-US" sz="1300" b="1" dirty="0">
+                          <a:solidFill>
+                            <a:srgbClr val="FFFFFF"/>
+                          </a:solidFill>
+                          <a:latin typeface="Calibri" pitchFamily="34" charset="0"/>
+                          <a:ea typeface="Calibri" pitchFamily="34" charset="-122"/>
+                          <a:cs typeface="Calibri" pitchFamily="34" charset="-120"/>
+                        </a:rPr>
+                        <a:t>Presión (mmHg)</a:t>
+                      </a:r>
+                      <a:endParaRPr lang="en-US" sz="1300" dirty="0">
+                        <a:latin typeface="Calibri" charset="0"/>
+                        <a:ea typeface="Calibri" charset="0"/>
+                        <a:cs typeface="Calibri" charset="0"/>
+                      </a:endParaRPr>
+                    </a:p>
+                  </a:txBody>
+                  <a:tcPr>
+                    <a:lnL w="6350" cap="flat" cmpd="sng" algn="ctr">
+                      <a:solidFill>
+                        <a:srgbClr val="BDC3C7"/>
+                      </a:solidFill>
+                      <a:prstDash val="solid"/>
+                      <a:round/>
+                      <a:headEnd type="none" w="med" len="med"/>
+                      <a:tailEnd type="none" w="med" len="med"/>
+                    </a:lnL>
+                    <a:lnR w="6350" cap="flat" cmpd="sng" algn="ctr">
+                      <a:solidFill>
+                        <a:srgbClr val="BDC3C7"/>
+                      </a:solidFill>
+                      <a:prstDash val="solid"/>
+                      <a:round/>
+                      <a:headEnd type="none" w="med" len="med"/>
+                      <a:tailEnd type="none" w="med" len="med"/>
+                    </a:lnR>
+                    <a:lnT w="6350" cap="flat" cmpd="sng" algn="ctr">
+                      <a:solidFill>
+                        <a:srgbClr val="BDC3C7"/>
+                      </a:solidFill>
+                      <a:prstDash val="solid"/>
+                      <a:round/>
+                      <a:headEnd type="none" w="med" len="med"/>
+                      <a:tailEnd type="none" w="med" len="med"/>
+                    </a:lnT>
+                    <a:lnB w="6350" cap="flat" cmpd="sng" algn="ctr">
+                      <a:solidFill>
+                        <a:srgbClr val="BDC3C7"/>
+                      </a:solidFill>
+                      <a:prstDash val="solid"/>
+                      <a:round/>
+                      <a:headEnd type="none" w="med" len="med"/>
+                      <a:tailEnd type="none" w="med" len="med"/>
+                    </a:lnB>
+                    <a:solidFill>
+                      <a:srgbClr val="1F5C8B"/>
+                    </a:solidFill>
+                  </a:tcPr>
+                </a:tc>
+                <a:tc>
+                  <a:txBody>
+                    <a:bodyPr/>
+                    <a:lstStyle/>
+                    <a:p>
+                      <a:pPr marL="0" indent="0" algn="ctr">
+                        <a:buNone/>
+                      </a:pPr>
+                      <a:r>
+                        <a:rPr lang="en-US" sz="1300" b="1" dirty="0">
+                          <a:solidFill>
+                            <a:srgbClr val="FFFFFF"/>
+                          </a:solidFill>
+                          <a:latin typeface="Calibri" pitchFamily="34" charset="0"/>
+                          <a:ea typeface="Calibri" pitchFamily="34" charset="-122"/>
+                          <a:cs typeface="Calibri" pitchFamily="34" charset="-120"/>
+                        </a:rPr>
+                        <a:t>μ Normal</a:t>
+                      </a:r>
+                      <a:endParaRPr lang="en-US" sz="1300" dirty="0">
+                        <a:latin typeface="Calibri" charset="0"/>
+                        <a:ea typeface="Calibri" charset="0"/>
+                        <a:cs typeface="Calibri" charset="0"/>
+                      </a:endParaRPr>
+                    </a:p>
+                  </a:txBody>
+                  <a:tcPr>
+                    <a:lnL w="6350" cap="flat" cmpd="sng" algn="ctr">
+                      <a:solidFill>
+                        <a:srgbClr val="BDC3C7"/>
+                      </a:solidFill>
+                      <a:prstDash val="solid"/>
+                      <a:round/>
+                      <a:headEnd type="none" w="med" len="med"/>
+                      <a:tailEnd type="none" w="med" len="med"/>
+                    </a:lnL>
+                    <a:lnR w="6350" cap="flat" cmpd="sng" algn="ctr">
+                      <a:solidFill>
+                        <a:srgbClr val="BDC3C7"/>
+                      </a:solidFill>
+                      <a:prstDash val="solid"/>
+                      <a:round/>
+                      <a:headEnd type="none" w="med" len="med"/>
+                      <a:tailEnd type="none" w="med" len="med"/>
+                    </a:lnR>
+                    <a:lnT w="6350" cap="flat" cmpd="sng" algn="ctr">
+                      <a:solidFill>
+                        <a:srgbClr val="BDC3C7"/>
+                      </a:solidFill>
+                      <a:prstDash val="solid"/>
+                      <a:round/>
+                      <a:headEnd type="none" w="med" len="med"/>
+                      <a:tailEnd type="none" w="med" len="med"/>
+                    </a:lnT>
+                    <a:lnB w="6350" cap="flat" cmpd="sng" algn="ctr">
+                      <a:solidFill>
+                        <a:srgbClr val="BDC3C7"/>
+                      </a:solidFill>
+                      <a:prstDash val="solid"/>
+                      <a:round/>
+                      <a:headEnd type="none" w="med" len="med"/>
+                      <a:tailEnd type="none" w="med" len="med"/>
+                    </a:lnB>
+                    <a:solidFill>
+                      <a:srgbClr val="1F5C8B"/>
+                    </a:solidFill>
+                  </a:tcPr>
+                </a:tc>
+                <a:tc>
+                  <a:txBody>
+                    <a:bodyPr/>
+                    <a:lstStyle/>
+                    <a:p>
+                      <a:pPr marL="0" indent="0" algn="ctr">
+                        <a:buNone/>
+                      </a:pPr>
+                      <a:r>
+                        <a:rPr lang="en-US" sz="1300" b="1" dirty="0">
+                          <a:solidFill>
+                            <a:srgbClr val="FFFFFF"/>
+                          </a:solidFill>
+                          <a:latin typeface="Calibri" pitchFamily="34" charset="0"/>
+                          <a:ea typeface="Calibri" pitchFamily="34" charset="-122"/>
+                          <a:cs typeface="Calibri" pitchFamily="34" charset="-120"/>
+                        </a:rPr>
+                        <a:t>μ Elevada</a:t>
+                      </a:r>
+                      <a:endParaRPr lang="en-US" sz="1300" dirty="0">
+                        <a:latin typeface="Calibri" charset="0"/>
+                        <a:ea typeface="Calibri" charset="0"/>
+                        <a:cs typeface="Calibri" charset="0"/>
+                      </a:endParaRPr>
+                    </a:p>
+                  </a:txBody>
+                  <a:tcPr>
+                    <a:lnL w="6350" cap="flat" cmpd="sng" algn="ctr">
+                      <a:solidFill>
+                        <a:srgbClr val="BDC3C7"/>
+                      </a:solidFill>
+                      <a:prstDash val="solid"/>
+                      <a:round/>
+                      <a:headEnd type="none" w="med" len="med"/>
+                      <a:tailEnd type="none" w="med" len="med"/>
+                    </a:lnL>
+                    <a:lnR w="6350" cap="flat" cmpd="sng" algn="ctr">
+                      <a:solidFill>
+                        <a:srgbClr val="BDC3C7"/>
+                      </a:solidFill>
+                      <a:prstDash val="solid"/>
+                      <a:round/>
+                      <a:headEnd type="none" w="med" len="med"/>
+                      <a:tailEnd type="none" w="med" len="med"/>
+                    </a:lnR>
+                    <a:lnT w="6350" cap="flat" cmpd="sng" algn="ctr">
+                      <a:solidFill>
+                        <a:srgbClr val="BDC3C7"/>
+                      </a:solidFill>
+                      <a:prstDash val="solid"/>
+                      <a:round/>
+                      <a:headEnd type="none" w="med" len="med"/>
+                      <a:tailEnd type="none" w="med" len="med"/>
+                    </a:lnT>
+                    <a:lnB w="6350" cap="flat" cmpd="sng" algn="ctr">
+                      <a:solidFill>
+                        <a:srgbClr val="BDC3C7"/>
+                      </a:solidFill>
+                      <a:prstDash val="solid"/>
+                      <a:round/>
+                      <a:headEnd type="none" w="med" len="med"/>
+                      <a:tailEnd type="none" w="med" len="med"/>
+                    </a:lnB>
+                    <a:solidFill>
+                      <a:srgbClr val="1F5C8B"/>
+                    </a:solidFill>
+                  </a:tcPr>
+                </a:tc>
+                <a:tc>
+                  <a:txBody>
+                    <a:bodyPr/>
+                    <a:lstStyle/>
+                    <a:p>
+                      <a:pPr marL="0" indent="0" algn="ctr">
+                        <a:buNone/>
+                      </a:pPr>
+                      <a:r>
+                        <a:rPr lang="en-US" sz="1300" b="1" dirty="0">
+                          <a:solidFill>
+                            <a:srgbClr val="FFFFFF"/>
+                          </a:solidFill>
+                          <a:latin typeface="Calibri" pitchFamily="34" charset="0"/>
+                          <a:ea typeface="Calibri" pitchFamily="34" charset="-122"/>
+                          <a:cs typeface="Calibri" pitchFamily="34" charset="-120"/>
+                        </a:rPr>
+                        <a:t>μ Alta</a:t>
+                      </a:r>
+                      <a:endParaRPr lang="en-US" sz="1300" dirty="0">
+                        <a:latin typeface="Calibri" charset="0"/>
+                        <a:ea typeface="Calibri" charset="0"/>
+                        <a:cs typeface="Calibri" charset="0"/>
+                      </a:endParaRPr>
+                    </a:p>
+                  </a:txBody>
+                  <a:tcPr>
+                    <a:lnL w="6350" cap="flat" cmpd="sng" algn="ctr">
+                      <a:solidFill>
+                        <a:srgbClr val="BDC3C7"/>
+                      </a:solidFill>
+                      <a:prstDash val="solid"/>
+                      <a:round/>
+                      <a:headEnd type="none" w="med" len="med"/>
+                      <a:tailEnd type="none" w="med" len="med"/>
+                    </a:lnL>
+                    <a:lnR w="6350" cap="flat" cmpd="sng" algn="ctr">
+                      <a:solidFill>
+                        <a:srgbClr val="BDC3C7"/>
+                      </a:solidFill>
+                      <a:prstDash val="solid"/>
+                      <a:round/>
+                      <a:headEnd type="none" w="med" len="med"/>
+                      <a:tailEnd type="none" w="med" len="med"/>
+                    </a:lnR>
+                    <a:lnT w="6350" cap="flat" cmpd="sng" algn="ctr">
+                      <a:solidFill>
+                        <a:srgbClr val="BDC3C7"/>
+                      </a:solidFill>
+                      <a:prstDash val="solid"/>
+                      <a:round/>
+                      <a:headEnd type="none" w="med" len="med"/>
+                      <a:tailEnd type="none" w="med" len="med"/>
+                    </a:lnT>
+                    <a:lnB w="6350" cap="flat" cmpd="sng" algn="ctr">
+                      <a:solidFill>
+                        <a:srgbClr val="BDC3C7"/>
+                      </a:solidFill>
+                      <a:prstDash val="solid"/>
+                      <a:round/>
+                      <a:headEnd type="none" w="med" len="med"/>
+                      <a:tailEnd type="none" w="med" len="med"/>
+                    </a:lnB>
+                    <a:solidFill>
+                      <a:srgbClr val="1F5C8B"/>
+                    </a:solidFill>
+                  </a:tcPr>
+                </a:tc>
+                <a:tc>
+                  <a:txBody>
+                    <a:bodyPr/>
+                    <a:lstStyle/>
+                    <a:p>
+                      <a:pPr marL="0" indent="0" algn="ctr">
+                        <a:buNone/>
+                      </a:pPr>
+                      <a:r>
+                        <a:rPr lang="en-US" sz="1300" b="1" dirty="0">
+                          <a:solidFill>
+                            <a:srgbClr val="FFFFFF"/>
+                          </a:solidFill>
+                          <a:latin typeface="Calibri" pitchFamily="34" charset="0"/>
+                          <a:ea typeface="Calibri" pitchFamily="34" charset="-122"/>
+                          <a:cs typeface="Calibri" pitchFamily="34" charset="-120"/>
+                        </a:rPr>
+                        <a:t>μ Muy Alta</a:t>
+                      </a:r>
+                      <a:endParaRPr lang="en-US" sz="1300" dirty="0">
+                        <a:latin typeface="Calibri" charset="0"/>
+                        <a:ea typeface="Calibri" charset="0"/>
+                        <a:cs typeface="Calibri" charset="0"/>
+                      </a:endParaRPr>
+                    </a:p>
+                  </a:txBody>
+                  <a:tcPr>
+                    <a:lnL w="6350" cap="flat" cmpd="sng" algn="ctr">
+                      <a:solidFill>
+                        <a:srgbClr val="BDC3C7"/>
+                      </a:solidFill>
+                      <a:prstDash val="solid"/>
+                      <a:round/>
+                      <a:headEnd type="none" w="med" len="med"/>
+                      <a:tailEnd type="none" w="med" len="med"/>
+                    </a:lnL>
+                    <a:lnR w="6350" cap="flat" cmpd="sng" algn="ctr">
+                      <a:solidFill>
+                        <a:srgbClr val="BDC3C7"/>
+                      </a:solidFill>
+                      <a:prstDash val="solid"/>
+                      <a:round/>
+                      <a:headEnd type="none" w="med" len="med"/>
+                      <a:tailEnd type="none" w="med" len="med"/>
+                    </a:lnR>
+                    <a:lnT w="6350" cap="flat" cmpd="sng" algn="ctr">
+                      <a:solidFill>
+                        <a:srgbClr val="BDC3C7"/>
+                      </a:solidFill>
+                      <a:prstDash val="solid"/>
+                      <a:round/>
+                      <a:headEnd type="none" w="med" len="med"/>
+                      <a:tailEnd type="none" w="med" len="med"/>
+                    </a:lnT>
+                    <a:lnB w="6350" cap="flat" cmpd="sng" algn="ctr">
+                      <a:solidFill>
+                        <a:srgbClr val="BDC3C7"/>
+                      </a:solidFill>
+                      <a:prstDash val="solid"/>
+                      <a:round/>
+                      <a:headEnd type="none" w="med" len="med"/>
+                      <a:tailEnd type="none" w="med" len="med"/>
+                    </a:lnB>
+                    <a:solidFill>
+                      <a:srgbClr val="1F5C8B"/>
+                    </a:solidFill>
+                  </a:tcPr>
+                </a:tc>
+                <a:tc>
+                  <a:txBody>
+                    <a:bodyPr/>
+                    <a:lstStyle/>
+                    <a:p>
+                      <a:pPr marL="0" indent="0" algn="ctr">
+                        <a:buNone/>
+                      </a:pPr>
+                      <a:r>
+                        <a:rPr lang="en-US" sz="1300" b="1" dirty="0">
+                          <a:solidFill>
+                            <a:srgbClr val="FFFFFF"/>
+                          </a:solidFill>
+                          <a:latin typeface="Calibri" pitchFamily="34" charset="0"/>
+                          <a:ea typeface="Calibri" pitchFamily="34" charset="-122"/>
+                          <a:cs typeface="Calibri" pitchFamily="34" charset="-120"/>
+                        </a:rPr>
+                        <a:t>Riesgo</a:t>
+                      </a:r>
+                      <a:endParaRPr lang="en-US" sz="1300" dirty="0">
+                        <a:latin typeface="Calibri" charset="0"/>
+                        <a:ea typeface="Calibri" charset="0"/>
+                        <a:cs typeface="Calibri" charset="0"/>
+                      </a:endParaRPr>
+                    </a:p>
+                  </a:txBody>
+                  <a:tcPr>
+                    <a:lnL w="6350" cap="flat" cmpd="sng" algn="ctr">
+                      <a:solidFill>
+                        <a:srgbClr val="BDC3C7"/>
+                      </a:solidFill>
+                      <a:prstDash val="solid"/>
+                      <a:round/>
+                      <a:headEnd type="none" w="med" len="med"/>
+                      <a:tailEnd type="none" w="med" len="med"/>
+                    </a:lnL>
+                    <a:lnR w="6350" cap="flat" cmpd="sng" algn="ctr">
+                      <a:solidFill>
+                        <a:srgbClr val="BDC3C7"/>
+                      </a:solidFill>
+                      <a:prstDash val="solid"/>
+                      <a:round/>
+                      <a:headEnd type="none" w="med" len="med"/>
+                      <a:tailEnd type="none" w="med" len="med"/>
+                    </a:lnR>
+                    <a:lnT w="6350" cap="flat" cmpd="sng" algn="ctr">
+                      <a:solidFill>
+                        <a:srgbClr val="BDC3C7"/>
+                      </a:solidFill>
+                      <a:prstDash val="solid"/>
+                      <a:round/>
+                      <a:headEnd type="none" w="med" len="med"/>
+                      <a:tailEnd type="none" w="med" len="med"/>
+                    </a:lnT>
+                    <a:lnB w="6350" cap="flat" cmpd="sng" algn="ctr">
+                      <a:solidFill>
+                        <a:srgbClr val="BDC3C7"/>
+                      </a:solidFill>
+                      <a:prstDash val="solid"/>
+                      <a:round/>
+                      <a:headEnd type="none" w="med" len="med"/>
+                      <a:tailEnd type="none" w="med" len="med"/>
+                    </a:lnB>
+                    <a:solidFill>
+                      <a:srgbClr val="1F5C8B"/>
+                    </a:solidFill>
+                  </a:tcPr>
+                </a:tc>
+                <a:tc>
+                  <a:txBody>
+                    <a:bodyPr/>
+                    <a:lstStyle/>
+                    <a:p>
+                      <a:pPr marL="0" indent="0" algn="ctr">
+                        <a:buNone/>
+                      </a:pPr>
+                      <a:r>
+                        <a:rPr lang="en-US" sz="1300" b="1" dirty="0">
+                          <a:solidFill>
+                            <a:srgbClr val="FFFFFF"/>
+                          </a:solidFill>
+                          <a:latin typeface="Calibri" pitchFamily="34" charset="0"/>
+                          <a:ea typeface="Calibri" pitchFamily="34" charset="-122"/>
+                          <a:cs typeface="Calibri" pitchFamily="34" charset="-120"/>
+                        </a:rPr>
+                        <a:t>Diagnóstico</a:t>
+                      </a:r>
+                      <a:endParaRPr lang="en-US" sz="1300" dirty="0">
+                        <a:latin typeface="Calibri" charset="0"/>
+                        <a:ea typeface="Calibri" charset="0"/>
+                        <a:cs typeface="Calibri" charset="0"/>
+                      </a:endParaRPr>
+                    </a:p>
+                  </a:txBody>
+                  <a:tcPr>
+                    <a:lnL w="6350" cap="flat" cmpd="sng" algn="ctr">
+                      <a:solidFill>
+                        <a:srgbClr val="BDC3C7"/>
+                      </a:solidFill>
+                      <a:prstDash val="solid"/>
+                      <a:round/>
+                      <a:headEnd type="none" w="med" len="med"/>
+                      <a:tailEnd type="none" w="med" len="med"/>
+                    </a:lnL>
+                    <a:lnR w="6350" cap="flat" cmpd="sng" algn="ctr">
+                      <a:solidFill>
+                        <a:srgbClr val="BDC3C7"/>
+                      </a:solidFill>
+                      <a:prstDash val="solid"/>
+                      <a:round/>
+                      <a:headEnd type="none" w="med" len="med"/>
+                      <a:tailEnd type="none" w="med" len="med"/>
+                    </a:lnR>
+                    <a:lnT w="6350" cap="flat" cmpd="sng" algn="ctr">
+                      <a:solidFill>
+                        <a:srgbClr val="BDC3C7"/>
+                      </a:solidFill>
+                      <a:prstDash val="solid"/>
+                      <a:round/>
+                      <a:headEnd type="none" w="med" len="med"/>
+                      <a:tailEnd type="none" w="med" len="med"/>
+                    </a:lnT>
+                    <a:lnB w="6350" cap="flat" cmpd="sng" algn="ctr">
+                      <a:solidFill>
+                        <a:srgbClr val="BDC3C7"/>
+                      </a:solidFill>
+                      <a:prstDash val="solid"/>
+                      <a:round/>
+                      <a:headEnd type="none" w="med" len="med"/>
+                      <a:tailEnd type="none" w="med" len="med"/>
+                    </a:lnB>
+                    <a:solidFill>
+                      <a:srgbClr val="1F5C8B"/>
+                    </a:solidFill>
+                  </a:tcPr>
+                </a:tc>
+                <a:extLst>
+                  <a:ext uri="{0D108BD9-81ED-4DB2-BD59-A6C34878D82A}">
+                    <a16:rowId xmlns:a16="http://schemas.microsoft.com/office/drawing/2014/main" val="10000"/>
+                  </a:ext>
+                </a:extLst>
+              </a:tr>
+              <a:tr h="475488">
+                <a:tc>
+                  <a:txBody>
+                    <a:bodyPr/>
+                    <a:lstStyle/>
+                    <a:p>
+                      <a:pPr marL="0" indent="0" algn="ctr">
+                        <a:buNone/>
+                      </a:pPr>
+                      <a:r>
+                        <a:rPr lang="en-US" sz="1300" dirty="0">
+                          <a:solidFill>
+                            <a:srgbClr val="000000"/>
+                          </a:solidFill>
+                          <a:latin typeface="Calibri" pitchFamily="34" charset="0"/>
+                          <a:ea typeface="Calibri" pitchFamily="34" charset="-122"/>
+                          <a:cs typeface="Calibri" pitchFamily="34" charset="-120"/>
+                        </a:rPr>
+                        <a:t>100</a:t>
+                      </a:r>
+                      <a:endParaRPr lang="en-US" sz="1300" dirty="0">
+                        <a:latin typeface="Calibri" charset="0"/>
+                        <a:ea typeface="Calibri" charset="0"/>
+                        <a:cs typeface="Calibri" charset="0"/>
+                      </a:endParaRPr>
+                    </a:p>
+                  </a:txBody>
+                  <a:tcPr>
+                    <a:lnL w="6350" cap="flat" cmpd="sng" algn="ctr">
+                      <a:solidFill>
+                        <a:srgbClr val="BDC3C7"/>
+                      </a:solidFill>
+                      <a:prstDash val="solid"/>
+                      <a:round/>
+                      <a:headEnd type="none" w="med" len="med"/>
+                      <a:tailEnd type="none" w="med" len="med"/>
+                    </a:lnL>
+                    <a:lnR w="6350" cap="flat" cmpd="sng" algn="ctr">
+                      <a:solidFill>
+                        <a:srgbClr val="BDC3C7"/>
+                      </a:solidFill>
+                      <a:prstDash val="solid"/>
+                      <a:round/>
+                      <a:headEnd type="none" w="med" len="med"/>
+                      <a:tailEnd type="none" w="med" len="med"/>
+                    </a:lnR>
+                    <a:lnT w="6350" cap="flat" cmpd="sng" algn="ctr">
+                      <a:solidFill>
+                        <a:srgbClr val="BDC3C7"/>
+                      </a:solidFill>
+                      <a:prstDash val="solid"/>
+                      <a:round/>
+                      <a:headEnd type="none" w="med" len="med"/>
+                      <a:tailEnd type="none" w="med" len="med"/>
+                    </a:lnT>
+                    <a:lnB w="6350" cap="flat" cmpd="sng" algn="ctr">
+                      <a:solidFill>
+                        <a:srgbClr val="BDC3C7"/>
+                      </a:solidFill>
+                      <a:prstDash val="solid"/>
+                      <a:round/>
+                      <a:headEnd type="none" w="med" len="med"/>
+                      <a:tailEnd type="none" w="med" len="med"/>
+                    </a:lnB>
+                    <a:solidFill>
+                      <a:srgbClr val="FFFFFF"/>
+                    </a:solidFill>
+                  </a:tcPr>
+                </a:tc>
+                <a:tc>
+                  <a:txBody>
+                    <a:bodyPr/>
+                    <a:lstStyle/>
+                    <a:p>
+                      <a:pPr marL="0" indent="0" algn="ctr">
+                        <a:buNone/>
+                      </a:pPr>
+                      <a:r>
+                        <a:rPr lang="en-US" sz="1300" b="1" dirty="0">
+                          <a:solidFill>
+                            <a:srgbClr val="1E8449"/>
+                          </a:solidFill>
+                          <a:latin typeface="Calibri" pitchFamily="34" charset="0"/>
+                          <a:ea typeface="Calibri" pitchFamily="34" charset="-122"/>
+                          <a:cs typeface="Calibri" pitchFamily="34" charset="-120"/>
+                        </a:rPr>
+                        <a:t>1.00</a:t>
+                      </a:r>
+                      <a:endParaRPr lang="en-US" sz="1300" dirty="0">
+                        <a:latin typeface="Calibri" charset="0"/>
+                        <a:ea typeface="Calibri" charset="0"/>
+                        <a:cs typeface="Calibri" charset="0"/>
+                      </a:endParaRPr>
+                    </a:p>
+                  </a:txBody>
+                  <a:tcPr>
+                    <a:lnL w="6350" cap="flat" cmpd="sng" algn="ctr">
+                      <a:solidFill>
+                        <a:srgbClr val="BDC3C7"/>
+                      </a:solidFill>
+                      <a:prstDash val="solid"/>
+                      <a:round/>
+                      <a:headEnd type="none" w="med" len="med"/>
+                      <a:tailEnd type="none" w="med" len="med"/>
+                    </a:lnL>
+                    <a:lnR w="6350" cap="flat" cmpd="sng" algn="ctr">
+                      <a:solidFill>
+                        <a:srgbClr val="BDC3C7"/>
+                      </a:solidFill>
+                      <a:prstDash val="solid"/>
+                      <a:round/>
+                      <a:headEnd type="none" w="med" len="med"/>
+                      <a:tailEnd type="none" w="med" len="med"/>
+                    </a:lnR>
+                    <a:lnT w="6350" cap="flat" cmpd="sng" algn="ctr">
+                      <a:solidFill>
+                        <a:srgbClr val="BDC3C7"/>
+                      </a:solidFill>
+                      <a:prstDash val="solid"/>
+                      <a:round/>
+                      <a:headEnd type="none" w="med" len="med"/>
+                      <a:tailEnd type="none" w="med" len="med"/>
+                    </a:lnT>
+                    <a:lnB w="6350" cap="flat" cmpd="sng" algn="ctr">
+                      <a:solidFill>
+                        <a:srgbClr val="BDC3C7"/>
+                      </a:solidFill>
+                      <a:prstDash val="solid"/>
+                      <a:round/>
+                      <a:headEnd type="none" w="med" len="med"/>
+                      <a:tailEnd type="none" w="med" len="med"/>
+                    </a:lnB>
+                    <a:solidFill>
+                      <a:srgbClr val="FFFFFF"/>
+                    </a:solidFill>
+                  </a:tcPr>
+                </a:tc>
+                <a:tc>
+                  <a:txBody>
+                    <a:bodyPr/>
+                    <a:lstStyle/>
+                    <a:p>
+                      <a:pPr marL="0" indent="0" algn="ctr">
+                        <a:buNone/>
+                      </a:pPr>
+                      <a:r>
+                        <a:rPr lang="en-US" sz="1300" dirty="0">
+                          <a:solidFill>
+                            <a:srgbClr val="000000"/>
+                          </a:solidFill>
+                          <a:latin typeface="Calibri" pitchFamily="34" charset="0"/>
+                          <a:ea typeface="Calibri" pitchFamily="34" charset="-122"/>
+                          <a:cs typeface="Calibri" pitchFamily="34" charset="-120"/>
+                        </a:rPr>
+                        <a:t>0.00</a:t>
+                      </a:r>
+                      <a:endParaRPr lang="en-US" sz="1300" dirty="0">
+                        <a:latin typeface="Calibri" charset="0"/>
+                        <a:ea typeface="Calibri" charset="0"/>
+                        <a:cs typeface="Calibri" charset="0"/>
+                      </a:endParaRPr>
+                    </a:p>
+                  </a:txBody>
+                  <a:tcPr>
+                    <a:lnL w="6350" cap="flat" cmpd="sng" algn="ctr">
+                      <a:solidFill>
+                        <a:srgbClr val="BDC3C7"/>
+                      </a:solidFill>
+                      <a:prstDash val="solid"/>
+                      <a:round/>
+                      <a:headEnd type="none" w="med" len="med"/>
+                      <a:tailEnd type="none" w="med" len="med"/>
+                    </a:lnL>
+                    <a:lnR w="6350" cap="flat" cmpd="sng" algn="ctr">
+                      <a:solidFill>
+                        <a:srgbClr val="BDC3C7"/>
+                      </a:solidFill>
+                      <a:prstDash val="solid"/>
+                      <a:round/>
+                      <a:headEnd type="none" w="med" len="med"/>
+                      <a:tailEnd type="none" w="med" len="med"/>
+                    </a:lnR>
+                    <a:lnT w="6350" cap="flat" cmpd="sng" algn="ctr">
+                      <a:solidFill>
+                        <a:srgbClr val="BDC3C7"/>
+                      </a:solidFill>
+                      <a:prstDash val="solid"/>
+                      <a:round/>
+                      <a:headEnd type="none" w="med" len="med"/>
+                      <a:tailEnd type="none" w="med" len="med"/>
+                    </a:lnT>
+                    <a:lnB w="6350" cap="flat" cmpd="sng" algn="ctr">
+                      <a:solidFill>
+                        <a:srgbClr val="BDC3C7"/>
+                      </a:solidFill>
+                      <a:prstDash val="solid"/>
+                      <a:round/>
+                      <a:headEnd type="none" w="med" len="med"/>
+                      <a:tailEnd type="none" w="med" len="med"/>
+                    </a:lnB>
+                    <a:solidFill>
+                      <a:srgbClr val="FFFFFF"/>
+                    </a:solidFill>
+                  </a:tcPr>
+                </a:tc>
+                <a:tc>
+                  <a:txBody>
+                    <a:bodyPr/>
+                    <a:lstStyle/>
+                    <a:p>
+                      <a:pPr marL="0" indent="0" algn="ctr">
+                        <a:buNone/>
+                      </a:pPr>
+                      <a:r>
+                        <a:rPr lang="en-US" sz="1300" dirty="0">
+                          <a:solidFill>
+                            <a:srgbClr val="000000"/>
+                          </a:solidFill>
+                          <a:latin typeface="Calibri" pitchFamily="34" charset="0"/>
+                          <a:ea typeface="Calibri" pitchFamily="34" charset="-122"/>
+                          <a:cs typeface="Calibri" pitchFamily="34" charset="-120"/>
+                        </a:rPr>
+                        <a:t>0.00</a:t>
+                      </a:r>
+                      <a:endParaRPr lang="en-US" sz="1300" dirty="0">
+                        <a:latin typeface="Calibri" charset="0"/>
+                        <a:ea typeface="Calibri" charset="0"/>
+                        <a:cs typeface="Calibri" charset="0"/>
+                      </a:endParaRPr>
+                    </a:p>
+                  </a:txBody>
+                  <a:tcPr>
+                    <a:lnL w="6350" cap="flat" cmpd="sng" algn="ctr">
+                      <a:solidFill>
+                        <a:srgbClr val="BDC3C7"/>
+                      </a:solidFill>
+                      <a:prstDash val="solid"/>
+                      <a:round/>
+                      <a:headEnd type="none" w="med" len="med"/>
+                      <a:tailEnd type="none" w="med" len="med"/>
+                    </a:lnL>
+                    <a:lnR w="6350" cap="flat" cmpd="sng" algn="ctr">
+                      <a:solidFill>
+                        <a:srgbClr val="BDC3C7"/>
+                      </a:solidFill>
+                      <a:prstDash val="solid"/>
+                      <a:round/>
+                      <a:headEnd type="none" w="med" len="med"/>
+                      <a:tailEnd type="none" w="med" len="med"/>
+                    </a:lnR>
+                    <a:lnT w="6350" cap="flat" cmpd="sng" algn="ctr">
+                      <a:solidFill>
+                        <a:srgbClr val="BDC3C7"/>
+                      </a:solidFill>
+                      <a:prstDash val="solid"/>
+                      <a:round/>
+                      <a:headEnd type="none" w="med" len="med"/>
+                      <a:tailEnd type="none" w="med" len="med"/>
+                    </a:lnT>
+                    <a:lnB w="6350" cap="flat" cmpd="sng" algn="ctr">
+                      <a:solidFill>
+                        <a:srgbClr val="BDC3C7"/>
+                      </a:solidFill>
+                      <a:prstDash val="solid"/>
+                      <a:round/>
+                      <a:headEnd type="none" w="med" len="med"/>
+                      <a:tailEnd type="none" w="med" len="med"/>
+                    </a:lnB>
+                    <a:solidFill>
+                      <a:srgbClr val="FFFFFF"/>
+                    </a:solidFill>
+                  </a:tcPr>
+                </a:tc>
+                <a:tc>
+                  <a:txBody>
+                    <a:bodyPr/>
+                    <a:lstStyle/>
+                    <a:p>
+                      <a:pPr marL="0" indent="0" algn="ctr">
+                        <a:buNone/>
+                      </a:pPr>
+                      <a:r>
+                        <a:rPr lang="en-US" sz="1300" dirty="0">
+                          <a:solidFill>
+                            <a:srgbClr val="000000"/>
+                          </a:solidFill>
+                          <a:latin typeface="Calibri" pitchFamily="34" charset="0"/>
+                          <a:ea typeface="Calibri" pitchFamily="34" charset="-122"/>
+                          <a:cs typeface="Calibri" pitchFamily="34" charset="-120"/>
+                        </a:rPr>
+                        <a:t>0.00</a:t>
+                      </a:r>
+                      <a:endParaRPr lang="en-US" sz="1300" dirty="0">
+                        <a:latin typeface="Calibri" charset="0"/>
+                        <a:ea typeface="Calibri" charset="0"/>
+                        <a:cs typeface="Calibri" charset="0"/>
+                      </a:endParaRPr>
+                    </a:p>
+                  </a:txBody>
+                  <a:tcPr>
+                    <a:lnL w="6350" cap="flat" cmpd="sng" algn="ctr">
+                      <a:solidFill>
+                        <a:srgbClr val="BDC3C7"/>
+                      </a:solidFill>
+                      <a:prstDash val="solid"/>
+                      <a:round/>
+                      <a:headEnd type="none" w="med" len="med"/>
+                      <a:tailEnd type="none" w="med" len="med"/>
+                    </a:lnL>
+                    <a:lnR w="6350" cap="flat" cmpd="sng" algn="ctr">
+                      <a:solidFill>
+                        <a:srgbClr val="BDC3C7"/>
+                      </a:solidFill>
+                      <a:prstDash val="solid"/>
+                      <a:round/>
+                      <a:headEnd type="none" w="med" len="med"/>
+                      <a:tailEnd type="none" w="med" len="med"/>
+                    </a:lnR>
+                    <a:lnT w="6350" cap="flat" cmpd="sng" algn="ctr">
+                      <a:solidFill>
+                        <a:srgbClr val="BDC3C7"/>
+                      </a:solidFill>
+                      <a:prstDash val="solid"/>
+                      <a:round/>
+                      <a:headEnd type="none" w="med" len="med"/>
+                      <a:tailEnd type="none" w="med" len="med"/>
+                    </a:lnT>
+                    <a:lnB w="6350" cap="flat" cmpd="sng" algn="ctr">
+                      <a:solidFill>
+                        <a:srgbClr val="BDC3C7"/>
+                      </a:solidFill>
+                      <a:prstDash val="solid"/>
+                      <a:round/>
+                      <a:headEnd type="none" w="med" len="med"/>
+                      <a:tailEnd type="none" w="med" len="med"/>
+                    </a:lnB>
+                    <a:solidFill>
+                      <a:srgbClr val="FFFFFF"/>
+                    </a:solidFill>
+                  </a:tcPr>
+                </a:tc>
+                <a:tc>
+                  <a:txBody>
+                    <a:bodyPr/>
+                    <a:lstStyle/>
+                    <a:p>
+                      <a:pPr marL="0" indent="0" algn="ctr">
+                        <a:buNone/>
+                      </a:pPr>
+                      <a:r>
+                        <a:rPr lang="en-US" sz="1300" b="1" dirty="0">
+                          <a:solidFill>
+                            <a:srgbClr val="1E8449"/>
+                          </a:solidFill>
+                          <a:latin typeface="Calibri" pitchFamily="34" charset="0"/>
+                          <a:ea typeface="Calibri" pitchFamily="34" charset="-122"/>
+                          <a:cs typeface="Calibri" pitchFamily="34" charset="-120"/>
+                        </a:rPr>
+                        <a:t>1.50</a:t>
+                      </a:r>
+                      <a:endParaRPr lang="en-US" sz="1300" dirty="0">
+                        <a:latin typeface="Calibri" charset="0"/>
+                        <a:ea typeface="Calibri" charset="0"/>
+                        <a:cs typeface="Calibri" charset="0"/>
+                      </a:endParaRPr>
+                    </a:p>
+                  </a:txBody>
+                  <a:tcPr>
+                    <a:lnL w="6350" cap="flat" cmpd="sng" algn="ctr">
+                      <a:solidFill>
+                        <a:srgbClr val="BDC3C7"/>
+                      </a:solidFill>
+                      <a:prstDash val="solid"/>
+                      <a:round/>
+                      <a:headEnd type="none" w="med" len="med"/>
+                      <a:tailEnd type="none" w="med" len="med"/>
+                    </a:lnL>
+                    <a:lnR w="6350" cap="flat" cmpd="sng" algn="ctr">
+                      <a:solidFill>
+                        <a:srgbClr val="BDC3C7"/>
+                      </a:solidFill>
+                      <a:prstDash val="solid"/>
+                      <a:round/>
+                      <a:headEnd type="none" w="med" len="med"/>
+                      <a:tailEnd type="none" w="med" len="med"/>
+                    </a:lnR>
+                    <a:lnT w="6350" cap="flat" cmpd="sng" algn="ctr">
+                      <a:solidFill>
+                        <a:srgbClr val="BDC3C7"/>
+                      </a:solidFill>
+                      <a:prstDash val="solid"/>
+                      <a:round/>
+                      <a:headEnd type="none" w="med" len="med"/>
+                      <a:tailEnd type="none" w="med" len="med"/>
+                    </a:lnT>
+                    <a:lnB w="6350" cap="flat" cmpd="sng" algn="ctr">
+                      <a:solidFill>
+                        <a:srgbClr val="BDC3C7"/>
+                      </a:solidFill>
+                      <a:prstDash val="solid"/>
+                      <a:round/>
+                      <a:headEnd type="none" w="med" len="med"/>
+                      <a:tailEnd type="none" w="med" len="med"/>
+                    </a:lnB>
+                    <a:solidFill>
+                      <a:srgbClr val="FFFFFF"/>
+                    </a:solidFill>
+                  </a:tcPr>
+                </a:tc>
+                <a:tc>
+                  <a:txBody>
+                    <a:bodyPr/>
+                    <a:lstStyle/>
+                    <a:p>
+                      <a:pPr marL="0" indent="0" algn="ctr">
+                        <a:buNone/>
+                      </a:pPr>
+                      <a:r>
+                        <a:rPr lang="en-US" sz="1300" dirty="0">
+                          <a:solidFill>
+                            <a:srgbClr val="1E8449"/>
+                          </a:solidFill>
+                          <a:latin typeface="Calibri" pitchFamily="34" charset="0"/>
+                          <a:ea typeface="Calibri" pitchFamily="34" charset="-122"/>
+                          <a:cs typeface="Calibri" pitchFamily="34" charset="-120"/>
+                        </a:rPr>
+                        <a:t>Normal</a:t>
+                      </a:r>
+                      <a:endParaRPr lang="en-US" sz="1300" dirty="0">
+                        <a:latin typeface="Calibri" charset="0"/>
+                        <a:ea typeface="Calibri" charset="0"/>
+                        <a:cs typeface="Calibri" charset="0"/>
+                      </a:endParaRPr>
+                    </a:p>
+                  </a:txBody>
+                  <a:tcPr>
+                    <a:lnL w="6350" cap="flat" cmpd="sng" algn="ctr">
+                      <a:solidFill>
+                        <a:srgbClr val="BDC3C7"/>
+                      </a:solidFill>
+                      <a:prstDash val="solid"/>
+                      <a:round/>
+                      <a:headEnd type="none" w="med" len="med"/>
+                      <a:tailEnd type="none" w="med" len="med"/>
+                    </a:lnL>
+                    <a:lnR w="6350" cap="flat" cmpd="sng" algn="ctr">
+                      <a:solidFill>
+                        <a:srgbClr val="BDC3C7"/>
+                      </a:solidFill>
+                      <a:prstDash val="solid"/>
+                      <a:round/>
+                      <a:headEnd type="none" w="med" len="med"/>
+                      <a:tailEnd type="none" w="med" len="med"/>
+                    </a:lnR>
+                    <a:lnT w="6350" cap="flat" cmpd="sng" algn="ctr">
+                      <a:solidFill>
+                        <a:srgbClr val="BDC3C7"/>
+                      </a:solidFill>
+                      <a:prstDash val="solid"/>
+                      <a:round/>
+                      <a:headEnd type="none" w="med" len="med"/>
+                      <a:tailEnd type="none" w="med" len="med"/>
+                    </a:lnT>
+                    <a:lnB w="6350" cap="flat" cmpd="sng" algn="ctr">
+                      <a:solidFill>
+                        <a:srgbClr val="BDC3C7"/>
+                      </a:solidFill>
+                      <a:prstDash val="solid"/>
+                      <a:round/>
+                      <a:headEnd type="none" w="med" len="med"/>
+                      <a:tailEnd type="none" w="med" len="med"/>
+                    </a:lnB>
+                    <a:solidFill>
+                      <a:srgbClr val="FFFFFF"/>
+                    </a:solidFill>
+                  </a:tcPr>
+                </a:tc>
+                <a:extLst>
+                  <a:ext uri="{0D108BD9-81ED-4DB2-BD59-A6C34878D82A}">
+                    <a16:rowId xmlns:a16="http://schemas.microsoft.com/office/drawing/2014/main" val="10001"/>
+                  </a:ext>
+                </a:extLst>
+              </a:tr>
+              <a:tr h="475488">
+                <a:tc>
+                  <a:txBody>
+                    <a:bodyPr/>
+                    <a:lstStyle/>
+                    <a:p>
+                      <a:pPr marL="0" indent="0" algn="ctr">
+                        <a:buNone/>
+                      </a:pPr>
+                      <a:r>
+                        <a:rPr lang="en-US" sz="1300" dirty="0">
+                          <a:solidFill>
+                            <a:srgbClr val="000000"/>
+                          </a:solidFill>
+                          <a:latin typeface="Calibri" pitchFamily="34" charset="0"/>
+                          <a:ea typeface="Calibri" pitchFamily="34" charset="-122"/>
+                          <a:cs typeface="Calibri" pitchFamily="34" charset="-120"/>
+                        </a:rPr>
+                        <a:t>128</a:t>
+                      </a:r>
+                      <a:endParaRPr lang="en-US" sz="1300" dirty="0">
+                        <a:latin typeface="Calibri" charset="0"/>
+                        <a:ea typeface="Calibri" charset="0"/>
+                        <a:cs typeface="Calibri" charset="0"/>
+                      </a:endParaRPr>
+                    </a:p>
+                  </a:txBody>
+                  <a:tcPr>
+                    <a:lnL w="6350" cap="flat" cmpd="sng" algn="ctr">
+                      <a:solidFill>
+                        <a:srgbClr val="BDC3C7"/>
+                      </a:solidFill>
+                      <a:prstDash val="solid"/>
+                      <a:round/>
+                      <a:headEnd type="none" w="med" len="med"/>
+                      <a:tailEnd type="none" w="med" len="med"/>
+                    </a:lnL>
+                    <a:lnR w="6350" cap="flat" cmpd="sng" algn="ctr">
+                      <a:solidFill>
+                        <a:srgbClr val="BDC3C7"/>
+                      </a:solidFill>
+                      <a:prstDash val="solid"/>
+                      <a:round/>
+                      <a:headEnd type="none" w="med" len="med"/>
+                      <a:tailEnd type="none" w="med" len="med"/>
+                    </a:lnR>
+                    <a:lnT w="6350" cap="flat" cmpd="sng" algn="ctr">
+                      <a:solidFill>
+                        <a:srgbClr val="BDC3C7"/>
+                      </a:solidFill>
+                      <a:prstDash val="solid"/>
+                      <a:round/>
+                      <a:headEnd type="none" w="med" len="med"/>
+                      <a:tailEnd type="none" w="med" len="med"/>
+                    </a:lnT>
+                    <a:lnB w="6350" cap="flat" cmpd="sng" algn="ctr">
+                      <a:solidFill>
+                        <a:srgbClr val="BDC3C7"/>
+                      </a:solidFill>
+                      <a:prstDash val="solid"/>
+                      <a:round/>
+                      <a:headEnd type="none" w="med" len="med"/>
+                      <a:tailEnd type="none" w="med" len="med"/>
+                    </a:lnB>
+                    <a:solidFill>
+                      <a:srgbClr val="FFFFFF"/>
+                    </a:solidFill>
+                  </a:tcPr>
+                </a:tc>
+                <a:tc>
+                  <a:txBody>
+                    <a:bodyPr/>
+                    <a:lstStyle/>
+                    <a:p>
+                      <a:pPr marL="0" indent="0" algn="ctr">
+                        <a:buNone/>
+                      </a:pPr>
+                      <a:r>
+                        <a:rPr lang="en-US" sz="1300" dirty="0">
+                          <a:solidFill>
+                            <a:srgbClr val="000000"/>
+                          </a:solidFill>
+                          <a:latin typeface="Calibri" pitchFamily="34" charset="0"/>
+                          <a:ea typeface="Calibri" pitchFamily="34" charset="-122"/>
+                          <a:cs typeface="Calibri" pitchFamily="34" charset="-120"/>
+                        </a:rPr>
+                        <a:t>0.00</a:t>
+                      </a:r>
+                      <a:endParaRPr lang="en-US" sz="1300" dirty="0">
+                        <a:latin typeface="Calibri" charset="0"/>
+                        <a:ea typeface="Calibri" charset="0"/>
+                        <a:cs typeface="Calibri" charset="0"/>
+                      </a:endParaRPr>
+                    </a:p>
+                  </a:txBody>
+                  <a:tcPr>
+                    <a:lnL w="6350" cap="flat" cmpd="sng" algn="ctr">
+                      <a:solidFill>
+                        <a:srgbClr val="BDC3C7"/>
+                      </a:solidFill>
+                      <a:prstDash val="solid"/>
+                      <a:round/>
+                      <a:headEnd type="none" w="med" len="med"/>
+                      <a:tailEnd type="none" w="med" len="med"/>
+                    </a:lnL>
+                    <a:lnR w="6350" cap="flat" cmpd="sng" algn="ctr">
+                      <a:solidFill>
+                        <a:srgbClr val="BDC3C7"/>
+                      </a:solidFill>
+                      <a:prstDash val="solid"/>
+                      <a:round/>
+                      <a:headEnd type="none" w="med" len="med"/>
+                      <a:tailEnd type="none" w="med" len="med"/>
+                    </a:lnR>
+                    <a:lnT w="6350" cap="flat" cmpd="sng" algn="ctr">
+                      <a:solidFill>
+                        <a:srgbClr val="BDC3C7"/>
+                      </a:solidFill>
+                      <a:prstDash val="solid"/>
+                      <a:round/>
+                      <a:headEnd type="none" w="med" len="med"/>
+                      <a:tailEnd type="none" w="med" len="med"/>
+                    </a:lnT>
+                    <a:lnB w="6350" cap="flat" cmpd="sng" algn="ctr">
+                      <a:solidFill>
+                        <a:srgbClr val="BDC3C7"/>
+                      </a:solidFill>
+                      <a:prstDash val="solid"/>
+                      <a:round/>
+                      <a:headEnd type="none" w="med" len="med"/>
+                      <a:tailEnd type="none" w="med" len="med"/>
+                    </a:lnB>
+                    <a:solidFill>
+                      <a:srgbClr val="FFFFFF"/>
+                    </a:solidFill>
+                  </a:tcPr>
+                </a:tc>
+                <a:tc>
+                  <a:txBody>
+                    <a:bodyPr/>
+                    <a:lstStyle/>
+                    <a:p>
+                      <a:pPr marL="0" indent="0" algn="ctr">
+                        <a:buNone/>
+                      </a:pPr>
+                      <a:r>
+                        <a:rPr lang="en-US" sz="1300" b="1" dirty="0">
+                          <a:solidFill>
+                            <a:srgbClr val="9A7D0A"/>
+                          </a:solidFill>
+                          <a:latin typeface="Calibri" pitchFamily="34" charset="0"/>
+                          <a:ea typeface="Calibri" pitchFamily="34" charset="-122"/>
+                          <a:cs typeface="Calibri" pitchFamily="34" charset="-120"/>
+                        </a:rPr>
+                        <a:t>0.87</a:t>
+                      </a:r>
+                      <a:endParaRPr lang="en-US" sz="1300" dirty="0">
+                        <a:latin typeface="Calibri" charset="0"/>
+                        <a:ea typeface="Calibri" charset="0"/>
+                        <a:cs typeface="Calibri" charset="0"/>
+                      </a:endParaRPr>
+                    </a:p>
+                  </a:txBody>
+                  <a:tcPr>
+                    <a:lnL w="6350" cap="flat" cmpd="sng" algn="ctr">
+                      <a:solidFill>
+                        <a:srgbClr val="BDC3C7"/>
+                      </a:solidFill>
+                      <a:prstDash val="solid"/>
+                      <a:round/>
+                      <a:headEnd type="none" w="med" len="med"/>
+                      <a:tailEnd type="none" w="med" len="med"/>
+                    </a:lnL>
+                    <a:lnR w="6350" cap="flat" cmpd="sng" algn="ctr">
+                      <a:solidFill>
+                        <a:srgbClr val="BDC3C7"/>
+                      </a:solidFill>
+                      <a:prstDash val="solid"/>
+                      <a:round/>
+                      <a:headEnd type="none" w="med" len="med"/>
+                      <a:tailEnd type="none" w="med" len="med"/>
+                    </a:lnR>
+                    <a:lnT w="6350" cap="flat" cmpd="sng" algn="ctr">
+                      <a:solidFill>
+                        <a:srgbClr val="BDC3C7"/>
+                      </a:solidFill>
+                      <a:prstDash val="solid"/>
+                      <a:round/>
+                      <a:headEnd type="none" w="med" len="med"/>
+                      <a:tailEnd type="none" w="med" len="med"/>
+                    </a:lnT>
+                    <a:lnB w="6350" cap="flat" cmpd="sng" algn="ctr">
+                      <a:solidFill>
+                        <a:srgbClr val="BDC3C7"/>
+                      </a:solidFill>
+                      <a:prstDash val="solid"/>
+                      <a:round/>
+                      <a:headEnd type="none" w="med" len="med"/>
+                      <a:tailEnd type="none" w="med" len="med"/>
+                    </a:lnB>
+                    <a:solidFill>
+                      <a:srgbClr val="FFFFFF"/>
+                    </a:solidFill>
+                  </a:tcPr>
+                </a:tc>
+                <a:tc>
+                  <a:txBody>
+                    <a:bodyPr/>
+                    <a:lstStyle/>
+                    <a:p>
+                      <a:pPr marL="0" indent="0" algn="ctr">
+                        <a:buNone/>
+                      </a:pPr>
+                      <a:r>
+                        <a:rPr lang="en-US" sz="1300" dirty="0">
+                          <a:solidFill>
+                            <a:srgbClr val="000000"/>
+                          </a:solidFill>
+                          <a:latin typeface="Calibri" pitchFamily="34" charset="0"/>
+                          <a:ea typeface="Calibri" pitchFamily="34" charset="-122"/>
+                          <a:cs typeface="Calibri" pitchFamily="34" charset="-120"/>
+                        </a:rPr>
+                        <a:t>0.00</a:t>
+                      </a:r>
+                      <a:endParaRPr lang="en-US" sz="1300" dirty="0">
+                        <a:latin typeface="Calibri" charset="0"/>
+                        <a:ea typeface="Calibri" charset="0"/>
+                        <a:cs typeface="Calibri" charset="0"/>
+                      </a:endParaRPr>
+                    </a:p>
+                  </a:txBody>
+                  <a:tcPr>
+                    <a:lnL w="6350" cap="flat" cmpd="sng" algn="ctr">
+                      <a:solidFill>
+                        <a:srgbClr val="BDC3C7"/>
+                      </a:solidFill>
+                      <a:prstDash val="solid"/>
+                      <a:round/>
+                      <a:headEnd type="none" w="med" len="med"/>
+                      <a:tailEnd type="none" w="med" len="med"/>
+                    </a:lnL>
+                    <a:lnR w="6350" cap="flat" cmpd="sng" algn="ctr">
+                      <a:solidFill>
+                        <a:srgbClr val="BDC3C7"/>
+                      </a:solidFill>
+                      <a:prstDash val="solid"/>
+                      <a:round/>
+                      <a:headEnd type="none" w="med" len="med"/>
+                      <a:tailEnd type="none" w="med" len="med"/>
+                    </a:lnR>
+                    <a:lnT w="6350" cap="flat" cmpd="sng" algn="ctr">
+                      <a:solidFill>
+                        <a:srgbClr val="BDC3C7"/>
+                      </a:solidFill>
+                      <a:prstDash val="solid"/>
+                      <a:round/>
+                      <a:headEnd type="none" w="med" len="med"/>
+                      <a:tailEnd type="none" w="med" len="med"/>
+                    </a:lnT>
+                    <a:lnB w="6350" cap="flat" cmpd="sng" algn="ctr">
+                      <a:solidFill>
+                        <a:srgbClr val="BDC3C7"/>
+                      </a:solidFill>
+                      <a:prstDash val="solid"/>
+                      <a:round/>
+                      <a:headEnd type="none" w="med" len="med"/>
+                      <a:tailEnd type="none" w="med" len="med"/>
+                    </a:lnB>
+                    <a:solidFill>
+                      <a:srgbClr val="FFFFFF"/>
+                    </a:solidFill>
+                  </a:tcPr>
+                </a:tc>
+                <a:tc>
+                  <a:txBody>
+                    <a:bodyPr/>
+                    <a:lstStyle/>
+                    <a:p>
+                      <a:pPr marL="0" indent="0" algn="ctr">
+                        <a:buNone/>
+                      </a:pPr>
+                      <a:r>
+                        <a:rPr lang="en-US" sz="1300" dirty="0">
+                          <a:solidFill>
+                            <a:srgbClr val="000000"/>
+                          </a:solidFill>
+                          <a:latin typeface="Calibri" pitchFamily="34" charset="0"/>
+                          <a:ea typeface="Calibri" pitchFamily="34" charset="-122"/>
+                          <a:cs typeface="Calibri" pitchFamily="34" charset="-120"/>
+                        </a:rPr>
+                        <a:t>0.00</a:t>
+                      </a:r>
+                      <a:endParaRPr lang="en-US" sz="1300" dirty="0">
+                        <a:latin typeface="Calibri" charset="0"/>
+                        <a:ea typeface="Calibri" charset="0"/>
+                        <a:cs typeface="Calibri" charset="0"/>
+                      </a:endParaRPr>
+                    </a:p>
+                  </a:txBody>
+                  <a:tcPr>
+                    <a:lnL w="6350" cap="flat" cmpd="sng" algn="ctr">
+                      <a:solidFill>
+                        <a:srgbClr val="BDC3C7"/>
+                      </a:solidFill>
+                      <a:prstDash val="solid"/>
+                      <a:round/>
+                      <a:headEnd type="none" w="med" len="med"/>
+                      <a:tailEnd type="none" w="med" len="med"/>
+                    </a:lnL>
+                    <a:lnR w="6350" cap="flat" cmpd="sng" algn="ctr">
+                      <a:solidFill>
+                        <a:srgbClr val="BDC3C7"/>
+                      </a:solidFill>
+                      <a:prstDash val="solid"/>
+                      <a:round/>
+                      <a:headEnd type="none" w="med" len="med"/>
+                      <a:tailEnd type="none" w="med" len="med"/>
+                    </a:lnR>
+                    <a:lnT w="6350" cap="flat" cmpd="sng" algn="ctr">
+                      <a:solidFill>
+                        <a:srgbClr val="BDC3C7"/>
+                      </a:solidFill>
+                      <a:prstDash val="solid"/>
+                      <a:round/>
+                      <a:headEnd type="none" w="med" len="med"/>
+                      <a:tailEnd type="none" w="med" len="med"/>
+                    </a:lnT>
+                    <a:lnB w="6350" cap="flat" cmpd="sng" algn="ctr">
+                      <a:solidFill>
+                        <a:srgbClr val="BDC3C7"/>
+                      </a:solidFill>
+                      <a:prstDash val="solid"/>
+                      <a:round/>
+                      <a:headEnd type="none" w="med" len="med"/>
+                      <a:tailEnd type="none" w="med" len="med"/>
+                    </a:lnB>
+                    <a:solidFill>
+                      <a:srgbClr val="FFFFFF"/>
+                    </a:solidFill>
+                  </a:tcPr>
+                </a:tc>
+                <a:tc>
+                  <a:txBody>
+                    <a:bodyPr/>
+                    <a:lstStyle/>
+                    <a:p>
+                      <a:pPr marL="0" indent="0" algn="ctr">
+                        <a:buNone/>
+                      </a:pPr>
+                      <a:r>
+                        <a:rPr lang="en-US" sz="1300" b="1" dirty="0">
+                          <a:solidFill>
+                            <a:srgbClr val="9A7D0A"/>
+                          </a:solidFill>
+                          <a:latin typeface="Calibri" pitchFamily="34" charset="0"/>
+                          <a:ea typeface="Calibri" pitchFamily="34" charset="-122"/>
+                          <a:cs typeface="Calibri" pitchFamily="34" charset="-120"/>
+                        </a:rPr>
+                        <a:t>4.00</a:t>
+                      </a:r>
+                      <a:endParaRPr lang="en-US" sz="1300" dirty="0">
+                        <a:latin typeface="Calibri" charset="0"/>
+                        <a:ea typeface="Calibri" charset="0"/>
+                        <a:cs typeface="Calibri" charset="0"/>
+                      </a:endParaRPr>
+                    </a:p>
+                  </a:txBody>
+                  <a:tcPr>
+                    <a:lnL w="6350" cap="flat" cmpd="sng" algn="ctr">
+                      <a:solidFill>
+                        <a:srgbClr val="BDC3C7"/>
+                      </a:solidFill>
+                      <a:prstDash val="solid"/>
+                      <a:round/>
+                      <a:headEnd type="none" w="med" len="med"/>
+                      <a:tailEnd type="none" w="med" len="med"/>
+                    </a:lnL>
+                    <a:lnR w="6350" cap="flat" cmpd="sng" algn="ctr">
+                      <a:solidFill>
+                        <a:srgbClr val="BDC3C7"/>
+                      </a:solidFill>
+                      <a:prstDash val="solid"/>
+                      <a:round/>
+                      <a:headEnd type="none" w="med" len="med"/>
+                      <a:tailEnd type="none" w="med" len="med"/>
+                    </a:lnR>
+                    <a:lnT w="6350" cap="flat" cmpd="sng" algn="ctr">
+                      <a:solidFill>
+                        <a:srgbClr val="BDC3C7"/>
+                      </a:solidFill>
+                      <a:prstDash val="solid"/>
+                      <a:round/>
+                      <a:headEnd type="none" w="med" len="med"/>
+                      <a:tailEnd type="none" w="med" len="med"/>
+                    </a:lnT>
+                    <a:lnB w="6350" cap="flat" cmpd="sng" algn="ctr">
+                      <a:solidFill>
+                        <a:srgbClr val="BDC3C7"/>
+                      </a:solidFill>
+                      <a:prstDash val="solid"/>
+                      <a:round/>
+                      <a:headEnd type="none" w="med" len="med"/>
+                      <a:tailEnd type="none" w="med" len="med"/>
+                    </a:lnB>
+                    <a:solidFill>
+                      <a:srgbClr val="FFFFFF"/>
+                    </a:solidFill>
+                  </a:tcPr>
+                </a:tc>
+                <a:tc>
+                  <a:txBody>
+                    <a:bodyPr/>
+                    <a:lstStyle/>
+                    <a:p>
+                      <a:pPr marL="0" indent="0" algn="ctr">
+                        <a:buNone/>
+                      </a:pPr>
+                      <a:r>
+                        <a:rPr lang="en-US" sz="1300" dirty="0">
+                          <a:solidFill>
+                            <a:srgbClr val="9A7D0A"/>
+                          </a:solidFill>
+                          <a:latin typeface="Calibri" pitchFamily="34" charset="0"/>
+                          <a:ea typeface="Calibri" pitchFamily="34" charset="-122"/>
+                          <a:cs typeface="Calibri" pitchFamily="34" charset="-120"/>
+                        </a:rPr>
+                        <a:t>Elevada</a:t>
+                      </a:r>
+                      <a:endParaRPr lang="en-US" sz="1300" dirty="0">
+                        <a:latin typeface="Calibri" charset="0"/>
+                        <a:ea typeface="Calibri" charset="0"/>
+                        <a:cs typeface="Calibri" charset="0"/>
+                      </a:endParaRPr>
+                    </a:p>
+                  </a:txBody>
+                  <a:tcPr>
+                    <a:lnL w="6350" cap="flat" cmpd="sng" algn="ctr">
+                      <a:solidFill>
+                        <a:srgbClr val="BDC3C7"/>
+                      </a:solidFill>
+                      <a:prstDash val="solid"/>
+                      <a:round/>
+                      <a:headEnd type="none" w="med" len="med"/>
+                      <a:tailEnd type="none" w="med" len="med"/>
+                    </a:lnL>
+                    <a:lnR w="6350" cap="flat" cmpd="sng" algn="ctr">
+                      <a:solidFill>
+                        <a:srgbClr val="BDC3C7"/>
+                      </a:solidFill>
+                      <a:prstDash val="solid"/>
+                      <a:round/>
+                      <a:headEnd type="none" w="med" len="med"/>
+                      <a:tailEnd type="none" w="med" len="med"/>
+                    </a:lnR>
+                    <a:lnT w="6350" cap="flat" cmpd="sng" algn="ctr">
+                      <a:solidFill>
+                        <a:srgbClr val="BDC3C7"/>
+                      </a:solidFill>
+                      <a:prstDash val="solid"/>
+                      <a:round/>
+                      <a:headEnd type="none" w="med" len="med"/>
+                      <a:tailEnd type="none" w="med" len="med"/>
+                    </a:lnT>
+                    <a:lnB w="6350" cap="flat" cmpd="sng" algn="ctr">
+                      <a:solidFill>
+                        <a:srgbClr val="BDC3C7"/>
+                      </a:solidFill>
+                      <a:prstDash val="solid"/>
+                      <a:round/>
+                      <a:headEnd type="none" w="med" len="med"/>
+                      <a:tailEnd type="none" w="med" len="med"/>
+                    </a:lnB>
+                    <a:solidFill>
+                      <a:srgbClr val="FFFFFF"/>
+                    </a:solidFill>
+                  </a:tcPr>
+                </a:tc>
+                <a:extLst>
+                  <a:ext uri="{0D108BD9-81ED-4DB2-BD59-A6C34878D82A}">
+                    <a16:rowId xmlns:a16="http://schemas.microsoft.com/office/drawing/2014/main" val="10002"/>
+                  </a:ext>
+                </a:extLst>
+              </a:tr>
+              <a:tr h="475488">
+                <a:tc>
+                  <a:txBody>
+                    <a:bodyPr/>
+                    <a:lstStyle/>
+                    <a:p>
+                      <a:pPr marL="0" indent="0" algn="ctr">
+                        <a:buNone/>
+                      </a:pPr>
+                      <a:r>
+                        <a:rPr lang="en-US" sz="1300" dirty="0">
+                          <a:solidFill>
+                            <a:srgbClr val="000000"/>
+                          </a:solidFill>
+                          <a:latin typeface="Calibri" pitchFamily="34" charset="0"/>
+                          <a:ea typeface="Calibri" pitchFamily="34" charset="-122"/>
+                          <a:cs typeface="Calibri" pitchFamily="34" charset="-120"/>
+                        </a:rPr>
+                        <a:t>150</a:t>
+                      </a:r>
+                      <a:endParaRPr lang="en-US" sz="1300" dirty="0">
+                        <a:latin typeface="Calibri" charset="0"/>
+                        <a:ea typeface="Calibri" charset="0"/>
+                        <a:cs typeface="Calibri" charset="0"/>
+                      </a:endParaRPr>
+                    </a:p>
+                  </a:txBody>
+                  <a:tcPr>
+                    <a:lnL w="6350" cap="flat" cmpd="sng" algn="ctr">
+                      <a:solidFill>
+                        <a:srgbClr val="BDC3C7"/>
+                      </a:solidFill>
+                      <a:prstDash val="solid"/>
+                      <a:round/>
+                      <a:headEnd type="none" w="med" len="med"/>
+                      <a:tailEnd type="none" w="med" len="med"/>
+                    </a:lnL>
+                    <a:lnR w="6350" cap="flat" cmpd="sng" algn="ctr">
+                      <a:solidFill>
+                        <a:srgbClr val="BDC3C7"/>
+                      </a:solidFill>
+                      <a:prstDash val="solid"/>
+                      <a:round/>
+                      <a:headEnd type="none" w="med" len="med"/>
+                      <a:tailEnd type="none" w="med" len="med"/>
+                    </a:lnR>
+                    <a:lnT w="6350" cap="flat" cmpd="sng" algn="ctr">
+                      <a:solidFill>
+                        <a:srgbClr val="BDC3C7"/>
+                      </a:solidFill>
+                      <a:prstDash val="solid"/>
+                      <a:round/>
+                      <a:headEnd type="none" w="med" len="med"/>
+                      <a:tailEnd type="none" w="med" len="med"/>
+                    </a:lnT>
+                    <a:lnB w="6350" cap="flat" cmpd="sng" algn="ctr">
+                      <a:solidFill>
+                        <a:srgbClr val="BDC3C7"/>
+                      </a:solidFill>
+                      <a:prstDash val="solid"/>
+                      <a:round/>
+                      <a:headEnd type="none" w="med" len="med"/>
+                      <a:tailEnd type="none" w="med" len="med"/>
+                    </a:lnB>
+                    <a:solidFill>
+                      <a:srgbClr val="FFFFFF"/>
+                    </a:solidFill>
+                  </a:tcPr>
+                </a:tc>
+                <a:tc>
+                  <a:txBody>
+                    <a:bodyPr/>
+                    <a:lstStyle/>
+                    <a:p>
+                      <a:pPr marL="0" indent="0" algn="ctr">
+                        <a:buNone/>
+                      </a:pPr>
+                      <a:r>
+                        <a:rPr lang="en-US" sz="1300" dirty="0">
+                          <a:solidFill>
+                            <a:srgbClr val="000000"/>
+                          </a:solidFill>
+                          <a:latin typeface="Calibri" pitchFamily="34" charset="0"/>
+                          <a:ea typeface="Calibri" pitchFamily="34" charset="-122"/>
+                          <a:cs typeface="Calibri" pitchFamily="34" charset="-120"/>
+                        </a:rPr>
+                        <a:t>0.00</a:t>
+                      </a:r>
+                      <a:endParaRPr lang="en-US" sz="1300" dirty="0">
+                        <a:latin typeface="Calibri" charset="0"/>
+                        <a:ea typeface="Calibri" charset="0"/>
+                        <a:cs typeface="Calibri" charset="0"/>
+                      </a:endParaRPr>
+                    </a:p>
+                  </a:txBody>
+                  <a:tcPr>
+                    <a:lnL w="6350" cap="flat" cmpd="sng" algn="ctr">
+                      <a:solidFill>
+                        <a:srgbClr val="BDC3C7"/>
+                      </a:solidFill>
+                      <a:prstDash val="solid"/>
+                      <a:round/>
+                      <a:headEnd type="none" w="med" len="med"/>
+                      <a:tailEnd type="none" w="med" len="med"/>
+                    </a:lnL>
+                    <a:lnR w="6350" cap="flat" cmpd="sng" algn="ctr">
+                      <a:solidFill>
+                        <a:srgbClr val="BDC3C7"/>
+                      </a:solidFill>
+                      <a:prstDash val="solid"/>
+                      <a:round/>
+                      <a:headEnd type="none" w="med" len="med"/>
+                      <a:tailEnd type="none" w="med" len="med"/>
+                    </a:lnR>
+                    <a:lnT w="6350" cap="flat" cmpd="sng" algn="ctr">
+                      <a:solidFill>
+                        <a:srgbClr val="BDC3C7"/>
+                      </a:solidFill>
+                      <a:prstDash val="solid"/>
+                      <a:round/>
+                      <a:headEnd type="none" w="med" len="med"/>
+                      <a:tailEnd type="none" w="med" len="med"/>
+                    </a:lnT>
+                    <a:lnB w="6350" cap="flat" cmpd="sng" algn="ctr">
+                      <a:solidFill>
+                        <a:srgbClr val="BDC3C7"/>
+                      </a:solidFill>
+                      <a:prstDash val="solid"/>
+                      <a:round/>
+                      <a:headEnd type="none" w="med" len="med"/>
+                      <a:tailEnd type="none" w="med" len="med"/>
+                    </a:lnB>
+                    <a:solidFill>
+                      <a:srgbClr val="FFFFFF"/>
+                    </a:solidFill>
+                  </a:tcPr>
+                </a:tc>
+                <a:tc>
+                  <a:txBody>
+                    <a:bodyPr/>
+                    <a:lstStyle/>
+                    <a:p>
+                      <a:pPr marL="0" indent="0" algn="ctr">
+                        <a:buNone/>
+                      </a:pPr>
+                      <a:r>
+                        <a:rPr lang="en-US" sz="1300" dirty="0">
+                          <a:solidFill>
+                            <a:srgbClr val="000000"/>
+                          </a:solidFill>
+                          <a:latin typeface="Calibri" pitchFamily="34" charset="0"/>
+                          <a:ea typeface="Calibri" pitchFamily="34" charset="-122"/>
+                          <a:cs typeface="Calibri" pitchFamily="34" charset="-120"/>
+                        </a:rPr>
+                        <a:t>0.00</a:t>
+                      </a:r>
+                      <a:endParaRPr lang="en-US" sz="1300" dirty="0">
+                        <a:latin typeface="Calibri" charset="0"/>
+                        <a:ea typeface="Calibri" charset="0"/>
+                        <a:cs typeface="Calibri" charset="0"/>
+                      </a:endParaRPr>
+                    </a:p>
+                  </a:txBody>
+                  <a:tcPr>
+                    <a:lnL w="6350" cap="flat" cmpd="sng" algn="ctr">
+                      <a:solidFill>
+                        <a:srgbClr val="BDC3C7"/>
+                      </a:solidFill>
+                      <a:prstDash val="solid"/>
+                      <a:round/>
+                      <a:headEnd type="none" w="med" len="med"/>
+                      <a:tailEnd type="none" w="med" len="med"/>
+                    </a:lnL>
+                    <a:lnR w="6350" cap="flat" cmpd="sng" algn="ctr">
+                      <a:solidFill>
+                        <a:srgbClr val="BDC3C7"/>
+                      </a:solidFill>
+                      <a:prstDash val="solid"/>
+                      <a:round/>
+                      <a:headEnd type="none" w="med" len="med"/>
+                      <a:tailEnd type="none" w="med" len="med"/>
+                    </a:lnR>
+                    <a:lnT w="6350" cap="flat" cmpd="sng" algn="ctr">
+                      <a:solidFill>
+                        <a:srgbClr val="BDC3C7"/>
+                      </a:solidFill>
+                      <a:prstDash val="solid"/>
+                      <a:round/>
+                      <a:headEnd type="none" w="med" len="med"/>
+                      <a:tailEnd type="none" w="med" len="med"/>
+                    </a:lnT>
+                    <a:lnB w="6350" cap="flat" cmpd="sng" algn="ctr">
+                      <a:solidFill>
+                        <a:srgbClr val="BDC3C7"/>
+                      </a:solidFill>
+                      <a:prstDash val="solid"/>
+                      <a:round/>
+                      <a:headEnd type="none" w="med" len="med"/>
+                      <a:tailEnd type="none" w="med" len="med"/>
+                    </a:lnB>
+                    <a:solidFill>
+                      <a:srgbClr val="FFFFFF"/>
+                    </a:solidFill>
+                  </a:tcPr>
+                </a:tc>
+                <a:tc>
+                  <a:txBody>
+                    <a:bodyPr/>
+                    <a:lstStyle/>
+                    <a:p>
+                      <a:pPr marL="0" indent="0" algn="ctr">
+                        <a:buNone/>
+                      </a:pPr>
+                      <a:r>
+                        <a:rPr lang="en-US" sz="1300" b="1" dirty="0">
+                          <a:solidFill>
+                            <a:srgbClr val="A04000"/>
+                          </a:solidFill>
+                          <a:latin typeface="Calibri" pitchFamily="34" charset="0"/>
+                          <a:ea typeface="Calibri" pitchFamily="34" charset="-122"/>
+                          <a:cs typeface="Calibri" pitchFamily="34" charset="-120"/>
+                        </a:rPr>
+                        <a:t>1.00</a:t>
+                      </a:r>
+                      <a:endParaRPr lang="en-US" sz="1300" dirty="0">
+                        <a:latin typeface="Calibri" charset="0"/>
+                        <a:ea typeface="Calibri" charset="0"/>
+                        <a:cs typeface="Calibri" charset="0"/>
+                      </a:endParaRPr>
+                    </a:p>
+                  </a:txBody>
+                  <a:tcPr>
+                    <a:lnL w="6350" cap="flat" cmpd="sng" algn="ctr">
+                      <a:solidFill>
+                        <a:srgbClr val="BDC3C7"/>
+                      </a:solidFill>
+                      <a:prstDash val="solid"/>
+                      <a:round/>
+                      <a:headEnd type="none" w="med" len="med"/>
+                      <a:tailEnd type="none" w="med" len="med"/>
+                    </a:lnL>
+                    <a:lnR w="6350" cap="flat" cmpd="sng" algn="ctr">
+                      <a:solidFill>
+                        <a:srgbClr val="BDC3C7"/>
+                      </a:solidFill>
+                      <a:prstDash val="solid"/>
+                      <a:round/>
+                      <a:headEnd type="none" w="med" len="med"/>
+                      <a:tailEnd type="none" w="med" len="med"/>
+                    </a:lnR>
+                    <a:lnT w="6350" cap="flat" cmpd="sng" algn="ctr">
+                      <a:solidFill>
+                        <a:srgbClr val="BDC3C7"/>
+                      </a:solidFill>
+                      <a:prstDash val="solid"/>
+                      <a:round/>
+                      <a:headEnd type="none" w="med" len="med"/>
+                      <a:tailEnd type="none" w="med" len="med"/>
+                    </a:lnT>
+                    <a:lnB w="6350" cap="flat" cmpd="sng" algn="ctr">
+                      <a:solidFill>
+                        <a:srgbClr val="BDC3C7"/>
+                      </a:solidFill>
+                      <a:prstDash val="solid"/>
+                      <a:round/>
+                      <a:headEnd type="none" w="med" len="med"/>
+                      <a:tailEnd type="none" w="med" len="med"/>
+                    </a:lnB>
+                    <a:solidFill>
+                      <a:srgbClr val="FFFFFF"/>
+                    </a:solidFill>
+                  </a:tcPr>
+                </a:tc>
+                <a:tc>
+                  <a:txBody>
+                    <a:bodyPr/>
+                    <a:lstStyle/>
+                    <a:p>
+                      <a:pPr marL="0" indent="0" algn="ctr">
+                        <a:buNone/>
+                      </a:pPr>
+                      <a:r>
+                        <a:rPr lang="en-US" sz="1300" dirty="0">
+                          <a:solidFill>
+                            <a:srgbClr val="000000"/>
+                          </a:solidFill>
+                          <a:latin typeface="Calibri" pitchFamily="34" charset="0"/>
+                          <a:ea typeface="Calibri" pitchFamily="34" charset="-122"/>
+                          <a:cs typeface="Calibri" pitchFamily="34" charset="-120"/>
+                        </a:rPr>
+                        <a:t>0.00</a:t>
+                      </a:r>
+                      <a:endParaRPr lang="en-US" sz="1300" dirty="0">
+                        <a:latin typeface="Calibri" charset="0"/>
+                        <a:ea typeface="Calibri" charset="0"/>
+                        <a:cs typeface="Calibri" charset="0"/>
+                      </a:endParaRPr>
+                    </a:p>
+                  </a:txBody>
+                  <a:tcPr>
+                    <a:lnL w="6350" cap="flat" cmpd="sng" algn="ctr">
+                      <a:solidFill>
+                        <a:srgbClr val="BDC3C7"/>
+                      </a:solidFill>
+                      <a:prstDash val="solid"/>
+                      <a:round/>
+                      <a:headEnd type="none" w="med" len="med"/>
+                      <a:tailEnd type="none" w="med" len="med"/>
+                    </a:lnL>
+                    <a:lnR w="6350" cap="flat" cmpd="sng" algn="ctr">
+                      <a:solidFill>
+                        <a:srgbClr val="BDC3C7"/>
+                      </a:solidFill>
+                      <a:prstDash val="solid"/>
+                      <a:round/>
+                      <a:headEnd type="none" w="med" len="med"/>
+                      <a:tailEnd type="none" w="med" len="med"/>
+                    </a:lnR>
+                    <a:lnT w="6350" cap="flat" cmpd="sng" algn="ctr">
+                      <a:solidFill>
+                        <a:srgbClr val="BDC3C7"/>
+                      </a:solidFill>
+                      <a:prstDash val="solid"/>
+                      <a:round/>
+                      <a:headEnd type="none" w="med" len="med"/>
+                      <a:tailEnd type="none" w="med" len="med"/>
+                    </a:lnT>
+                    <a:lnB w="6350" cap="flat" cmpd="sng" algn="ctr">
+                      <a:solidFill>
+                        <a:srgbClr val="BDC3C7"/>
+                      </a:solidFill>
+                      <a:prstDash val="solid"/>
+                      <a:round/>
+                      <a:headEnd type="none" w="med" len="med"/>
+                      <a:tailEnd type="none" w="med" len="med"/>
+                    </a:lnB>
+                    <a:solidFill>
+                      <a:srgbClr val="FFFFFF"/>
+                    </a:solidFill>
+                  </a:tcPr>
+                </a:tc>
+                <a:tc>
+                  <a:txBody>
+                    <a:bodyPr/>
+                    <a:lstStyle/>
+                    <a:p>
+                      <a:pPr marL="0" indent="0" algn="ctr">
+                        <a:buNone/>
+                      </a:pPr>
+                      <a:r>
+                        <a:rPr lang="en-US" sz="1300" b="1" dirty="0">
+                          <a:solidFill>
+                            <a:srgbClr val="A04000"/>
+                          </a:solidFill>
+                          <a:latin typeface="Calibri" pitchFamily="34" charset="0"/>
+                          <a:ea typeface="Calibri" pitchFamily="34" charset="-122"/>
+                          <a:cs typeface="Calibri" pitchFamily="34" charset="-120"/>
+                        </a:rPr>
+                        <a:t>6.50</a:t>
+                      </a:r>
+                      <a:endParaRPr lang="en-US" sz="1300" dirty="0">
+                        <a:latin typeface="Calibri" charset="0"/>
+                        <a:ea typeface="Calibri" charset="0"/>
+                        <a:cs typeface="Calibri" charset="0"/>
+                      </a:endParaRPr>
+                    </a:p>
+                  </a:txBody>
+                  <a:tcPr>
+                    <a:lnL w="6350" cap="flat" cmpd="sng" algn="ctr">
+                      <a:solidFill>
+                        <a:srgbClr val="BDC3C7"/>
+                      </a:solidFill>
+                      <a:prstDash val="solid"/>
+                      <a:round/>
+                      <a:headEnd type="none" w="med" len="med"/>
+                      <a:tailEnd type="none" w="med" len="med"/>
+                    </a:lnL>
+                    <a:lnR w="6350" cap="flat" cmpd="sng" algn="ctr">
+                      <a:solidFill>
+                        <a:srgbClr val="BDC3C7"/>
+                      </a:solidFill>
+                      <a:prstDash val="solid"/>
+                      <a:round/>
+                      <a:headEnd type="none" w="med" len="med"/>
+                      <a:tailEnd type="none" w="med" len="med"/>
+                    </a:lnR>
+                    <a:lnT w="6350" cap="flat" cmpd="sng" algn="ctr">
+                      <a:solidFill>
+                        <a:srgbClr val="BDC3C7"/>
+                      </a:solidFill>
+                      <a:prstDash val="solid"/>
+                      <a:round/>
+                      <a:headEnd type="none" w="med" len="med"/>
+                      <a:tailEnd type="none" w="med" len="med"/>
+                    </a:lnT>
+                    <a:lnB w="6350" cap="flat" cmpd="sng" algn="ctr">
+                      <a:solidFill>
+                        <a:srgbClr val="BDC3C7"/>
+                      </a:solidFill>
+                      <a:prstDash val="solid"/>
+                      <a:round/>
+                      <a:headEnd type="none" w="med" len="med"/>
+                      <a:tailEnd type="none" w="med" len="med"/>
+                    </a:lnB>
+                    <a:solidFill>
+                      <a:srgbClr val="FFFFFF"/>
+                    </a:solidFill>
+                  </a:tcPr>
+                </a:tc>
+                <a:tc>
+                  <a:txBody>
+                    <a:bodyPr/>
+                    <a:lstStyle/>
+                    <a:p>
+                      <a:pPr marL="0" indent="0" algn="ctr">
+                        <a:buNone/>
+                      </a:pPr>
+                      <a:r>
+                        <a:rPr lang="en-US" sz="1300" dirty="0">
+                          <a:solidFill>
+                            <a:srgbClr val="A04000"/>
+                          </a:solidFill>
+                          <a:latin typeface="Calibri" pitchFamily="34" charset="0"/>
+                          <a:ea typeface="Calibri" pitchFamily="34" charset="-122"/>
+                          <a:cs typeface="Calibri" pitchFamily="34" charset="-120"/>
+                        </a:rPr>
+                        <a:t>Alta</a:t>
+                      </a:r>
+                      <a:endParaRPr lang="en-US" sz="1300" dirty="0">
+                        <a:latin typeface="Calibri" charset="0"/>
+                        <a:ea typeface="Calibri" charset="0"/>
+                        <a:cs typeface="Calibri" charset="0"/>
+                      </a:endParaRPr>
+                    </a:p>
+                  </a:txBody>
+                  <a:tcPr>
+                    <a:lnL w="6350" cap="flat" cmpd="sng" algn="ctr">
+                      <a:solidFill>
+                        <a:srgbClr val="BDC3C7"/>
+                      </a:solidFill>
+                      <a:prstDash val="solid"/>
+                      <a:round/>
+                      <a:headEnd type="none" w="med" len="med"/>
+                      <a:tailEnd type="none" w="med" len="med"/>
+                    </a:lnL>
+                    <a:lnR w="6350" cap="flat" cmpd="sng" algn="ctr">
+                      <a:solidFill>
+                        <a:srgbClr val="BDC3C7"/>
+                      </a:solidFill>
+                      <a:prstDash val="solid"/>
+                      <a:round/>
+                      <a:headEnd type="none" w="med" len="med"/>
+                      <a:tailEnd type="none" w="med" len="med"/>
+                    </a:lnR>
+                    <a:lnT w="6350" cap="flat" cmpd="sng" algn="ctr">
+                      <a:solidFill>
+                        <a:srgbClr val="BDC3C7"/>
+                      </a:solidFill>
+                      <a:prstDash val="solid"/>
+                      <a:round/>
+                      <a:headEnd type="none" w="med" len="med"/>
+                      <a:tailEnd type="none" w="med" len="med"/>
+                    </a:lnT>
+                    <a:lnB w="6350" cap="flat" cmpd="sng" algn="ctr">
+                      <a:solidFill>
+                        <a:srgbClr val="BDC3C7"/>
+                      </a:solidFill>
+                      <a:prstDash val="solid"/>
+                      <a:round/>
+                      <a:headEnd type="none" w="med" len="med"/>
+                      <a:tailEnd type="none" w="med" len="med"/>
+                    </a:lnB>
+                    <a:solidFill>
+                      <a:srgbClr val="FFFFFF"/>
+                    </a:solidFill>
+                  </a:tcPr>
+                </a:tc>
+                <a:extLst>
+                  <a:ext uri="{0D108BD9-81ED-4DB2-BD59-A6C34878D82A}">
+                    <a16:rowId xmlns:a16="http://schemas.microsoft.com/office/drawing/2014/main" val="10003"/>
+                  </a:ext>
+                </a:extLst>
+              </a:tr>
+              <a:tr h="475488">
+                <a:tc>
+                  <a:txBody>
+                    <a:bodyPr/>
+                    <a:lstStyle/>
+                    <a:p>
+                      <a:pPr marL="0" indent="0" algn="ctr">
+                        <a:buNone/>
+                      </a:pPr>
+                      <a:r>
+                        <a:rPr lang="en-US" sz="1300" dirty="0">
+                          <a:solidFill>
+                            <a:srgbClr val="000000"/>
+                          </a:solidFill>
+                          <a:latin typeface="Calibri" pitchFamily="34" charset="0"/>
+                          <a:ea typeface="Calibri" pitchFamily="34" charset="-122"/>
+                          <a:cs typeface="Calibri" pitchFamily="34" charset="-120"/>
+                        </a:rPr>
+                        <a:t>185</a:t>
+                      </a:r>
+                      <a:endParaRPr lang="en-US" sz="1300" dirty="0">
+                        <a:latin typeface="Calibri" charset="0"/>
+                        <a:ea typeface="Calibri" charset="0"/>
+                        <a:cs typeface="Calibri" charset="0"/>
+                      </a:endParaRPr>
+                    </a:p>
+                  </a:txBody>
+                  <a:tcPr>
+                    <a:lnL w="6350" cap="flat" cmpd="sng" algn="ctr">
+                      <a:solidFill>
+                        <a:srgbClr val="BDC3C7"/>
+                      </a:solidFill>
+                      <a:prstDash val="solid"/>
+                      <a:round/>
+                      <a:headEnd type="none" w="med" len="med"/>
+                      <a:tailEnd type="none" w="med" len="med"/>
+                    </a:lnL>
+                    <a:lnR w="6350" cap="flat" cmpd="sng" algn="ctr">
+                      <a:solidFill>
+                        <a:srgbClr val="BDC3C7"/>
+                      </a:solidFill>
+                      <a:prstDash val="solid"/>
+                      <a:round/>
+                      <a:headEnd type="none" w="med" len="med"/>
+                      <a:tailEnd type="none" w="med" len="med"/>
+                    </a:lnR>
+                    <a:lnT w="6350" cap="flat" cmpd="sng" algn="ctr">
+                      <a:solidFill>
+                        <a:srgbClr val="BDC3C7"/>
+                      </a:solidFill>
+                      <a:prstDash val="solid"/>
+                      <a:round/>
+                      <a:headEnd type="none" w="med" len="med"/>
+                      <a:tailEnd type="none" w="med" len="med"/>
+                    </a:lnT>
+                    <a:lnB w="6350" cap="flat" cmpd="sng" algn="ctr">
+                      <a:solidFill>
+                        <a:srgbClr val="BDC3C7"/>
+                      </a:solidFill>
+                      <a:prstDash val="solid"/>
+                      <a:round/>
+                      <a:headEnd type="none" w="med" len="med"/>
+                      <a:tailEnd type="none" w="med" len="med"/>
+                    </a:lnB>
+                    <a:solidFill>
+                      <a:srgbClr val="FFFFFF"/>
+                    </a:solidFill>
+                  </a:tcPr>
+                </a:tc>
+                <a:tc>
+                  <a:txBody>
+                    <a:bodyPr/>
+                    <a:lstStyle/>
+                    <a:p>
+                      <a:pPr marL="0" indent="0" algn="ctr">
+                        <a:buNone/>
+                      </a:pPr>
+                      <a:r>
+                        <a:rPr lang="en-US" sz="1300" dirty="0">
+                          <a:solidFill>
+                            <a:srgbClr val="000000"/>
+                          </a:solidFill>
+                          <a:latin typeface="Calibri" pitchFamily="34" charset="0"/>
+                          <a:ea typeface="Calibri" pitchFamily="34" charset="-122"/>
+                          <a:cs typeface="Calibri" pitchFamily="34" charset="-120"/>
+                        </a:rPr>
+                        <a:t>0.00</a:t>
+                      </a:r>
+                      <a:endParaRPr lang="en-US" sz="1300" dirty="0">
+                        <a:latin typeface="Calibri" charset="0"/>
+                        <a:ea typeface="Calibri" charset="0"/>
+                        <a:cs typeface="Calibri" charset="0"/>
+                      </a:endParaRPr>
+                    </a:p>
+                  </a:txBody>
+                  <a:tcPr>
+                    <a:lnL w="6350" cap="flat" cmpd="sng" algn="ctr">
+                      <a:solidFill>
+                        <a:srgbClr val="BDC3C7"/>
+                      </a:solidFill>
+                      <a:prstDash val="solid"/>
+                      <a:round/>
+                      <a:headEnd type="none" w="med" len="med"/>
+                      <a:tailEnd type="none" w="med" len="med"/>
+                    </a:lnL>
+                    <a:lnR w="6350" cap="flat" cmpd="sng" algn="ctr">
+                      <a:solidFill>
+                        <a:srgbClr val="BDC3C7"/>
+                      </a:solidFill>
+                      <a:prstDash val="solid"/>
+                      <a:round/>
+                      <a:headEnd type="none" w="med" len="med"/>
+                      <a:tailEnd type="none" w="med" len="med"/>
+                    </a:lnR>
+                    <a:lnT w="6350" cap="flat" cmpd="sng" algn="ctr">
+                      <a:solidFill>
+                        <a:srgbClr val="BDC3C7"/>
+                      </a:solidFill>
+                      <a:prstDash val="solid"/>
+                      <a:round/>
+                      <a:headEnd type="none" w="med" len="med"/>
+                      <a:tailEnd type="none" w="med" len="med"/>
+                    </a:lnT>
+                    <a:lnB w="6350" cap="flat" cmpd="sng" algn="ctr">
+                      <a:solidFill>
+                        <a:srgbClr val="BDC3C7"/>
+                      </a:solidFill>
+                      <a:prstDash val="solid"/>
+                      <a:round/>
+                      <a:headEnd type="none" w="med" len="med"/>
+                      <a:tailEnd type="none" w="med" len="med"/>
+                    </a:lnB>
+                    <a:solidFill>
+                      <a:srgbClr val="FFFFFF"/>
+                    </a:solidFill>
+                  </a:tcPr>
+                </a:tc>
+                <a:tc>
+                  <a:txBody>
+                    <a:bodyPr/>
+                    <a:lstStyle/>
+                    <a:p>
+                      <a:pPr marL="0" indent="0" algn="ctr">
+                        <a:buNone/>
+                      </a:pPr>
+                      <a:r>
+                        <a:rPr lang="en-US" sz="1300" dirty="0">
+                          <a:solidFill>
+                            <a:srgbClr val="000000"/>
+                          </a:solidFill>
+                          <a:latin typeface="Calibri" pitchFamily="34" charset="0"/>
+                          <a:ea typeface="Calibri" pitchFamily="34" charset="-122"/>
+                          <a:cs typeface="Calibri" pitchFamily="34" charset="-120"/>
+                        </a:rPr>
+                        <a:t>0.00</a:t>
+                      </a:r>
+                      <a:endParaRPr lang="en-US" sz="1300" dirty="0">
+                        <a:latin typeface="Calibri" charset="0"/>
+                        <a:ea typeface="Calibri" charset="0"/>
+                        <a:cs typeface="Calibri" charset="0"/>
+                      </a:endParaRPr>
+                    </a:p>
+                  </a:txBody>
+                  <a:tcPr>
+                    <a:lnL w="6350" cap="flat" cmpd="sng" algn="ctr">
+                      <a:solidFill>
+                        <a:srgbClr val="BDC3C7"/>
+                      </a:solidFill>
+                      <a:prstDash val="solid"/>
+                      <a:round/>
+                      <a:headEnd type="none" w="med" len="med"/>
+                      <a:tailEnd type="none" w="med" len="med"/>
+                    </a:lnL>
+                    <a:lnR w="6350" cap="flat" cmpd="sng" algn="ctr">
+                      <a:solidFill>
+                        <a:srgbClr val="BDC3C7"/>
+                      </a:solidFill>
+                      <a:prstDash val="solid"/>
+                      <a:round/>
+                      <a:headEnd type="none" w="med" len="med"/>
+                      <a:tailEnd type="none" w="med" len="med"/>
+                    </a:lnR>
+                    <a:lnT w="6350" cap="flat" cmpd="sng" algn="ctr">
+                      <a:solidFill>
+                        <a:srgbClr val="BDC3C7"/>
+                      </a:solidFill>
+                      <a:prstDash val="solid"/>
+                      <a:round/>
+                      <a:headEnd type="none" w="med" len="med"/>
+                      <a:tailEnd type="none" w="med" len="med"/>
+                    </a:lnT>
+                    <a:lnB w="6350" cap="flat" cmpd="sng" algn="ctr">
+                      <a:solidFill>
+                        <a:srgbClr val="BDC3C7"/>
+                      </a:solidFill>
+                      <a:prstDash val="solid"/>
+                      <a:round/>
+                      <a:headEnd type="none" w="med" len="med"/>
+                      <a:tailEnd type="none" w="med" len="med"/>
+                    </a:lnB>
+                    <a:solidFill>
+                      <a:srgbClr val="FFFFFF"/>
+                    </a:solidFill>
+                  </a:tcPr>
+                </a:tc>
+                <a:tc>
+                  <a:txBody>
+                    <a:bodyPr/>
+                    <a:lstStyle/>
+                    <a:p>
+                      <a:pPr marL="0" indent="0" algn="ctr">
+                        <a:buNone/>
+                      </a:pPr>
+                      <a:r>
+                        <a:rPr lang="en-US" sz="1300" dirty="0">
+                          <a:solidFill>
+                            <a:srgbClr val="000000"/>
+                          </a:solidFill>
+                          <a:latin typeface="Calibri" pitchFamily="34" charset="0"/>
+                          <a:ea typeface="Calibri" pitchFamily="34" charset="-122"/>
+                          <a:cs typeface="Calibri" pitchFamily="34" charset="-120"/>
+                        </a:rPr>
+                        <a:t>0.00</a:t>
+                      </a:r>
+                      <a:endParaRPr lang="en-US" sz="1300" dirty="0">
+                        <a:latin typeface="Calibri" charset="0"/>
+                        <a:ea typeface="Calibri" charset="0"/>
+                        <a:cs typeface="Calibri" charset="0"/>
+                      </a:endParaRPr>
+                    </a:p>
+                  </a:txBody>
+                  <a:tcPr>
+                    <a:lnL w="6350" cap="flat" cmpd="sng" algn="ctr">
+                      <a:solidFill>
+                        <a:srgbClr val="BDC3C7"/>
+                      </a:solidFill>
+                      <a:prstDash val="solid"/>
+                      <a:round/>
+                      <a:headEnd type="none" w="med" len="med"/>
+                      <a:tailEnd type="none" w="med" len="med"/>
+                    </a:lnL>
+                    <a:lnR w="6350" cap="flat" cmpd="sng" algn="ctr">
+                      <a:solidFill>
+                        <a:srgbClr val="BDC3C7"/>
+                      </a:solidFill>
+                      <a:prstDash val="solid"/>
+                      <a:round/>
+                      <a:headEnd type="none" w="med" len="med"/>
+                      <a:tailEnd type="none" w="med" len="med"/>
+                    </a:lnR>
+                    <a:lnT w="6350" cap="flat" cmpd="sng" algn="ctr">
+                      <a:solidFill>
+                        <a:srgbClr val="BDC3C7"/>
+                      </a:solidFill>
+                      <a:prstDash val="solid"/>
+                      <a:round/>
+                      <a:headEnd type="none" w="med" len="med"/>
+                      <a:tailEnd type="none" w="med" len="med"/>
+                    </a:lnT>
+                    <a:lnB w="6350" cap="flat" cmpd="sng" algn="ctr">
+                      <a:solidFill>
+                        <a:srgbClr val="BDC3C7"/>
+                      </a:solidFill>
+                      <a:prstDash val="solid"/>
+                      <a:round/>
+                      <a:headEnd type="none" w="med" len="med"/>
+                      <a:tailEnd type="none" w="med" len="med"/>
+                    </a:lnB>
+                    <a:solidFill>
+                      <a:srgbClr val="FFFFFF"/>
+                    </a:solidFill>
+                  </a:tcPr>
+                </a:tc>
+                <a:tc>
+                  <a:txBody>
+                    <a:bodyPr/>
+                    <a:lstStyle/>
+                    <a:p>
+                      <a:pPr marL="0" indent="0" algn="ctr">
+                        <a:buNone/>
+                      </a:pPr>
+                      <a:r>
+                        <a:rPr lang="en-US" sz="1300" b="1" dirty="0">
+                          <a:solidFill>
+                            <a:srgbClr val="C0392B"/>
+                          </a:solidFill>
+                          <a:latin typeface="Calibri" pitchFamily="34" charset="0"/>
+                          <a:ea typeface="Calibri" pitchFamily="34" charset="-122"/>
+                          <a:cs typeface="Calibri" pitchFamily="34" charset="-120"/>
+                        </a:rPr>
+                        <a:t>1.00</a:t>
+                      </a:r>
+                      <a:endParaRPr lang="en-US" sz="1300" dirty="0">
+                        <a:latin typeface="Calibri" charset="0"/>
+                        <a:ea typeface="Calibri" charset="0"/>
+                        <a:cs typeface="Calibri" charset="0"/>
+                      </a:endParaRPr>
+                    </a:p>
+                  </a:txBody>
+                  <a:tcPr>
+                    <a:lnL w="6350" cap="flat" cmpd="sng" algn="ctr">
+                      <a:solidFill>
+                        <a:srgbClr val="BDC3C7"/>
+                      </a:solidFill>
+                      <a:prstDash val="solid"/>
+                      <a:round/>
+                      <a:headEnd type="none" w="med" len="med"/>
+                      <a:tailEnd type="none" w="med" len="med"/>
+                    </a:lnL>
+                    <a:lnR w="6350" cap="flat" cmpd="sng" algn="ctr">
+                      <a:solidFill>
+                        <a:srgbClr val="BDC3C7"/>
+                      </a:solidFill>
+                      <a:prstDash val="solid"/>
+                      <a:round/>
+                      <a:headEnd type="none" w="med" len="med"/>
+                      <a:tailEnd type="none" w="med" len="med"/>
+                    </a:lnR>
+                    <a:lnT w="6350" cap="flat" cmpd="sng" algn="ctr">
+                      <a:solidFill>
+                        <a:srgbClr val="BDC3C7"/>
+                      </a:solidFill>
+                      <a:prstDash val="solid"/>
+                      <a:round/>
+                      <a:headEnd type="none" w="med" len="med"/>
+                      <a:tailEnd type="none" w="med" len="med"/>
+                    </a:lnT>
+                    <a:lnB w="6350" cap="flat" cmpd="sng" algn="ctr">
+                      <a:solidFill>
+                        <a:srgbClr val="BDC3C7"/>
+                      </a:solidFill>
+                      <a:prstDash val="solid"/>
+                      <a:round/>
+                      <a:headEnd type="none" w="med" len="med"/>
+                      <a:tailEnd type="none" w="med" len="med"/>
+                    </a:lnB>
+                    <a:solidFill>
+                      <a:srgbClr val="FFFFFF"/>
+                    </a:solidFill>
+                  </a:tcPr>
+                </a:tc>
+                <a:tc>
+                  <a:txBody>
+                    <a:bodyPr/>
+                    <a:lstStyle/>
+                    <a:p>
+                      <a:pPr marL="0" indent="0" algn="ctr">
+                        <a:buNone/>
+                      </a:pPr>
+                      <a:r>
+                        <a:rPr lang="en-US" sz="1300" b="1" dirty="0">
+                          <a:solidFill>
+                            <a:srgbClr val="C0392B"/>
+                          </a:solidFill>
+                          <a:latin typeface="Calibri" pitchFamily="34" charset="0"/>
+                          <a:ea typeface="Calibri" pitchFamily="34" charset="-122"/>
+                          <a:cs typeface="Calibri" pitchFamily="34" charset="-120"/>
+                        </a:rPr>
+                        <a:t>9.00</a:t>
+                      </a:r>
+                      <a:endParaRPr lang="en-US" sz="1300" dirty="0">
+                        <a:latin typeface="Calibri" charset="0"/>
+                        <a:ea typeface="Calibri" charset="0"/>
+                        <a:cs typeface="Calibri" charset="0"/>
+                      </a:endParaRPr>
+                    </a:p>
+                  </a:txBody>
+                  <a:tcPr>
+                    <a:lnL w="6350" cap="flat" cmpd="sng" algn="ctr">
+                      <a:solidFill>
+                        <a:srgbClr val="BDC3C7"/>
+                      </a:solidFill>
+                      <a:prstDash val="solid"/>
+                      <a:round/>
+                      <a:headEnd type="none" w="med" len="med"/>
+                      <a:tailEnd type="none" w="med" len="med"/>
+                    </a:lnL>
+                    <a:lnR w="6350" cap="flat" cmpd="sng" algn="ctr">
+                      <a:solidFill>
+                        <a:srgbClr val="BDC3C7"/>
+                      </a:solidFill>
+                      <a:prstDash val="solid"/>
+                      <a:round/>
+                      <a:headEnd type="none" w="med" len="med"/>
+                      <a:tailEnd type="none" w="med" len="med"/>
+                    </a:lnR>
+                    <a:lnT w="6350" cap="flat" cmpd="sng" algn="ctr">
+                      <a:solidFill>
+                        <a:srgbClr val="BDC3C7"/>
+                      </a:solidFill>
+                      <a:prstDash val="solid"/>
+                      <a:round/>
+                      <a:headEnd type="none" w="med" len="med"/>
+                      <a:tailEnd type="none" w="med" len="med"/>
+                    </a:lnT>
+                    <a:lnB w="6350" cap="flat" cmpd="sng" algn="ctr">
+                      <a:solidFill>
+                        <a:srgbClr val="BDC3C7"/>
+                      </a:solidFill>
+                      <a:prstDash val="solid"/>
+                      <a:round/>
+                      <a:headEnd type="none" w="med" len="med"/>
+                      <a:tailEnd type="none" w="med" len="med"/>
+                    </a:lnB>
+                    <a:solidFill>
+                      <a:srgbClr val="FFFFFF"/>
+                    </a:solidFill>
+                  </a:tcPr>
+                </a:tc>
+                <a:tc>
+                  <a:txBody>
+                    <a:bodyPr/>
+                    <a:lstStyle/>
+                    <a:p>
+                      <a:pPr marL="0" indent="0" algn="ctr">
+                        <a:buNone/>
+                      </a:pPr>
+                      <a:r>
+                        <a:rPr lang="en-US" sz="1300" dirty="0">
+                          <a:solidFill>
+                            <a:srgbClr val="C0392B"/>
+                          </a:solidFill>
+                          <a:latin typeface="Calibri" pitchFamily="34" charset="0"/>
+                          <a:ea typeface="Calibri" pitchFamily="34" charset="-122"/>
+                          <a:cs typeface="Calibri" pitchFamily="34" charset="-120"/>
+                        </a:rPr>
+                        <a:t>Crisis</a:t>
+                      </a:r>
+                      <a:endParaRPr lang="en-US" sz="1300" dirty="0">
+                        <a:latin typeface="Calibri" charset="0"/>
+                        <a:ea typeface="Calibri" charset="0"/>
+                        <a:cs typeface="Calibri" charset="0"/>
+                      </a:endParaRPr>
+                    </a:p>
+                  </a:txBody>
+                  <a:tcPr>
+                    <a:lnL w="6350" cap="flat" cmpd="sng" algn="ctr">
+                      <a:solidFill>
+                        <a:srgbClr val="BDC3C7"/>
+                      </a:solidFill>
+                      <a:prstDash val="solid"/>
+                      <a:round/>
+                      <a:headEnd type="none" w="med" len="med"/>
+                      <a:tailEnd type="none" w="med" len="med"/>
+                    </a:lnL>
+                    <a:lnR w="6350" cap="flat" cmpd="sng" algn="ctr">
+                      <a:solidFill>
+                        <a:srgbClr val="BDC3C7"/>
+                      </a:solidFill>
+                      <a:prstDash val="solid"/>
+                      <a:round/>
+                      <a:headEnd type="none" w="med" len="med"/>
+                      <a:tailEnd type="none" w="med" len="med"/>
+                    </a:lnR>
+                    <a:lnT w="6350" cap="flat" cmpd="sng" algn="ctr">
+                      <a:solidFill>
+                        <a:srgbClr val="BDC3C7"/>
+                      </a:solidFill>
+                      <a:prstDash val="solid"/>
+                      <a:round/>
+                      <a:headEnd type="none" w="med" len="med"/>
+                      <a:tailEnd type="none" w="med" len="med"/>
+                    </a:lnT>
+                    <a:lnB w="6350" cap="flat" cmpd="sng" algn="ctr">
+                      <a:solidFill>
+                        <a:srgbClr val="BDC3C7"/>
+                      </a:solidFill>
+                      <a:prstDash val="solid"/>
+                      <a:round/>
+                      <a:headEnd type="none" w="med" len="med"/>
+                      <a:tailEnd type="none" w="med" len="med"/>
+                    </a:lnB>
+                    <a:solidFill>
+                      <a:srgbClr val="FFFFFF"/>
+                    </a:solidFill>
+                  </a:tcPr>
+                </a:tc>
+                <a:extLst>
+                  <a:ext uri="{0D108BD9-81ED-4DB2-BD59-A6C34878D82A}">
+                    <a16:rowId xmlns:a16="http://schemas.microsoft.com/office/drawing/2014/main" val="10004"/>
+                  </a:ext>
+                </a:extLst>
+              </a:tr>
+            </a:tbl>
+          </a:graphicData>
+        </a:graphic>
+      </p:graphicFrame>
+      <p:sp>
+        <p:nvSpPr>
+          <p:cNvPr id="5" name="Shape 2"/>
+          <p:cNvSpPr/>
+          <p:nvPr/>
+        </p:nvSpPr>
+        <p:spPr>
+          <a:xfrm>
+            <a:off x="365760" y="3520440"/>
+            <a:ext cx="8412480" cy="1280160"/>
+          </a:xfrm>
+          <a:prstGeom prst="rect">
+            <a:avLst/>
+          </a:prstGeom>
+          <a:solidFill>
+            <a:srgbClr val="D6E4F0"/>
+          </a:solidFill>
+          <a:ln w="9525">
+            <a:solidFill>
+              <a:srgbClr val="1F5C8B"/>
+            </a:solidFill>
+            <a:prstDash val="solid"/>
+          </a:ln>
+        </p:spPr>
+        <p:txBody>
+          <a:bodyPr/>
+          <a:lstStyle/>
+          <a:p>
+            <a:endParaRPr lang="en-US"/>
+          </a:p>
+        </p:txBody>
+      </p:sp>
+      <p:sp>
+        <p:nvSpPr>
+          <p:cNvPr id="6" name="Text 3"/>
+          <p:cNvSpPr/>
+          <p:nvPr/>
+        </p:nvSpPr>
+        <p:spPr>
+          <a:xfrm>
+            <a:off x="548640" y="3611880"/>
+            <a:ext cx="8046720" cy="347472"/>
+          </a:xfrm>
+          <a:prstGeom prst="rect">
+            <a:avLst/>
+          </a:prstGeom>
+          <a:noFill/>
+          <a:ln/>
+        </p:spPr>
+        <p:txBody>
+          <a:bodyPr wrap="square" lIns="0" tIns="0" rIns="0" bIns="0" rtlCol="0" anchor="ctr"/>
+          <a:lstStyle/>
+          <a:p>
+            <a:pPr marL="0" indent="0">
+              <a:buNone/>
+            </a:pPr>
+            <a:r>
+              <a:rPr lang="en-US" sz="1400" b="1" dirty="0">
+                <a:solidFill>
+                  <a:srgbClr val="142850"/>
+                </a:solidFill>
+                <a:latin typeface="Calibri" pitchFamily="34" charset="0"/>
+                <a:ea typeface="Calibri" pitchFamily="34" charset="-122"/>
+                <a:cs typeface="Calibri" pitchFamily="34" charset="-120"/>
+              </a:rPr>
+              <a:t>Ejemplo de zona de transición (interpolación):</a:t>
+            </a:r>
+            <a:endParaRPr lang="en-US" sz="1400" dirty="0"/>
+          </a:p>
+        </p:txBody>
+      </p:sp>
+      <p:sp>
+        <p:nvSpPr>
+          <p:cNvPr id="7" name="Text 4"/>
+          <p:cNvSpPr/>
+          <p:nvPr/>
+        </p:nvSpPr>
+        <p:spPr>
+          <a:xfrm>
+            <a:off x="548640" y="3977640"/>
+            <a:ext cx="8046720" cy="731520"/>
+          </a:xfrm>
+          <a:prstGeom prst="rect">
+            <a:avLst/>
+          </a:prstGeom>
+          <a:noFill/>
+          <a:ln/>
+        </p:spPr>
+        <p:txBody>
+          <a:bodyPr wrap="square" lIns="0" tIns="0" rIns="0" bIns="0" rtlCol="0" anchor="ctr"/>
+          <a:lstStyle/>
+          <a:p>
+            <a:pPr marL="0" indent="0">
+              <a:buNone/>
+            </a:pPr>
+            <a:r>
+              <a:rPr lang="en-US" sz="1300" dirty="0">
+                <a:solidFill>
+                  <a:srgbClr val="142850"/>
+                </a:solidFill>
+                <a:latin typeface="Calibri" pitchFamily="34" charset="0"/>
+                <a:ea typeface="Calibri" pitchFamily="34" charset="-122"/>
+                <a:cs typeface="Calibri" pitchFamily="34" charset="-120"/>
+              </a:rPr>
+              <a:t>Para x = 120 mmHg: μ_Normal = 0.50, μ_Elevada = 0.33 → w̄_N = 0.60, w̄_E = 0.40</a:t>
+            </a:r>
+            <a:endParaRPr lang="en-US" sz="1300" dirty="0"/>
+          </a:p>
+          <a:p>
+            <a:pPr marL="0" indent="0">
+              <a:buNone/>
+            </a:pPr>
+            <a:r>
+              <a:rPr lang="en-US" sz="1300" dirty="0">
+                <a:solidFill>
+                  <a:srgbClr val="142850"/>
+                </a:solidFill>
+                <a:latin typeface="Calibri" pitchFamily="34" charset="0"/>
+                <a:ea typeface="Calibri" pitchFamily="34" charset="-122"/>
+                <a:cs typeface="Calibri" pitchFamily="34" charset="-120"/>
+              </a:rPr>
+              <a:t>Salida = 0.60 × 1.5 + 0.40 × 4.0 = 0.90 + 1.60 = 2.50  (interpolación suave entre Normal y Elevada)</a:t>
+            </a:r>
+            <a:endParaRPr lang="en-US" sz="1300" dirty="0"/>
+          </a:p>
+        </p:txBody>
+      </p:sp>
+    </p:spTree>
+  </p:cSld>
+  <p:clrMapOvr>
+    <a:masterClrMapping/>
+  </p:clrMapOvr>
+</p:sld>
+</file>
+
+<file path=ppt/slides/slide11.xml><?xml version="1.0" encoding="utf-8"?>
+<p:sld xmlns:a="http://schemas.openxmlformats.org/drawingml/2006/main" xmlns:r="http://schemas.openxmlformats.org/officeDocument/2006/relationships" xmlns:p="http://schemas.openxmlformats.org/presentationml/2006/main">
+  <p:cSld>
+    <p:spTree>
+      <p:nvGrpSpPr>
+        <p:cNvPr id="1" name="">
+          <a:extLst>
+            <a:ext uri="{FF2B5EF4-FFF2-40B4-BE49-F238E27FC236}">
+              <a16:creationId xmlns:a16="http://schemas.microsoft.com/office/drawing/2014/main" id="{3B284F18-8151-7D52-B17E-06A26A572FEA}"/>
+            </a:ext>
+          </a:extLst>
+        </p:cNvPr>
+        <p:cNvGrpSpPr/>
+        <p:nvPr/>
+      </p:nvGrpSpPr>
+      <p:grpSpPr>
+        <a:xfrm>
+          <a:off x="0" y="0"/>
+          <a:ext cx="0" cy="0"/>
+          <a:chOff x="0" y="0"/>
+          <a:chExt cx="0" cy="0"/>
+        </a:xfrm>
+      </p:grpSpPr>
+      <p:sp>
+        <p:nvSpPr>
+          <p:cNvPr id="2" name="Shape 0">
+            <a:extLst>
+              <a:ext uri="{FF2B5EF4-FFF2-40B4-BE49-F238E27FC236}">
+                <a16:creationId xmlns:a16="http://schemas.microsoft.com/office/drawing/2014/main" id="{2EB02E6C-F189-5DF1-2953-ABEA9C7C3BA5}"/>
+              </a:ext>
+            </a:extLst>
+          </p:cNvPr>
+          <p:cNvSpPr/>
+          <p:nvPr/>
+        </p:nvSpPr>
+        <p:spPr>
+          <a:xfrm>
+            <a:off x="0" y="0"/>
+            <a:ext cx="9144000" cy="777240"/>
+          </a:xfrm>
+          <a:prstGeom prst="rect">
+            <a:avLst/>
+          </a:prstGeom>
+          <a:solidFill>
+            <a:srgbClr val="142850"/>
+          </a:solidFill>
+          <a:ln w="12700">
+            <a:solidFill>
+              <a:srgbClr val="142850"/>
+            </a:solidFill>
+            <a:prstDash val="solid"/>
+          </a:ln>
+        </p:spPr>
+        <p:txBody>
+          <a:bodyPr/>
+          <a:lstStyle/>
+          <a:p>
+            <a:endParaRPr lang="en-US"/>
+          </a:p>
+        </p:txBody>
+      </p:sp>
+      <p:sp>
+        <p:nvSpPr>
+          <p:cNvPr id="3" name="Text 1">
+            <a:extLst>
+              <a:ext uri="{FF2B5EF4-FFF2-40B4-BE49-F238E27FC236}">
+                <a16:creationId xmlns:a16="http://schemas.microsoft.com/office/drawing/2014/main" id="{43E9292A-C088-1F00-64A4-5FCE623DFBBA}"/>
+              </a:ext>
+            </a:extLst>
+          </p:cNvPr>
+          <p:cNvSpPr/>
+          <p:nvPr/>
+        </p:nvSpPr>
+        <p:spPr>
+          <a:xfrm>
+            <a:off x="365760" y="0"/>
+            <a:ext cx="8412480" cy="777240"/>
+          </a:xfrm>
+          <a:prstGeom prst="rect">
+            <a:avLst/>
+          </a:prstGeom>
+          <a:noFill/>
+          <a:ln/>
+        </p:spPr>
+        <p:txBody>
+          <a:bodyPr wrap="square" lIns="0" tIns="0" rIns="0" bIns="0" rtlCol="0" anchor="ctr"/>
+          <a:lstStyle/>
+          <a:p>
+            <a:pPr marL="0" indent="0" algn="l">
+              <a:buNone/>
+            </a:pPr>
+            <a:r>
+              <a:rPr lang="es-ES_tradnl" sz="2400" b="1" noProof="0" dirty="0">
+                <a:solidFill>
+                  <a:srgbClr val="FFFFFF"/>
+                </a:solidFill>
+                <a:latin typeface="Calibri" pitchFamily="34" charset="0"/>
+                <a:cs typeface="Calibri" pitchFamily="34" charset="-120"/>
+              </a:rPr>
+              <a:t>Captura de ejecución</a:t>
+            </a:r>
+            <a:endParaRPr lang="es-ES_tradnl" sz="2400" noProof="0" dirty="0"/>
+          </a:p>
+        </p:txBody>
+      </p:sp>
+      <p:pic>
+        <p:nvPicPr>
+          <p:cNvPr id="4" name="Picture 3">
+            <a:extLst>
+              <a:ext uri="{FF2B5EF4-FFF2-40B4-BE49-F238E27FC236}">
+                <a16:creationId xmlns:a16="http://schemas.microsoft.com/office/drawing/2014/main" id="{A260EC59-8E67-4F00-DAFB-36509C0CE5C3}"/>
+              </a:ext>
+            </a:extLst>
+          </p:cNvPr>
+          <p:cNvPicPr>
+            <a:picLocks noChangeAspect="1"/>
+          </p:cNvPicPr>
+          <p:nvPr/>
+        </p:nvPicPr>
+        <p:blipFill>
+          <a:blip r:embed="rId3"/>
+          <a:stretch>
+            <a:fillRect/>
+          </a:stretch>
+        </p:blipFill>
+        <p:spPr>
+          <a:xfrm>
+            <a:off x="1650273" y="844290"/>
+            <a:ext cx="5843453" cy="4299210"/>
+          </a:xfrm>
+          <a:prstGeom prst="rect">
+            <a:avLst/>
+          </a:prstGeom>
+        </p:spPr>
+      </p:pic>
+    </p:spTree>
+    <p:extLst>
+      <p:ext uri="{BB962C8B-B14F-4D97-AF65-F5344CB8AC3E}">
+        <p14:creationId xmlns:p14="http://schemas.microsoft.com/office/powerpoint/2010/main" val="3178756091"/>
+      </p:ext>
+    </p:extLst>
+  </p:cSld>
+  <p:clrMapOvr>
+    <a:masterClrMapping/>
+  </p:clrMapOvr>
+</p:sld>
+</file>
+
+<file path=ppt/slides/slide12.xml><?xml version="1.0" encoding="utf-8"?>
+<p:sld xmlns:a="http://schemas.openxmlformats.org/drawingml/2006/main" xmlns:r="http://schemas.openxmlformats.org/officeDocument/2006/relationships" xmlns:p="http://schemas.openxmlformats.org/presentationml/2006/main">
   <p:cSld name="Slide 10">
     <p:bg>
       <p:bgPr>
         <a:solidFill>
           <a:srgbClr val="142850"/>
         </a:solidFill>
+        <a:effectLst/>
       </p:bgPr>
     </p:bg>
     <p:spTree>
@@ -2202,6 +5103,13 @@
             <a:prstDash val="solid"/>
           </a:ln>
         </p:spPr>
+        <p:txBody>
+          <a:bodyPr/>
+          <a:lstStyle/>
+          <a:p>
+            <a:endParaRPr lang="en-US"/>
+          </a:p>
+        </p:txBody>
       </p:sp>
       <p:sp>
         <p:nvSpPr>
@@ -2224,7 +5132,7 @@
           <a:bodyPr wrap="square" lIns="0" tIns="0" rIns="0" bIns="0" rtlCol="0" anchor="ctr"/>
           <a:lstStyle/>
           <a:p>
-            <a:pPr algn="l" indent="0" marL="0">
+            <a:pPr marL="0" indent="0" algn="l">
               <a:buNone/>
             </a:pPr>
             <a:r>
@@ -2266,6 +5174,13 @@
             <a:prstDash val="solid"/>
           </a:ln>
         </p:spPr>
+        <p:txBody>
+          <a:bodyPr/>
+          <a:lstStyle/>
+          <a:p>
+            <a:endParaRPr lang="en-US"/>
+          </a:p>
+        </p:txBody>
       </p:sp>
       <p:sp>
         <p:nvSpPr>
@@ -2288,7 +5203,7 @@
           <a:bodyPr wrap="square" lIns="0" tIns="0" rIns="0" bIns="0" rtlCol="0" anchor="ctr"/>
           <a:lstStyle/>
           <a:p>
-            <a:pPr indent="0" marL="0">
+            <a:pPr marL="0" indent="0">
               <a:buNone/>
             </a:pPr>
             <a:r>
@@ -2327,7 +5242,7 @@
           <a:bodyPr wrap="square" lIns="0" tIns="0" rIns="0" bIns="0" rtlCol="0" anchor="ctr"/>
           <a:lstStyle/>
           <a:p>
-            <a:pPr indent="0" marL="0">
+            <a:pPr marL="0" indent="0">
               <a:buNone/>
             </a:pPr>
             <a:r>
@@ -2369,6 +5284,13 @@
             <a:prstDash val="solid"/>
           </a:ln>
         </p:spPr>
+        <p:txBody>
+          <a:bodyPr/>
+          <a:lstStyle/>
+          <a:p>
+            <a:endParaRPr lang="en-US"/>
+          </a:p>
+        </p:txBody>
       </p:sp>
       <p:sp>
         <p:nvSpPr>
@@ -2391,7 +5313,7 @@
           <a:bodyPr wrap="square" lIns="0" tIns="0" rIns="0" bIns="0" rtlCol="0" anchor="ctr"/>
           <a:lstStyle/>
           <a:p>
-            <a:pPr indent="0" marL="0">
+            <a:pPr marL="0" indent="0">
               <a:buNone/>
             </a:pPr>
             <a:r>
@@ -2430,7 +5352,7 @@
           <a:bodyPr wrap="square" lIns="0" tIns="0" rIns="0" bIns="0" rtlCol="0" anchor="ctr"/>
           <a:lstStyle/>
           <a:p>
-            <a:pPr indent="0" marL="0">
+            <a:pPr marL="0" indent="0">
               <a:buNone/>
             </a:pPr>
             <a:r>
@@ -2472,6 +5394,13 @@
             <a:prstDash val="solid"/>
           </a:ln>
         </p:spPr>
+        <p:txBody>
+          <a:bodyPr/>
+          <a:lstStyle/>
+          <a:p>
+            <a:endParaRPr lang="en-US"/>
+          </a:p>
+        </p:txBody>
       </p:sp>
       <p:sp>
         <p:nvSpPr>
@@ -2494,7 +5423,7 @@
           <a:bodyPr wrap="square" lIns="0" tIns="0" rIns="0" bIns="0" rtlCol="0" anchor="ctr"/>
           <a:lstStyle/>
           <a:p>
-            <a:pPr indent="0" marL="0">
+            <a:pPr marL="0" indent="0">
               <a:buNone/>
             </a:pPr>
             <a:r>
@@ -2533,7 +5462,7 @@
           <a:bodyPr wrap="square" lIns="0" tIns="0" rIns="0" bIns="0" rtlCol="0" anchor="ctr"/>
           <a:lstStyle/>
           <a:p>
-            <a:pPr indent="0" marL="0">
+            <a:pPr marL="0" indent="0">
               <a:buNone/>
             </a:pPr>
             <a:r>
@@ -2575,6 +5504,13 @@
             <a:prstDash val="solid"/>
           </a:ln>
         </p:spPr>
+        <p:txBody>
+          <a:bodyPr/>
+          <a:lstStyle/>
+          <a:p>
+            <a:endParaRPr lang="en-US"/>
+          </a:p>
+        </p:txBody>
       </p:sp>
       <p:sp>
         <p:nvSpPr>
@@ -2597,7 +5533,7 @@
           <a:bodyPr wrap="square" lIns="0" tIns="0" rIns="0" bIns="0" rtlCol="0" anchor="ctr"/>
           <a:lstStyle/>
           <a:p>
-            <a:pPr indent="0" marL="0">
+            <a:pPr marL="0" indent="0">
               <a:buNone/>
             </a:pPr>
             <a:r>
@@ -2636,7 +5572,7 @@
           <a:bodyPr wrap="square" lIns="0" tIns="0" rIns="0" bIns="0" rtlCol="0" anchor="ctr"/>
           <a:lstStyle/>
           <a:p>
-            <a:pPr indent="0" marL="0">
+            <a:pPr marL="0" indent="0">
               <a:buNone/>
             </a:pPr>
             <a:r>
@@ -2670,6 +5606,7 @@
         <a:solidFill>
           <a:srgbClr val="F8FBFD"/>
         </a:solidFill>
+        <a:effectLst/>
       </p:bgPr>
     </p:bg>
     <p:spTree>
@@ -2710,6 +5647,13 @@
             <a:prstDash val="solid"/>
           </a:ln>
         </p:spPr>
+        <p:txBody>
+          <a:bodyPr/>
+          <a:lstStyle/>
+          <a:p>
+            <a:endParaRPr lang="en-US"/>
+          </a:p>
+        </p:txBody>
       </p:sp>
       <p:sp>
         <p:nvSpPr>
@@ -2732,7 +5676,7 @@
           <a:bodyPr wrap="square" lIns="0" tIns="0" rIns="0" bIns="0" rtlCol="0" anchor="ctr"/>
           <a:lstStyle/>
           <a:p>
-            <a:pPr algn="l" indent="0" marL="0">
+            <a:pPr marL="0" indent="0" algn="l">
               <a:buNone/>
             </a:pPr>
             <a:r>
@@ -2771,7 +5715,7 @@
           <a:bodyPr wrap="square" lIns="0" tIns="0" rIns="0" bIns="0" rtlCol="0" anchor="ctr"/>
           <a:lstStyle/>
           <a:p>
-            <a:pPr indent="0" marL="0">
+            <a:pPr marL="0" indent="0">
               <a:buNone/>
             </a:pPr>
             <a:r>
@@ -2810,7 +5754,7 @@
           <a:bodyPr wrap="square" lIns="0" tIns="0" rIns="0" bIns="0" rtlCol="0" anchor="t"/>
           <a:lstStyle/>
           <a:p>
-            <a:pPr indent="0" marL="0">
+            <a:pPr marL="0" indent="0">
               <a:buNone/>
             </a:pPr>
             <a:r>
@@ -2827,7 +5771,7 @@
             <a:endParaRPr lang="en-US" sz="1400" dirty="0"/>
           </a:p>
           <a:p>
-            <a:pPr indent="0" marL="0">
+            <a:pPr marL="0" indent="0">
               <a:buNone/>
             </a:pPr>
             <a:r>
@@ -2844,7 +5788,7 @@
             <a:endParaRPr lang="en-US" sz="1400" dirty="0"/>
           </a:p>
           <a:p>
-            <a:pPr indent="0" marL="0">
+            <a:pPr marL="0" indent="0">
               <a:buNone/>
             </a:pPr>
             <a:r>
@@ -2861,7 +5805,7 @@
             <a:endParaRPr lang="en-US" sz="1400" dirty="0"/>
           </a:p>
           <a:p>
-            <a:pPr indent="0" marL="0">
+            <a:pPr marL="0" indent="0">
               <a:buNone/>
             </a:pPr>
             <a:r>
@@ -2878,7 +5822,7 @@
             <a:endParaRPr lang="en-US" sz="1400" dirty="0"/>
           </a:p>
           <a:p>
-            <a:pPr indent="0" marL="0">
+            <a:pPr marL="0" indent="0">
               <a:buNone/>
             </a:pPr>
             <a:r>
@@ -2917,7 +5861,7 @@
           <a:bodyPr wrap="square" lIns="0" tIns="0" rIns="0" bIns="0" rtlCol="0" anchor="ctr"/>
           <a:lstStyle/>
           <a:p>
-            <a:pPr indent="0" marL="0">
+            <a:pPr marL="0" indent="0">
               <a:buNone/>
             </a:pPr>
             <a:r>
@@ -2937,7 +5881,7 @@
       </p:sp>
       <p:graphicFrame>
         <p:nvGraphicFramePr>
-          <p:cNvPr id="3" name="Table 0"/>
+          <p:cNvPr id="7" name="Table 0"/>
           <p:cNvGraphicFramePr>
             <a:graphicFrameLocks noGrp="1"/>
           </p:cNvGraphicFramePr>
@@ -2951,16 +5895,34 @@
         </p:nvGraphicFramePr>
         <p:xfrm>
           <a:off x="5303520" y="1417320"/>
-          <a:ext cx="3566160" cy="914400"/>
+          <a:ext cx="3566160" cy="2194560"/>
         </p:xfrm>
         <a:graphic>
           <a:graphicData uri="http://schemas.openxmlformats.org/drawingml/2006/table">
             <a:tbl>
               <a:tblPr/>
               <a:tblGrid>
-                <a:gridCol w="1371600"/>
-                <a:gridCol w="1188720"/>
-                <a:gridCol w="1005840"/>
+                <a:gridCol w="1371600">
+                  <a:extLst>
+                    <a:ext uri="{9D8B030D-6E8A-4147-A177-3AD203B41FA5}">
+                      <a16:colId xmlns:a16="http://schemas.microsoft.com/office/drawing/2014/main" val="20000"/>
+                    </a:ext>
+                  </a:extLst>
+                </a:gridCol>
+                <a:gridCol w="1188720">
+                  <a:extLst>
+                    <a:ext uri="{9D8B030D-6E8A-4147-A177-3AD203B41FA5}">
+                      <a16:colId xmlns:a16="http://schemas.microsoft.com/office/drawing/2014/main" val="20001"/>
+                    </a:ext>
+                  </a:extLst>
+                </a:gridCol>
+                <a:gridCol w="1005840">
+                  <a:extLst>
+                    <a:ext uri="{9D8B030D-6E8A-4147-A177-3AD203B41FA5}">
+                      <a16:colId xmlns:a16="http://schemas.microsoft.com/office/drawing/2014/main" val="20002"/>
+                    </a:ext>
+                  </a:extLst>
+                </a:gridCol>
               </a:tblGrid>
               <a:tr h="438912">
                 <a:tc>
@@ -2968,7 +5930,7 @@
                     <a:bodyPr/>
                     <a:lstStyle/>
                     <a:p>
-                      <a:pPr algn="ctr" indent="0" marL="0">
+                      <a:pPr marL="0" indent="0" algn="ctr">
                         <a:buNone/>
                       </a:pPr>
                       <a:r>
@@ -2989,7 +5951,7 @@
                       </a:endParaRPr>
                     </a:p>
                   </a:txBody>
-                  <a:tcPr marL="91440" marR="91440" marT="45720" marB="45720">
+                  <a:tcPr>
                     <a:lnL w="6350" cap="flat" cmpd="sng" algn="ctr">
                       <a:solidFill>
                         <a:srgbClr val="BDC3C7"/>
@@ -3036,7 +5998,7 @@
                     <a:bodyPr/>
                     <a:lstStyle/>
                     <a:p>
-                      <a:pPr algn="ctr" indent="0" marL="0">
+                      <a:pPr marL="0" indent="0" algn="ctr">
                         <a:buNone/>
                       </a:pPr>
                       <a:r>
@@ -3057,7 +6019,7 @@
                       </a:endParaRPr>
                     </a:p>
                   </a:txBody>
-                  <a:tcPr marL="91440" marR="91440" marT="45720" marB="45720">
+                  <a:tcPr>
                     <a:lnL w="6350" cap="flat" cmpd="sng" algn="ctr">
                       <a:solidFill>
                         <a:srgbClr val="BDC3C7"/>
@@ -3104,7 +6066,7 @@
                     <a:bodyPr/>
                     <a:lstStyle/>
                     <a:p>
-                      <a:pPr algn="ctr" indent="0" marL="0">
+                      <a:pPr marL="0" indent="0" algn="ctr">
                         <a:buNone/>
                       </a:pPr>
                       <a:r>
@@ -3125,7 +6087,7 @@
                       </a:endParaRPr>
                     </a:p>
                   </a:txBody>
-                  <a:tcPr marL="91440" marR="91440" marT="45720" marB="45720">
+                  <a:tcPr>
                     <a:lnL w="6350" cap="flat" cmpd="sng" algn="ctr">
                       <a:solidFill>
                         <a:srgbClr val="BDC3C7"/>
@@ -3167,6 +6129,11 @@
                     </a:solidFill>
                   </a:tcPr>
                 </a:tc>
+                <a:extLst>
+                  <a:ext uri="{0D108BD9-81ED-4DB2-BD59-A6C34878D82A}">
+                    <a16:rowId xmlns:a16="http://schemas.microsoft.com/office/drawing/2014/main" val="10000"/>
+                  </a:ext>
+                </a:extLst>
               </a:tr>
               <a:tr h="438912">
                 <a:tc>
@@ -3174,7 +6141,7 @@
                     <a:bodyPr/>
                     <a:lstStyle/>
                     <a:p>
-                      <a:pPr algn="ctr" indent="0" marL="0">
+                      <a:pPr marL="0" indent="0" algn="ctr">
                         <a:buNone/>
                       </a:pPr>
                       <a:r>
@@ -3195,7 +6162,7 @@
                       </a:endParaRPr>
                     </a:p>
                   </a:txBody>
-                  <a:tcPr marL="91440" marR="91440" marT="45720" marB="45720">
+                  <a:tcPr>
                     <a:lnL w="6350" cap="flat" cmpd="sng" algn="ctr">
                       <a:solidFill>
                         <a:srgbClr val="BDC3C7"/>
@@ -3242,7 +6209,7 @@
                     <a:bodyPr/>
                     <a:lstStyle/>
                     <a:p>
-                      <a:pPr algn="ctr" indent="0" marL="0">
+                      <a:pPr marL="0" indent="0" algn="ctr">
                         <a:buNone/>
                       </a:pPr>
                       <a:r>
@@ -3263,7 +6230,7 @@
                       </a:endParaRPr>
                     </a:p>
                   </a:txBody>
-                  <a:tcPr marL="91440" marR="91440" marT="45720" marB="45720">
+                  <a:tcPr>
                     <a:lnL w="6350" cap="flat" cmpd="sng" algn="ctr">
                       <a:solidFill>
                         <a:srgbClr val="BDC3C7"/>
@@ -3310,7 +6277,7 @@
                     <a:bodyPr/>
                     <a:lstStyle/>
                     <a:p>
-                      <a:pPr algn="ctr" indent="0" marL="0">
+                      <a:pPr marL="0" indent="0" algn="ctr">
                         <a:buNone/>
                       </a:pPr>
                       <a:r>
@@ -3331,7 +6298,7 @@
                       </a:endParaRPr>
                     </a:p>
                   </a:txBody>
-                  <a:tcPr marL="91440" marR="91440" marT="45720" marB="45720">
+                  <a:tcPr>
                     <a:lnL w="6350" cap="flat" cmpd="sng" algn="ctr">
                       <a:solidFill>
                         <a:srgbClr val="BDC3C7"/>
@@ -3373,6 +6340,11 @@
                     </a:solidFill>
                   </a:tcPr>
                 </a:tc>
+                <a:extLst>
+                  <a:ext uri="{0D108BD9-81ED-4DB2-BD59-A6C34878D82A}">
+                    <a16:rowId xmlns:a16="http://schemas.microsoft.com/office/drawing/2014/main" val="10001"/>
+                  </a:ext>
+                </a:extLst>
               </a:tr>
               <a:tr h="438912">
                 <a:tc>
@@ -3380,7 +6352,7 @@
                     <a:bodyPr/>
                     <a:lstStyle/>
                     <a:p>
-                      <a:pPr algn="ctr" indent="0" marL="0">
+                      <a:pPr marL="0" indent="0" algn="ctr">
                         <a:buNone/>
                       </a:pPr>
                       <a:r>
@@ -3401,7 +6373,7 @@
                       </a:endParaRPr>
                     </a:p>
                   </a:txBody>
-                  <a:tcPr marL="91440" marR="91440" marT="45720" marB="45720">
+                  <a:tcPr>
                     <a:lnL w="6350" cap="flat" cmpd="sng" algn="ctr">
                       <a:solidFill>
                         <a:srgbClr val="BDC3C7"/>
@@ -3448,7 +6420,7 @@
                     <a:bodyPr/>
                     <a:lstStyle/>
                     <a:p>
-                      <a:pPr algn="ctr" indent="0" marL="0">
+                      <a:pPr marL="0" indent="0" algn="ctr">
                         <a:buNone/>
                       </a:pPr>
                       <a:r>
@@ -3469,7 +6441,7 @@
                       </a:endParaRPr>
                     </a:p>
                   </a:txBody>
-                  <a:tcPr marL="91440" marR="91440" marT="45720" marB="45720">
+                  <a:tcPr>
                     <a:lnL w="6350" cap="flat" cmpd="sng" algn="ctr">
                       <a:solidFill>
                         <a:srgbClr val="BDC3C7"/>
@@ -3516,7 +6488,7 @@
                     <a:bodyPr/>
                     <a:lstStyle/>
                     <a:p>
-                      <a:pPr algn="ctr" indent="0" marL="0">
+                      <a:pPr marL="0" indent="0" algn="ctr">
                         <a:buNone/>
                       </a:pPr>
                       <a:r>
@@ -3537,7 +6509,7 @@
                       </a:endParaRPr>
                     </a:p>
                   </a:txBody>
-                  <a:tcPr marL="91440" marR="91440" marT="45720" marB="45720">
+                  <a:tcPr>
                     <a:lnL w="6350" cap="flat" cmpd="sng" algn="ctr">
                       <a:solidFill>
                         <a:srgbClr val="BDC3C7"/>
@@ -3579,6 +6551,11 @@
                     </a:solidFill>
                   </a:tcPr>
                 </a:tc>
+                <a:extLst>
+                  <a:ext uri="{0D108BD9-81ED-4DB2-BD59-A6C34878D82A}">
+                    <a16:rowId xmlns:a16="http://schemas.microsoft.com/office/drawing/2014/main" val="10002"/>
+                  </a:ext>
+                </a:extLst>
               </a:tr>
               <a:tr h="438912">
                 <a:tc>
@@ -3586,7 +6563,7 @@
                     <a:bodyPr/>
                     <a:lstStyle/>
                     <a:p>
-                      <a:pPr algn="ctr" indent="0" marL="0">
+                      <a:pPr marL="0" indent="0" algn="ctr">
                         <a:buNone/>
                       </a:pPr>
                       <a:r>
@@ -3607,7 +6584,7 @@
                       </a:endParaRPr>
                     </a:p>
                   </a:txBody>
-                  <a:tcPr marL="91440" marR="91440" marT="45720" marB="45720">
+                  <a:tcPr>
                     <a:lnL w="6350" cap="flat" cmpd="sng" algn="ctr">
                       <a:solidFill>
                         <a:srgbClr val="BDC3C7"/>
@@ -3654,7 +6631,7 @@
                     <a:bodyPr/>
                     <a:lstStyle/>
                     <a:p>
-                      <a:pPr algn="ctr" indent="0" marL="0">
+                      <a:pPr marL="0" indent="0" algn="ctr">
                         <a:buNone/>
                       </a:pPr>
                       <a:r>
@@ -3675,7 +6652,7 @@
                       </a:endParaRPr>
                     </a:p>
                   </a:txBody>
-                  <a:tcPr marL="91440" marR="91440" marT="45720" marB="45720">
+                  <a:tcPr>
                     <a:lnL w="6350" cap="flat" cmpd="sng" algn="ctr">
                       <a:solidFill>
                         <a:srgbClr val="BDC3C7"/>
@@ -3722,7 +6699,7 @@
                     <a:bodyPr/>
                     <a:lstStyle/>
                     <a:p>
-                      <a:pPr algn="ctr" indent="0" marL="0">
+                      <a:pPr marL="0" indent="0" algn="ctr">
                         <a:buNone/>
                       </a:pPr>
                       <a:r>
@@ -3743,7 +6720,7 @@
                       </a:endParaRPr>
                     </a:p>
                   </a:txBody>
-                  <a:tcPr marL="91440" marR="91440" marT="45720" marB="45720">
+                  <a:tcPr>
                     <a:lnL w="6350" cap="flat" cmpd="sng" algn="ctr">
                       <a:solidFill>
                         <a:srgbClr val="BDC3C7"/>
@@ -3785,6 +6762,11 @@
                     </a:solidFill>
                   </a:tcPr>
                 </a:tc>
+                <a:extLst>
+                  <a:ext uri="{0D108BD9-81ED-4DB2-BD59-A6C34878D82A}">
+                    <a16:rowId xmlns:a16="http://schemas.microsoft.com/office/drawing/2014/main" val="10003"/>
+                  </a:ext>
+                </a:extLst>
               </a:tr>
               <a:tr h="438912">
                 <a:tc>
@@ -3792,7 +6774,7 @@
                     <a:bodyPr/>
                     <a:lstStyle/>
                     <a:p>
-                      <a:pPr algn="ctr" indent="0" marL="0">
+                      <a:pPr marL="0" indent="0" algn="ctr">
                         <a:buNone/>
                       </a:pPr>
                       <a:r>
@@ -3813,7 +6795,7 @@
                       </a:endParaRPr>
                     </a:p>
                   </a:txBody>
-                  <a:tcPr marL="91440" marR="91440" marT="45720" marB="45720">
+                  <a:tcPr>
                     <a:lnL w="6350" cap="flat" cmpd="sng" algn="ctr">
                       <a:solidFill>
                         <a:srgbClr val="BDC3C7"/>
@@ -3860,7 +6842,7 @@
                     <a:bodyPr/>
                     <a:lstStyle/>
                     <a:p>
-                      <a:pPr algn="ctr" indent="0" marL="0">
+                      <a:pPr marL="0" indent="0" algn="ctr">
                         <a:buNone/>
                       </a:pPr>
                       <a:r>
@@ -3881,7 +6863,7 @@
                       </a:endParaRPr>
                     </a:p>
                   </a:txBody>
-                  <a:tcPr marL="91440" marR="91440" marT="45720" marB="45720">
+                  <a:tcPr>
                     <a:lnL w="6350" cap="flat" cmpd="sng" algn="ctr">
                       <a:solidFill>
                         <a:srgbClr val="BDC3C7"/>
@@ -3928,7 +6910,7 @@
                     <a:bodyPr/>
                     <a:lstStyle/>
                     <a:p>
-                      <a:pPr algn="ctr" indent="0" marL="0">
+                      <a:pPr marL="0" indent="0" algn="ctr">
                         <a:buNone/>
                       </a:pPr>
                       <a:r>
@@ -3949,7 +6931,7 @@
                       </a:endParaRPr>
                     </a:p>
                   </a:txBody>
-                  <a:tcPr marL="91440" marR="91440" marT="45720" marB="45720">
+                  <a:tcPr>
                     <a:lnL w="6350" cap="flat" cmpd="sng" algn="ctr">
                       <a:solidFill>
                         <a:srgbClr val="BDC3C7"/>
@@ -3991,6 +6973,11 @@
                     </a:solidFill>
                   </a:tcPr>
                 </a:tc>
+                <a:extLst>
+                  <a:ext uri="{0D108BD9-81ED-4DB2-BD59-A6C34878D82A}">
+                    <a16:rowId xmlns:a16="http://schemas.microsoft.com/office/drawing/2014/main" val="10004"/>
+                  </a:ext>
+                </a:extLst>
               </a:tr>
             </a:tbl>
           </a:graphicData>
@@ -4017,7 +7004,7 @@
           <a:bodyPr wrap="square" lIns="0" tIns="0" rIns="0" bIns="0" rtlCol="0" anchor="ctr"/>
           <a:lstStyle/>
           <a:p>
-            <a:pPr algn="ctr" indent="0" marL="0">
+            <a:pPr marL="0" indent="0" algn="ctr">
               <a:buNone/>
             </a:pPr>
             <a:r>
@@ -4051,6 +7038,7 @@
         <a:solidFill>
           <a:srgbClr val="F8FBFD"/>
         </a:solidFill>
+        <a:effectLst/>
       </p:bgPr>
     </p:bg>
     <p:spTree>
@@ -4091,6 +7079,13 @@
             <a:prstDash val="solid"/>
           </a:ln>
         </p:spPr>
+        <p:txBody>
+          <a:bodyPr/>
+          <a:lstStyle/>
+          <a:p>
+            <a:endParaRPr lang="en-US"/>
+          </a:p>
+        </p:txBody>
       </p:sp>
       <p:sp>
         <p:nvSpPr>
@@ -4113,7 +7108,7 @@
           <a:bodyPr wrap="square" lIns="0" tIns="0" rIns="0" bIns="0" rtlCol="0" anchor="ctr"/>
           <a:lstStyle/>
           <a:p>
-            <a:pPr algn="l" indent="0" marL="0">
+            <a:pPr marL="0" indent="0" algn="l">
               <a:buNone/>
             </a:pPr>
             <a:r>
@@ -4152,7 +7147,7 @@
           <a:bodyPr wrap="square" lIns="0" tIns="0" rIns="0" bIns="0" rtlCol="0" anchor="ctr"/>
           <a:lstStyle/>
           <a:p>
-            <a:pPr indent="0" marL="0">
+            <a:pPr marL="0" indent="0">
               <a:buNone/>
             </a:pPr>
             <a:r>
@@ -4191,7 +7186,7 @@
           <a:bodyPr wrap="square" lIns="0" tIns="0" rIns="0" bIns="0" rtlCol="0" anchor="ctr"/>
           <a:lstStyle/>
           <a:p>
-            <a:pPr indent="0" marL="0">
+            <a:pPr marL="0" indent="0">
               <a:buNone/>
             </a:pPr>
             <a:r>
@@ -4205,9 +7200,6 @@
               </a:rPr>
               <a:t>Trapezoidales en los extremos (Normal y Muy Alta): </a:t>
             </a:r>
-            <a:pPr indent="0" marL="0">
-              <a:buNone/>
-            </a:pPr>
             <a:r>
               <a:rPr lang="en-US" sz="1300" dirty="0">
                 <a:solidFill>
@@ -4244,7 +7236,7 @@
           <a:bodyPr wrap="square" lIns="0" tIns="0" rIns="0" bIns="0" rtlCol="0" anchor="ctr"/>
           <a:lstStyle/>
           <a:p>
-            <a:pPr indent="0" marL="0">
+            <a:pPr marL="0" indent="0">
               <a:buNone/>
             </a:pPr>
             <a:r>
@@ -4258,9 +7250,6 @@
               </a:rPr>
               <a:t>Triangulares en los intermedios (Elevada y Alta): </a:t>
             </a:r>
-            <a:pPr indent="0" marL="0">
-              <a:buNone/>
-            </a:pPr>
             <a:r>
               <a:rPr lang="en-US" sz="1300" dirty="0">
                 <a:solidFill>
@@ -4297,7 +7286,7 @@
           <a:bodyPr wrap="square" lIns="0" tIns="0" rIns="0" bIns="0" rtlCol="0" anchor="ctr"/>
           <a:lstStyle/>
           <a:p>
-            <a:pPr indent="0" marL="0">
+            <a:pPr marL="0" indent="0">
               <a:buNone/>
             </a:pPr>
             <a:r>
@@ -4317,7 +7306,7 @@
       </p:sp>
       <p:graphicFrame>
         <p:nvGraphicFramePr>
-          <p:cNvPr id="4" name="Table 0"/>
+          <p:cNvPr id="8" name="Table 0"/>
           <p:cNvGraphicFramePr>
             <a:graphicFrameLocks noGrp="1"/>
           </p:cNvGraphicFramePr>
@@ -4331,18 +7320,48 @@
         </p:nvGraphicFramePr>
         <p:xfrm>
           <a:off x="365760" y="3063240"/>
-          <a:ext cx="8503920" cy="914400"/>
+          <a:ext cx="8503920" cy="1965960"/>
         </p:xfrm>
         <a:graphic>
           <a:graphicData uri="http://schemas.openxmlformats.org/drawingml/2006/table">
             <a:tbl>
               <a:tblPr/>
               <a:tblGrid>
-                <a:gridCol w="1371600"/>
-                <a:gridCol w="1371600"/>
-                <a:gridCol w="2103120"/>
-                <a:gridCol w="1371600"/>
-                <a:gridCol w="2286000"/>
+                <a:gridCol w="1371600">
+                  <a:extLst>
+                    <a:ext uri="{9D8B030D-6E8A-4147-A177-3AD203B41FA5}">
+                      <a16:colId xmlns:a16="http://schemas.microsoft.com/office/drawing/2014/main" val="20000"/>
+                    </a:ext>
+                  </a:extLst>
+                </a:gridCol>
+                <a:gridCol w="1371600">
+                  <a:extLst>
+                    <a:ext uri="{9D8B030D-6E8A-4147-A177-3AD203B41FA5}">
+                      <a16:colId xmlns:a16="http://schemas.microsoft.com/office/drawing/2014/main" val="20001"/>
+                    </a:ext>
+                  </a:extLst>
+                </a:gridCol>
+                <a:gridCol w="2103120">
+                  <a:extLst>
+                    <a:ext uri="{9D8B030D-6E8A-4147-A177-3AD203B41FA5}">
+                      <a16:colId xmlns:a16="http://schemas.microsoft.com/office/drawing/2014/main" val="20002"/>
+                    </a:ext>
+                  </a:extLst>
+                </a:gridCol>
+                <a:gridCol w="1371600">
+                  <a:extLst>
+                    <a:ext uri="{9D8B030D-6E8A-4147-A177-3AD203B41FA5}">
+                      <a16:colId xmlns:a16="http://schemas.microsoft.com/office/drawing/2014/main" val="20003"/>
+                    </a:ext>
+                  </a:extLst>
+                </a:gridCol>
+                <a:gridCol w="2286000">
+                  <a:extLst>
+                    <a:ext uri="{9D8B030D-6E8A-4147-A177-3AD203B41FA5}">
+                      <a16:colId xmlns:a16="http://schemas.microsoft.com/office/drawing/2014/main" val="20004"/>
+                    </a:ext>
+                  </a:extLst>
+                </a:gridCol>
               </a:tblGrid>
               <a:tr h="393192">
                 <a:tc>
@@ -4350,7 +7369,7 @@
                     <a:bodyPr/>
                     <a:lstStyle/>
                     <a:p>
-                      <a:pPr algn="ctr" indent="0" marL="0">
+                      <a:pPr marL="0" indent="0" algn="ctr">
                         <a:buNone/>
                       </a:pPr>
                       <a:r>
@@ -4371,7 +7390,7 @@
                       </a:endParaRPr>
                     </a:p>
                   </a:txBody>
-                  <a:tcPr marL="91440" marR="91440" marT="45720" marB="45720">
+                  <a:tcPr>
                     <a:lnL w="6350" cap="flat" cmpd="sng" algn="ctr">
                       <a:solidFill>
                         <a:srgbClr val="BDC3C7"/>
@@ -4418,7 +7437,7 @@
                     <a:bodyPr/>
                     <a:lstStyle/>
                     <a:p>
-                      <a:pPr algn="ctr" indent="0" marL="0">
+                      <a:pPr marL="0" indent="0" algn="ctr">
                         <a:buNone/>
                       </a:pPr>
                       <a:r>
@@ -4439,7 +7458,7 @@
                       </a:endParaRPr>
                     </a:p>
                   </a:txBody>
-                  <a:tcPr marL="91440" marR="91440" marT="45720" marB="45720">
+                  <a:tcPr>
                     <a:lnL w="6350" cap="flat" cmpd="sng" algn="ctr">
                       <a:solidFill>
                         <a:srgbClr val="BDC3C7"/>
@@ -4486,7 +7505,7 @@
                     <a:bodyPr/>
                     <a:lstStyle/>
                     <a:p>
-                      <a:pPr algn="ctr" indent="0" marL="0">
+                      <a:pPr marL="0" indent="0" algn="ctr">
                         <a:buNone/>
                       </a:pPr>
                       <a:r>
@@ -4507,7 +7526,7 @@
                       </a:endParaRPr>
                     </a:p>
                   </a:txBody>
-                  <a:tcPr marL="91440" marR="91440" marT="45720" marB="45720">
+                  <a:tcPr>
                     <a:lnL w="6350" cap="flat" cmpd="sng" algn="ctr">
                       <a:solidFill>
                         <a:srgbClr val="BDC3C7"/>
@@ -4554,7 +7573,7 @@
                     <a:bodyPr/>
                     <a:lstStyle/>
                     <a:p>
-                      <a:pPr algn="ctr" indent="0" marL="0">
+                      <a:pPr marL="0" indent="0" algn="ctr">
                         <a:buNone/>
                       </a:pPr>
                       <a:r>
@@ -4575,7 +7594,7 @@
                       </a:endParaRPr>
                     </a:p>
                   </a:txBody>
-                  <a:tcPr marL="91440" marR="91440" marT="45720" marB="45720">
+                  <a:tcPr>
                     <a:lnL w="6350" cap="flat" cmpd="sng" algn="ctr">
                       <a:solidFill>
                         <a:srgbClr val="BDC3C7"/>
@@ -4622,7 +7641,7 @@
                     <a:bodyPr/>
                     <a:lstStyle/>
                     <a:p>
-                      <a:pPr algn="ctr" indent="0" marL="0">
+                      <a:pPr marL="0" indent="0" algn="ctr">
                         <a:buNone/>
                       </a:pPr>
                       <a:r>
@@ -4643,7 +7662,7 @@
                       </a:endParaRPr>
                     </a:p>
                   </a:txBody>
-                  <a:tcPr marL="91440" marR="91440" marT="45720" marB="45720">
+                  <a:tcPr>
                     <a:lnL w="6350" cap="flat" cmpd="sng" algn="ctr">
                       <a:solidFill>
                         <a:srgbClr val="BDC3C7"/>
@@ -4685,6 +7704,11 @@
                     </a:solidFill>
                   </a:tcPr>
                 </a:tc>
+                <a:extLst>
+                  <a:ext uri="{0D108BD9-81ED-4DB2-BD59-A6C34878D82A}">
+                    <a16:rowId xmlns:a16="http://schemas.microsoft.com/office/drawing/2014/main" val="10000"/>
+                  </a:ext>
+                </a:extLst>
               </a:tr>
               <a:tr h="393192">
                 <a:tc>
@@ -4692,7 +7716,7 @@
                     <a:bodyPr/>
                     <a:lstStyle/>
                     <a:p>
-                      <a:pPr indent="0" marL="0">
+                      <a:pPr marL="0" indent="0">
                         <a:buNone/>
                       </a:pPr>
                       <a:r>
@@ -4713,7 +7737,7 @@
                       </a:endParaRPr>
                     </a:p>
                   </a:txBody>
-                  <a:tcPr marL="91440" marR="91440" marT="45720" marB="45720">
+                  <a:tcPr>
                     <a:lnL w="6350" cap="flat" cmpd="sng" algn="ctr">
                       <a:solidFill>
                         <a:srgbClr val="BDC3C7"/>
@@ -4760,7 +7784,7 @@
                     <a:bodyPr/>
                     <a:lstStyle/>
                     <a:p>
-                      <a:pPr indent="0" marL="0">
+                      <a:pPr marL="0" indent="0">
                         <a:buNone/>
                       </a:pPr>
                       <a:r>
@@ -4781,7 +7805,7 @@
                       </a:endParaRPr>
                     </a:p>
                   </a:txBody>
-                  <a:tcPr marL="91440" marR="91440" marT="45720" marB="45720">
+                  <a:tcPr>
                     <a:lnL w="6350" cap="flat" cmpd="sng" algn="ctr">
                       <a:solidFill>
                         <a:srgbClr val="BDC3C7"/>
@@ -4828,7 +7852,7 @@
                     <a:bodyPr/>
                     <a:lstStyle/>
                     <a:p>
-                      <a:pPr indent="0" marL="0">
+                      <a:pPr marL="0" indent="0">
                         <a:buNone/>
                       </a:pPr>
                       <a:r>
@@ -4849,7 +7873,7 @@
                       </a:endParaRPr>
                     </a:p>
                   </a:txBody>
-                  <a:tcPr marL="91440" marR="91440" marT="45720" marB="45720">
+                  <a:tcPr>
                     <a:lnL w="6350" cap="flat" cmpd="sng" algn="ctr">
                       <a:solidFill>
                         <a:srgbClr val="BDC3C7"/>
@@ -4896,7 +7920,7 @@
                     <a:bodyPr/>
                     <a:lstStyle/>
                     <a:p>
-                      <a:pPr indent="0" marL="0">
+                      <a:pPr marL="0" indent="0">
                         <a:buNone/>
                       </a:pPr>
                       <a:r>
@@ -4917,7 +7941,7 @@
                       </a:endParaRPr>
                     </a:p>
                   </a:txBody>
-                  <a:tcPr marL="91440" marR="91440" marT="45720" marB="45720">
+                  <a:tcPr>
                     <a:lnL w="6350" cap="flat" cmpd="sng" algn="ctr">
                       <a:solidFill>
                         <a:srgbClr val="BDC3C7"/>
@@ -4964,7 +7988,7 @@
                     <a:bodyPr/>
                     <a:lstStyle/>
                     <a:p>
-                      <a:pPr indent="0" marL="0">
+                      <a:pPr marL="0" indent="0">
                         <a:buNone/>
                       </a:pPr>
                       <a:r>
@@ -4985,7 +8009,7 @@
                       </a:endParaRPr>
                     </a:p>
                   </a:txBody>
-                  <a:tcPr marL="91440" marR="91440" marT="45720" marB="45720">
+                  <a:tcPr>
                     <a:lnL w="6350" cap="flat" cmpd="sng" algn="ctr">
                       <a:solidFill>
                         <a:srgbClr val="BDC3C7"/>
@@ -5027,6 +8051,11 @@
                     </a:solidFill>
                   </a:tcPr>
                 </a:tc>
+                <a:extLst>
+                  <a:ext uri="{0D108BD9-81ED-4DB2-BD59-A6C34878D82A}">
+                    <a16:rowId xmlns:a16="http://schemas.microsoft.com/office/drawing/2014/main" val="10001"/>
+                  </a:ext>
+                </a:extLst>
               </a:tr>
               <a:tr h="393192">
                 <a:tc>
@@ -5034,7 +8063,7 @@
                     <a:bodyPr/>
                     <a:lstStyle/>
                     <a:p>
-                      <a:pPr indent="0" marL="0">
+                      <a:pPr marL="0" indent="0">
                         <a:buNone/>
                       </a:pPr>
                       <a:r>
@@ -5055,7 +8084,7 @@
                       </a:endParaRPr>
                     </a:p>
                   </a:txBody>
-                  <a:tcPr marL="91440" marR="91440" marT="45720" marB="45720">
+                  <a:tcPr>
                     <a:lnL w="6350" cap="flat" cmpd="sng" algn="ctr">
                       <a:solidFill>
                         <a:srgbClr val="BDC3C7"/>
@@ -5102,7 +8131,7 @@
                     <a:bodyPr/>
                     <a:lstStyle/>
                     <a:p>
-                      <a:pPr indent="0" marL="0">
+                      <a:pPr marL="0" indent="0">
                         <a:buNone/>
                       </a:pPr>
                       <a:r>
@@ -5123,7 +8152,7 @@
                       </a:endParaRPr>
                     </a:p>
                   </a:txBody>
-                  <a:tcPr marL="91440" marR="91440" marT="45720" marB="45720">
+                  <a:tcPr>
                     <a:lnL w="6350" cap="flat" cmpd="sng" algn="ctr">
                       <a:solidFill>
                         <a:srgbClr val="BDC3C7"/>
@@ -5170,7 +8199,7 @@
                     <a:bodyPr/>
                     <a:lstStyle/>
                     <a:p>
-                      <a:pPr indent="0" marL="0">
+                      <a:pPr marL="0" indent="0">
                         <a:buNone/>
                       </a:pPr>
                       <a:r>
@@ -5191,7 +8220,7 @@
                       </a:endParaRPr>
                     </a:p>
                   </a:txBody>
-                  <a:tcPr marL="91440" marR="91440" marT="45720" marB="45720">
+                  <a:tcPr>
                     <a:lnL w="6350" cap="flat" cmpd="sng" algn="ctr">
                       <a:solidFill>
                         <a:srgbClr val="BDC3C7"/>
@@ -5238,7 +8267,7 @@
                     <a:bodyPr/>
                     <a:lstStyle/>
                     <a:p>
-                      <a:pPr indent="0" marL="0">
+                      <a:pPr marL="0" indent="0">
                         <a:buNone/>
                       </a:pPr>
                       <a:r>
@@ -5259,7 +8288,7 @@
                       </a:endParaRPr>
                     </a:p>
                   </a:txBody>
-                  <a:tcPr marL="91440" marR="91440" marT="45720" marB="45720">
+                  <a:tcPr>
                     <a:lnL w="6350" cap="flat" cmpd="sng" algn="ctr">
                       <a:solidFill>
                         <a:srgbClr val="BDC3C7"/>
@@ -5306,7 +8335,7 @@
                     <a:bodyPr/>
                     <a:lstStyle/>
                     <a:p>
-                      <a:pPr indent="0" marL="0">
+                      <a:pPr marL="0" indent="0">
                         <a:buNone/>
                       </a:pPr>
                       <a:r>
@@ -5327,7 +8356,7 @@
                       </a:endParaRPr>
                     </a:p>
                   </a:txBody>
-                  <a:tcPr marL="91440" marR="91440" marT="45720" marB="45720">
+                  <a:tcPr>
                     <a:lnL w="6350" cap="flat" cmpd="sng" algn="ctr">
                       <a:solidFill>
                         <a:srgbClr val="BDC3C7"/>
@@ -5369,6 +8398,11 @@
                     </a:solidFill>
                   </a:tcPr>
                 </a:tc>
+                <a:extLst>
+                  <a:ext uri="{0D108BD9-81ED-4DB2-BD59-A6C34878D82A}">
+                    <a16:rowId xmlns:a16="http://schemas.microsoft.com/office/drawing/2014/main" val="10002"/>
+                  </a:ext>
+                </a:extLst>
               </a:tr>
               <a:tr h="393192">
                 <a:tc>
@@ -5376,7 +8410,7 @@
                     <a:bodyPr/>
                     <a:lstStyle/>
                     <a:p>
-                      <a:pPr indent="0" marL="0">
+                      <a:pPr marL="0" indent="0">
                         <a:buNone/>
                       </a:pPr>
                       <a:r>
@@ -5397,7 +8431,7 @@
                       </a:endParaRPr>
                     </a:p>
                   </a:txBody>
-                  <a:tcPr marL="91440" marR="91440" marT="45720" marB="45720">
+                  <a:tcPr>
                     <a:lnL w="6350" cap="flat" cmpd="sng" algn="ctr">
                       <a:solidFill>
                         <a:srgbClr val="BDC3C7"/>
@@ -5444,7 +8478,7 @@
                     <a:bodyPr/>
                     <a:lstStyle/>
                     <a:p>
-                      <a:pPr indent="0" marL="0">
+                      <a:pPr marL="0" indent="0">
                         <a:buNone/>
                       </a:pPr>
                       <a:r>
@@ -5465,7 +8499,7 @@
                       </a:endParaRPr>
                     </a:p>
                   </a:txBody>
-                  <a:tcPr marL="91440" marR="91440" marT="45720" marB="45720">
+                  <a:tcPr>
                     <a:lnL w="6350" cap="flat" cmpd="sng" algn="ctr">
                       <a:solidFill>
                         <a:srgbClr val="BDC3C7"/>
@@ -5512,7 +8546,7 @@
                     <a:bodyPr/>
                     <a:lstStyle/>
                     <a:p>
-                      <a:pPr indent="0" marL="0">
+                      <a:pPr marL="0" indent="0">
                         <a:buNone/>
                       </a:pPr>
                       <a:r>
@@ -5533,7 +8567,7 @@
                       </a:endParaRPr>
                     </a:p>
                   </a:txBody>
-                  <a:tcPr marL="91440" marR="91440" marT="45720" marB="45720">
+                  <a:tcPr>
                     <a:lnL w="6350" cap="flat" cmpd="sng" algn="ctr">
                       <a:solidFill>
                         <a:srgbClr val="BDC3C7"/>
@@ -5580,7 +8614,7 @@
                     <a:bodyPr/>
                     <a:lstStyle/>
                     <a:p>
-                      <a:pPr indent="0" marL="0">
+                      <a:pPr marL="0" indent="0">
                         <a:buNone/>
                       </a:pPr>
                       <a:r>
@@ -5601,7 +8635,7 @@
                       </a:endParaRPr>
                     </a:p>
                   </a:txBody>
-                  <a:tcPr marL="91440" marR="91440" marT="45720" marB="45720">
+                  <a:tcPr>
                     <a:lnL w="6350" cap="flat" cmpd="sng" algn="ctr">
                       <a:solidFill>
                         <a:srgbClr val="BDC3C7"/>
@@ -5648,7 +8682,7 @@
                     <a:bodyPr/>
                     <a:lstStyle/>
                     <a:p>
-                      <a:pPr indent="0" marL="0">
+                      <a:pPr marL="0" indent="0">
                         <a:buNone/>
                       </a:pPr>
                       <a:r>
@@ -5669,7 +8703,7 @@
                       </a:endParaRPr>
                     </a:p>
                   </a:txBody>
-                  <a:tcPr marL="91440" marR="91440" marT="45720" marB="45720">
+                  <a:tcPr>
                     <a:lnL w="6350" cap="flat" cmpd="sng" algn="ctr">
                       <a:solidFill>
                         <a:srgbClr val="BDC3C7"/>
@@ -5711,6 +8745,11 @@
                     </a:solidFill>
                   </a:tcPr>
                 </a:tc>
+                <a:extLst>
+                  <a:ext uri="{0D108BD9-81ED-4DB2-BD59-A6C34878D82A}">
+                    <a16:rowId xmlns:a16="http://schemas.microsoft.com/office/drawing/2014/main" val="10003"/>
+                  </a:ext>
+                </a:extLst>
               </a:tr>
               <a:tr h="393192">
                 <a:tc>
@@ -5718,7 +8757,7 @@
                     <a:bodyPr/>
                     <a:lstStyle/>
                     <a:p>
-                      <a:pPr indent="0" marL="0">
+                      <a:pPr marL="0" indent="0">
                         <a:buNone/>
                       </a:pPr>
                       <a:r>
@@ -5739,7 +8778,7 @@
                       </a:endParaRPr>
                     </a:p>
                   </a:txBody>
-                  <a:tcPr marL="91440" marR="91440" marT="45720" marB="45720">
+                  <a:tcPr>
                     <a:lnL w="6350" cap="flat" cmpd="sng" algn="ctr">
                       <a:solidFill>
                         <a:srgbClr val="BDC3C7"/>
@@ -5786,7 +8825,7 @@
                     <a:bodyPr/>
                     <a:lstStyle/>
                     <a:p>
-                      <a:pPr indent="0" marL="0">
+                      <a:pPr marL="0" indent="0">
                         <a:buNone/>
                       </a:pPr>
                       <a:r>
@@ -5807,7 +8846,7 @@
                       </a:endParaRPr>
                     </a:p>
                   </a:txBody>
-                  <a:tcPr marL="91440" marR="91440" marT="45720" marB="45720">
+                  <a:tcPr>
                     <a:lnL w="6350" cap="flat" cmpd="sng" algn="ctr">
                       <a:solidFill>
                         <a:srgbClr val="BDC3C7"/>
@@ -5854,7 +8893,7 @@
                     <a:bodyPr/>
                     <a:lstStyle/>
                     <a:p>
-                      <a:pPr indent="0" marL="0">
+                      <a:pPr marL="0" indent="0">
                         <a:buNone/>
                       </a:pPr>
                       <a:r>
@@ -5875,7 +8914,7 @@
                       </a:endParaRPr>
                     </a:p>
                   </a:txBody>
-                  <a:tcPr marL="91440" marR="91440" marT="45720" marB="45720">
+                  <a:tcPr>
                     <a:lnL w="6350" cap="flat" cmpd="sng" algn="ctr">
                       <a:solidFill>
                         <a:srgbClr val="BDC3C7"/>
@@ -5922,7 +8961,7 @@
                     <a:bodyPr/>
                     <a:lstStyle/>
                     <a:p>
-                      <a:pPr indent="0" marL="0">
+                      <a:pPr marL="0" indent="0">
                         <a:buNone/>
                       </a:pPr>
                       <a:r>
@@ -5943,7 +8982,7 @@
                       </a:endParaRPr>
                     </a:p>
                   </a:txBody>
-                  <a:tcPr marL="91440" marR="91440" marT="45720" marB="45720">
+                  <a:tcPr>
                     <a:lnL w="6350" cap="flat" cmpd="sng" algn="ctr">
                       <a:solidFill>
                         <a:srgbClr val="BDC3C7"/>
@@ -5990,7 +9029,7 @@
                     <a:bodyPr/>
                     <a:lstStyle/>
                     <a:p>
-                      <a:pPr indent="0" marL="0">
+                      <a:pPr marL="0" indent="0">
                         <a:buNone/>
                       </a:pPr>
                       <a:r>
@@ -6011,7 +9050,7 @@
                       </a:endParaRPr>
                     </a:p>
                   </a:txBody>
-                  <a:tcPr marL="91440" marR="91440" marT="45720" marB="45720">
+                  <a:tcPr>
                     <a:lnL w="6350" cap="flat" cmpd="sng" algn="ctr">
                       <a:solidFill>
                         <a:srgbClr val="BDC3C7"/>
@@ -6053,6 +9092,11 @@
                     </a:solidFill>
                   </a:tcPr>
                 </a:tc>
+                <a:extLst>
+                  <a:ext uri="{0D108BD9-81ED-4DB2-BD59-A6C34878D82A}">
+                    <a16:rowId xmlns:a16="http://schemas.microsoft.com/office/drawing/2014/main" val="10004"/>
+                  </a:ext>
+                </a:extLst>
               </a:tr>
             </a:tbl>
           </a:graphicData>
@@ -6074,6 +9118,7 @@
         <a:solidFill>
           <a:srgbClr val="F8FBFD"/>
         </a:solidFill>
+        <a:effectLst/>
       </p:bgPr>
     </p:bg>
     <p:spTree>
@@ -6114,6 +9159,13 @@
             <a:prstDash val="solid"/>
           </a:ln>
         </p:spPr>
+        <p:txBody>
+          <a:bodyPr/>
+          <a:lstStyle/>
+          <a:p>
+            <a:endParaRPr lang="en-US"/>
+          </a:p>
+        </p:txBody>
       </p:sp>
       <p:sp>
         <p:nvSpPr>
@@ -6136,7 +9188,7 @@
           <a:bodyPr wrap="square" lIns="0" tIns="0" rIns="0" bIns="0" rtlCol="0" anchor="ctr"/>
           <a:lstStyle/>
           <a:p>
-            <a:pPr algn="l" indent="0" marL="0">
+            <a:pPr marL="0" indent="0" algn="l">
               <a:buNone/>
             </a:pPr>
             <a:r>
@@ -6175,7 +9227,7 @@
           <a:bodyPr wrap="square" lIns="0" tIns="0" rIns="0" bIns="0" rtlCol="0" anchor="ctr"/>
           <a:lstStyle/>
           <a:p>
-            <a:pPr indent="0" marL="0">
+            <a:pPr marL="0" indent="0">
               <a:buNone/>
             </a:pPr>
             <a:r>
@@ -6217,6 +9269,13 @@
             <a:prstDash val="solid"/>
           </a:ln>
         </p:spPr>
+        <p:txBody>
+          <a:bodyPr/>
+          <a:lstStyle/>
+          <a:p>
+            <a:endParaRPr lang="en-US"/>
+          </a:p>
+        </p:txBody>
       </p:sp>
       <p:sp>
         <p:nvSpPr>
@@ -6239,7 +9298,7 @@
           <a:bodyPr wrap="square" lIns="0" tIns="0" rIns="0" bIns="0" rtlCol="0" anchor="ctr"/>
           <a:lstStyle/>
           <a:p>
-            <a:pPr algn="ctr" indent="0" marL="0">
+            <a:pPr marL="0" indent="0" algn="ctr">
               <a:buNone/>
             </a:pPr>
             <a:r>
@@ -6281,6 +9340,13 @@
             <a:prstDash val="solid"/>
           </a:ln>
         </p:spPr>
+        <p:txBody>
+          <a:bodyPr/>
+          <a:lstStyle/>
+          <a:p>
+            <a:endParaRPr lang="en-US"/>
+          </a:p>
+        </p:txBody>
       </p:sp>
       <p:sp>
         <p:nvSpPr>
@@ -6306,6 +9372,13 @@
             <a:prstDash val="solid"/>
           </a:ln>
         </p:spPr>
+        <p:txBody>
+          <a:bodyPr/>
+          <a:lstStyle/>
+          <a:p>
+            <a:endParaRPr lang="en-US"/>
+          </a:p>
+        </p:txBody>
       </p:sp>
       <p:sp>
         <p:nvSpPr>
@@ -6328,7 +9401,7 @@
           <a:bodyPr wrap="square" lIns="0" tIns="0" rIns="0" bIns="0" rtlCol="0" anchor="ctr"/>
           <a:lstStyle/>
           <a:p>
-            <a:pPr algn="ctr" indent="0" marL="0">
+            <a:pPr marL="0" indent="0" algn="ctr">
               <a:buNone/>
             </a:pPr>
             <a:r>
@@ -6367,7 +9440,7 @@
           <a:bodyPr wrap="square" lIns="0" tIns="0" rIns="0" bIns="0" rtlCol="0" anchor="ctr"/>
           <a:lstStyle/>
           <a:p>
-            <a:pPr algn="ctr" indent="0" marL="0">
+            <a:pPr marL="0" indent="0" algn="ctr">
               <a:buNone/>
             </a:pPr>
             <a:r>
@@ -6406,7 +9479,7 @@
           <a:bodyPr wrap="square" lIns="0" tIns="0" rIns="0" bIns="0" rtlCol="0" anchor="ctr"/>
           <a:lstStyle/>
           <a:p>
-            <a:pPr algn="ctr" indent="0" marL="0">
+            <a:pPr marL="0" indent="0" algn="ctr">
               <a:buNone/>
             </a:pPr>
             <a:r>
@@ -6448,6 +9521,13 @@
             <a:prstDash val="solid"/>
           </a:ln>
         </p:spPr>
+        <p:txBody>
+          <a:bodyPr/>
+          <a:lstStyle/>
+          <a:p>
+            <a:endParaRPr lang="en-US"/>
+          </a:p>
+        </p:txBody>
       </p:sp>
       <p:sp>
         <p:nvSpPr>
@@ -6473,6 +9553,13 @@
             <a:prstDash val="solid"/>
           </a:ln>
         </p:spPr>
+        <p:txBody>
+          <a:bodyPr/>
+          <a:lstStyle/>
+          <a:p>
+            <a:endParaRPr lang="en-US"/>
+          </a:p>
+        </p:txBody>
       </p:sp>
       <p:sp>
         <p:nvSpPr>
@@ -6495,7 +9582,7 @@
           <a:bodyPr wrap="square" lIns="0" tIns="0" rIns="0" bIns="0" rtlCol="0" anchor="ctr"/>
           <a:lstStyle/>
           <a:p>
-            <a:pPr algn="ctr" indent="0" marL="0">
+            <a:pPr marL="0" indent="0" algn="ctr">
               <a:buNone/>
             </a:pPr>
             <a:r>
@@ -6534,7 +9621,7 @@
           <a:bodyPr wrap="square" lIns="0" tIns="0" rIns="0" bIns="0" rtlCol="0" anchor="ctr"/>
           <a:lstStyle/>
           <a:p>
-            <a:pPr algn="ctr" indent="0" marL="0">
+            <a:pPr marL="0" indent="0" algn="ctr">
               <a:buNone/>
             </a:pPr>
             <a:r>
@@ -6573,7 +9660,7 @@
           <a:bodyPr wrap="square" lIns="0" tIns="0" rIns="0" bIns="0" rtlCol="0" anchor="ctr"/>
           <a:lstStyle/>
           <a:p>
-            <a:pPr algn="ctr" indent="0" marL="0">
+            <a:pPr marL="0" indent="0" algn="ctr">
               <a:buNone/>
             </a:pPr>
             <a:r>
@@ -6615,6 +9702,13 @@
             <a:prstDash val="solid"/>
           </a:ln>
         </p:spPr>
+        <p:txBody>
+          <a:bodyPr/>
+          <a:lstStyle/>
+          <a:p>
+            <a:endParaRPr lang="en-US"/>
+          </a:p>
+        </p:txBody>
       </p:sp>
       <p:sp>
         <p:nvSpPr>
@@ -6640,6 +9734,13 @@
             <a:prstDash val="solid"/>
           </a:ln>
         </p:spPr>
+        <p:txBody>
+          <a:bodyPr/>
+          <a:lstStyle/>
+          <a:p>
+            <a:endParaRPr lang="en-US"/>
+          </a:p>
+        </p:txBody>
       </p:sp>
       <p:sp>
         <p:nvSpPr>
@@ -6662,7 +9763,7 @@
           <a:bodyPr wrap="square" lIns="0" tIns="0" rIns="0" bIns="0" rtlCol="0" anchor="ctr"/>
           <a:lstStyle/>
           <a:p>
-            <a:pPr algn="ctr" indent="0" marL="0">
+            <a:pPr marL="0" indent="0" algn="ctr">
               <a:buNone/>
             </a:pPr>
             <a:r>
@@ -6701,7 +9802,7 @@
           <a:bodyPr wrap="square" lIns="0" tIns="0" rIns="0" bIns="0" rtlCol="0" anchor="ctr"/>
           <a:lstStyle/>
           <a:p>
-            <a:pPr algn="ctr" indent="0" marL="0">
+            <a:pPr marL="0" indent="0" algn="ctr">
               <a:buNone/>
             </a:pPr>
             <a:r>
@@ -6740,7 +9841,7 @@
           <a:bodyPr wrap="square" lIns="0" tIns="0" rIns="0" bIns="0" rtlCol="0" anchor="ctr"/>
           <a:lstStyle/>
           <a:p>
-            <a:pPr algn="ctr" indent="0" marL="0">
+            <a:pPr marL="0" indent="0" algn="ctr">
               <a:buNone/>
             </a:pPr>
             <a:r>
@@ -6782,6 +9883,13 @@
             <a:prstDash val="solid"/>
           </a:ln>
         </p:spPr>
+        <p:txBody>
+          <a:bodyPr/>
+          <a:lstStyle/>
+          <a:p>
+            <a:endParaRPr lang="en-US"/>
+          </a:p>
+        </p:txBody>
       </p:sp>
       <p:sp>
         <p:nvSpPr>
@@ -6807,6 +9915,13 @@
             <a:prstDash val="solid"/>
           </a:ln>
         </p:spPr>
+        <p:txBody>
+          <a:bodyPr/>
+          <a:lstStyle/>
+          <a:p>
+            <a:endParaRPr lang="en-US"/>
+          </a:p>
+        </p:txBody>
       </p:sp>
       <p:sp>
         <p:nvSpPr>
@@ -6829,7 +9944,7 @@
           <a:bodyPr wrap="square" lIns="0" tIns="0" rIns="0" bIns="0" rtlCol="0" anchor="ctr"/>
           <a:lstStyle/>
           <a:p>
-            <a:pPr algn="ctr" indent="0" marL="0">
+            <a:pPr marL="0" indent="0" algn="ctr">
               <a:buNone/>
             </a:pPr>
             <a:r>
@@ -6868,7 +9983,7 @@
           <a:bodyPr wrap="square" lIns="0" tIns="0" rIns="0" bIns="0" rtlCol="0" anchor="ctr"/>
           <a:lstStyle/>
           <a:p>
-            <a:pPr algn="ctr" indent="0" marL="0">
+            <a:pPr marL="0" indent="0" algn="ctr">
               <a:buNone/>
             </a:pPr>
             <a:r>
@@ -6907,7 +10022,7 @@
           <a:bodyPr wrap="square" lIns="0" tIns="0" rIns="0" bIns="0" rtlCol="0" anchor="ctr"/>
           <a:lstStyle/>
           <a:p>
-            <a:pPr algn="ctr" indent="0" marL="0">
+            <a:pPr marL="0" indent="0" algn="ctr">
               <a:buNone/>
             </a:pPr>
             <a:r>
@@ -6946,7 +10061,7 @@
           <a:bodyPr wrap="square" lIns="0" tIns="0" rIns="0" bIns="0" rtlCol="0" anchor="ctr"/>
           <a:lstStyle/>
           <a:p>
-            <a:pPr algn="l" indent="0" marL="0">
+            <a:pPr marL="0" indent="0" algn="l">
               <a:buNone/>
             </a:pPr>
             <a:r>
@@ -6980,6 +10095,7 @@
         <a:solidFill>
           <a:srgbClr val="F8FBFD"/>
         </a:solidFill>
+        <a:effectLst/>
       </p:bgPr>
     </p:bg>
     <p:spTree>
@@ -7020,6 +10136,13 @@
             <a:prstDash val="solid"/>
           </a:ln>
         </p:spPr>
+        <p:txBody>
+          <a:bodyPr/>
+          <a:lstStyle/>
+          <a:p>
+            <a:endParaRPr lang="en-US"/>
+          </a:p>
+        </p:txBody>
       </p:sp>
       <p:sp>
         <p:nvSpPr>
@@ -7042,7 +10165,7 @@
           <a:bodyPr wrap="square" lIns="0" tIns="0" rIns="0" bIns="0" rtlCol="0" anchor="ctr"/>
           <a:lstStyle/>
           <a:p>
-            <a:pPr algn="l" indent="0" marL="0">
+            <a:pPr marL="0" indent="0" algn="l">
               <a:buNone/>
             </a:pPr>
             <a:r>
@@ -7084,6 +10207,13 @@
             <a:prstDash val="solid"/>
           </a:ln>
         </p:spPr>
+        <p:txBody>
+          <a:bodyPr/>
+          <a:lstStyle/>
+          <a:p>
+            <a:endParaRPr lang="en-US"/>
+          </a:p>
+        </p:txBody>
       </p:sp>
       <p:sp>
         <p:nvSpPr>
@@ -7106,7 +10236,7 @@
           <a:bodyPr wrap="square" lIns="0" tIns="0" rIns="0" bIns="0" rtlCol="0" anchor="ctr"/>
           <a:lstStyle/>
           <a:p>
-            <a:pPr algn="ctr" indent="0" marL="0">
+            <a:pPr marL="0" indent="0" algn="ctr">
               <a:buNone/>
             </a:pPr>
             <a:r>
@@ -7145,7 +10275,7 @@
           <a:bodyPr wrap="square" lIns="0" tIns="0" rIns="0" bIns="0" rtlCol="0" anchor="ctr"/>
           <a:lstStyle/>
           <a:p>
-            <a:pPr indent="0" marL="0">
+            <a:pPr marL="0" indent="0">
               <a:buNone/>
             </a:pPr>
             <a:r>
@@ -7184,7 +10314,7 @@
           <a:bodyPr wrap="square" lIns="0" tIns="0" rIns="0" bIns="0" rtlCol="0" anchor="ctr"/>
           <a:lstStyle/>
           <a:p>
-            <a:pPr indent="0" marL="0">
+            <a:pPr marL="0" indent="0">
               <a:buNone/>
             </a:pPr>
             <a:r>
@@ -7226,6 +10356,13 @@
             <a:prstDash val="solid"/>
           </a:ln>
         </p:spPr>
+        <p:txBody>
+          <a:bodyPr/>
+          <a:lstStyle/>
+          <a:p>
+            <a:endParaRPr lang="en-US"/>
+          </a:p>
+        </p:txBody>
       </p:sp>
       <p:sp>
         <p:nvSpPr>
@@ -7248,7 +10385,7 @@
           <a:bodyPr wrap="square" lIns="0" tIns="0" rIns="0" bIns="0" rtlCol="0" anchor="ctr"/>
           <a:lstStyle/>
           <a:p>
-            <a:pPr algn="ctr" indent="0" marL="0">
+            <a:pPr marL="0" indent="0" algn="ctr">
               <a:buNone/>
             </a:pPr>
             <a:r>
@@ -7287,7 +10424,7 @@
           <a:bodyPr wrap="square" lIns="0" tIns="0" rIns="0" bIns="0" rtlCol="0" anchor="ctr"/>
           <a:lstStyle/>
           <a:p>
-            <a:pPr indent="0" marL="0">
+            <a:pPr marL="0" indent="0">
               <a:buNone/>
             </a:pPr>
             <a:r>
@@ -7326,7 +10463,7 @@
           <a:bodyPr wrap="square" lIns="0" tIns="0" rIns="0" bIns="0" rtlCol="0" anchor="ctr"/>
           <a:lstStyle/>
           <a:p>
-            <a:pPr indent="0" marL="0">
+            <a:pPr marL="0" indent="0">
               <a:buNone/>
             </a:pPr>
             <a:r>
@@ -7368,6 +10505,13 @@
             <a:prstDash val="solid"/>
           </a:ln>
         </p:spPr>
+        <p:txBody>
+          <a:bodyPr/>
+          <a:lstStyle/>
+          <a:p>
+            <a:endParaRPr lang="en-US"/>
+          </a:p>
+        </p:txBody>
       </p:sp>
       <p:sp>
         <p:nvSpPr>
@@ -7390,7 +10534,7 @@
           <a:bodyPr wrap="square" lIns="0" tIns="0" rIns="0" bIns="0" rtlCol="0" anchor="ctr"/>
           <a:lstStyle/>
           <a:p>
-            <a:pPr algn="ctr" indent="0" marL="0">
+            <a:pPr marL="0" indent="0" algn="ctr">
               <a:buNone/>
             </a:pPr>
             <a:r>
@@ -7429,7 +10573,7 @@
           <a:bodyPr wrap="square" lIns="0" tIns="0" rIns="0" bIns="0" rtlCol="0" anchor="ctr"/>
           <a:lstStyle/>
           <a:p>
-            <a:pPr indent="0" marL="0">
+            <a:pPr marL="0" indent="0">
               <a:buNone/>
             </a:pPr>
             <a:r>
@@ -7468,7 +10612,7 @@
           <a:bodyPr wrap="square" lIns="0" tIns="0" rIns="0" bIns="0" rtlCol="0" anchor="ctr"/>
           <a:lstStyle/>
           <a:p>
-            <a:pPr indent="0" marL="0">
+            <a:pPr marL="0" indent="0">
               <a:buNone/>
             </a:pPr>
             <a:r>
@@ -7510,6 +10654,13 @@
             <a:prstDash val="solid"/>
           </a:ln>
         </p:spPr>
+        <p:txBody>
+          <a:bodyPr/>
+          <a:lstStyle/>
+          <a:p>
+            <a:endParaRPr lang="en-US"/>
+          </a:p>
+        </p:txBody>
       </p:sp>
       <p:sp>
         <p:nvSpPr>
@@ -7532,7 +10683,7 @@
           <a:bodyPr wrap="square" lIns="0" tIns="0" rIns="0" bIns="0" rtlCol="0" anchor="ctr"/>
           <a:lstStyle/>
           <a:p>
-            <a:pPr algn="ctr" indent="0" marL="0">
+            <a:pPr marL="0" indent="0" algn="ctr">
               <a:buNone/>
             </a:pPr>
             <a:r>
@@ -7571,7 +10722,7 @@
           <a:bodyPr wrap="square" lIns="0" tIns="0" rIns="0" bIns="0" rtlCol="0" anchor="ctr"/>
           <a:lstStyle/>
           <a:p>
-            <a:pPr indent="0" marL="0">
+            <a:pPr marL="0" indent="0">
               <a:buNone/>
             </a:pPr>
             <a:r>
@@ -7610,7 +10761,7 @@
           <a:bodyPr wrap="square" lIns="0" tIns="0" rIns="0" bIns="0" rtlCol="0" anchor="ctr"/>
           <a:lstStyle/>
           <a:p>
-            <a:pPr indent="0" marL="0">
+            <a:pPr marL="0" indent="0">
               <a:buNone/>
             </a:pPr>
             <a:r>
@@ -7652,6 +10803,13 @@
             <a:prstDash val="solid"/>
           </a:ln>
         </p:spPr>
+        <p:txBody>
+          <a:bodyPr/>
+          <a:lstStyle/>
+          <a:p>
+            <a:endParaRPr lang="en-US"/>
+          </a:p>
+        </p:txBody>
       </p:sp>
       <p:sp>
         <p:nvSpPr>
@@ -7674,7 +10832,7 @@
           <a:bodyPr wrap="square" lIns="0" tIns="0" rIns="0" bIns="0" rtlCol="0" anchor="ctr"/>
           <a:lstStyle/>
           <a:p>
-            <a:pPr algn="ctr" indent="0" marL="0">
+            <a:pPr marL="0" indent="0" algn="ctr">
               <a:buNone/>
             </a:pPr>
             <a:r>
@@ -7713,7 +10871,7 @@
           <a:bodyPr wrap="square" lIns="0" tIns="0" rIns="0" bIns="0" rtlCol="0" anchor="ctr"/>
           <a:lstStyle/>
           <a:p>
-            <a:pPr indent="0" marL="0">
+            <a:pPr marL="0" indent="0">
               <a:buNone/>
             </a:pPr>
             <a:r>
@@ -7752,7 +10910,7 @@
           <a:bodyPr wrap="square" lIns="0" tIns="0" rIns="0" bIns="0" rtlCol="0" anchor="ctr"/>
           <a:lstStyle/>
           <a:p>
-            <a:pPr indent="0" marL="0">
+            <a:pPr marL="0" indent="0">
               <a:buNone/>
             </a:pPr>
             <a:r>
@@ -7780,12 +10938,162 @@
 
 <file path=ppt/slides/slide6.xml><?xml version="1.0" encoding="utf-8"?>
 <p:sld xmlns:a="http://schemas.openxmlformats.org/drawingml/2006/main" xmlns:r="http://schemas.openxmlformats.org/officeDocument/2006/relationships" xmlns:p="http://schemas.openxmlformats.org/presentationml/2006/main">
+  <p:cSld>
+    <p:spTree>
+      <p:nvGrpSpPr>
+        <p:cNvPr id="1" name="">
+          <a:extLst>
+            <a:ext uri="{FF2B5EF4-FFF2-40B4-BE49-F238E27FC236}">
+              <a16:creationId xmlns:a16="http://schemas.microsoft.com/office/drawing/2014/main" id="{E433E5BF-A008-AF40-2A75-A33754011A34}"/>
+            </a:ext>
+          </a:extLst>
+        </p:cNvPr>
+        <p:cNvGrpSpPr/>
+        <p:nvPr/>
+      </p:nvGrpSpPr>
+      <p:grpSpPr>
+        <a:xfrm>
+          <a:off x="0" y="0"/>
+          <a:ext cx="0" cy="0"/>
+          <a:chOff x="0" y="0"/>
+          <a:chExt cx="0" cy="0"/>
+        </a:xfrm>
+      </p:grpSpPr>
+      <p:sp>
+        <p:nvSpPr>
+          <p:cNvPr id="2" name="Shape 0">
+            <a:extLst>
+              <a:ext uri="{FF2B5EF4-FFF2-40B4-BE49-F238E27FC236}">
+                <a16:creationId xmlns:a16="http://schemas.microsoft.com/office/drawing/2014/main" id="{1F2FA3D9-43E8-1AFA-A678-C6DD595FBAA9}"/>
+              </a:ext>
+            </a:extLst>
+          </p:cNvPr>
+          <p:cNvSpPr/>
+          <p:nvPr/>
+        </p:nvSpPr>
+        <p:spPr>
+          <a:xfrm>
+            <a:off x="0" y="0"/>
+            <a:ext cx="9144000" cy="777240"/>
+          </a:xfrm>
+          <a:prstGeom prst="rect">
+            <a:avLst/>
+          </a:prstGeom>
+          <a:solidFill>
+            <a:srgbClr val="142850"/>
+          </a:solidFill>
+          <a:ln w="12700">
+            <a:solidFill>
+              <a:srgbClr val="142850"/>
+            </a:solidFill>
+            <a:prstDash val="solid"/>
+          </a:ln>
+        </p:spPr>
+        <p:txBody>
+          <a:bodyPr/>
+          <a:lstStyle/>
+          <a:p>
+            <a:endParaRPr lang="en-US"/>
+          </a:p>
+        </p:txBody>
+      </p:sp>
+      <p:sp>
+        <p:nvSpPr>
+          <p:cNvPr id="3" name="Text 1">
+            <a:extLst>
+              <a:ext uri="{FF2B5EF4-FFF2-40B4-BE49-F238E27FC236}">
+                <a16:creationId xmlns:a16="http://schemas.microsoft.com/office/drawing/2014/main" id="{5EBFBEBF-CF3C-BB35-17E9-C5B7F814944C}"/>
+              </a:ext>
+            </a:extLst>
+          </p:cNvPr>
+          <p:cNvSpPr/>
+          <p:nvPr/>
+        </p:nvSpPr>
+        <p:spPr>
+          <a:xfrm>
+            <a:off x="365760" y="0"/>
+            <a:ext cx="8412480" cy="777240"/>
+          </a:xfrm>
+          <a:prstGeom prst="rect">
+            <a:avLst/>
+          </a:prstGeom>
+          <a:noFill/>
+          <a:ln/>
+        </p:spPr>
+        <p:txBody>
+          <a:bodyPr wrap="square" lIns="0" tIns="0" rIns="0" bIns="0" rtlCol="0" anchor="ctr"/>
+          <a:lstStyle/>
+          <a:p>
+            <a:pPr marL="0" indent="0" algn="l">
+              <a:buNone/>
+            </a:pPr>
+            <a:r>
+              <a:rPr lang="en-US" sz="2400" b="1" dirty="0">
+                <a:solidFill>
+                  <a:srgbClr val="FFFFFF"/>
+                </a:solidFill>
+                <a:latin typeface="Calibri" pitchFamily="34" charset="0"/>
+                <a:ea typeface="Calibri" pitchFamily="34" charset="-122"/>
+                <a:cs typeface="Calibri" pitchFamily="34" charset="-120"/>
+              </a:rPr>
+              <a:t>Arquitectura de la Red ANFIS (5 Capas)</a:t>
+            </a:r>
+            <a:endParaRPr lang="en-US" sz="2400" dirty="0"/>
+          </a:p>
+        </p:txBody>
+      </p:sp>
+      <p:pic>
+        <p:nvPicPr>
+          <p:cNvPr id="25" name="Picture 24">
+            <a:extLst>
+              <a:ext uri="{FF2B5EF4-FFF2-40B4-BE49-F238E27FC236}">
+                <a16:creationId xmlns:a16="http://schemas.microsoft.com/office/drawing/2014/main" id="{5F405BEF-0650-42BF-AAE2-9920A0A09C4A}"/>
+              </a:ext>
+            </a:extLst>
+          </p:cNvPr>
+          <p:cNvPicPr>
+            <a:picLocks noChangeAspect="1"/>
+          </p:cNvPicPr>
+          <p:nvPr/>
+        </p:nvPicPr>
+        <p:blipFill>
+          <a:blip r:embed="rId3"/>
+          <a:stretch>
+            <a:fillRect/>
+          </a:stretch>
+        </p:blipFill>
+        <p:spPr>
+          <a:xfrm>
+            <a:off x="200051" y="894129"/>
+            <a:ext cx="8743898" cy="4249371"/>
+          </a:xfrm>
+          <a:prstGeom prst="rect">
+            <a:avLst/>
+          </a:prstGeom>
+        </p:spPr>
+      </p:pic>
+    </p:spTree>
+    <p:extLst>
+      <p:ext uri="{BB962C8B-B14F-4D97-AF65-F5344CB8AC3E}">
+        <p14:creationId xmlns:p14="http://schemas.microsoft.com/office/powerpoint/2010/main" val="1604034460"/>
+      </p:ext>
+    </p:extLst>
+  </p:cSld>
+  <p:clrMapOvr>
+    <a:masterClrMapping/>
+  </p:clrMapOvr>
+</p:sld>
+</file>
+
+<file path=ppt/slides/slide7.xml><?xml version="1.0" encoding="utf-8"?>
+<p:sld xmlns:a="http://schemas.openxmlformats.org/drawingml/2006/main" xmlns:r="http://schemas.openxmlformats.org/officeDocument/2006/relationships" xmlns:p="http://schemas.openxmlformats.org/presentationml/2006/main">
   <p:cSld name="Slide 6">
     <p:bg>
       <p:bgPr>
         <a:solidFill>
           <a:srgbClr val="F8FBFD"/>
         </a:solidFill>
+        <a:effectLst/>
       </p:bgPr>
     </p:bg>
     <p:spTree>
@@ -7826,6 +11134,13 @@
             <a:prstDash val="solid"/>
           </a:ln>
         </p:spPr>
+        <p:txBody>
+          <a:bodyPr/>
+          <a:lstStyle/>
+          <a:p>
+            <a:endParaRPr lang="en-US"/>
+          </a:p>
+        </p:txBody>
       </p:sp>
       <p:sp>
         <p:nvSpPr>
@@ -7848,7 +11163,7 @@
           <a:bodyPr wrap="square" lIns="0" tIns="0" rIns="0" bIns="0" rtlCol="0" anchor="ctr"/>
           <a:lstStyle/>
           <a:p>
-            <a:pPr algn="l" indent="0" marL="0">
+            <a:pPr marL="0" indent="0" algn="l">
               <a:buNone/>
             </a:pPr>
             <a:r>
@@ -7868,14 +11183,14 @@
       </p:sp>
       <p:pic>
         <p:nvPicPr>
-          <p:cNvPr id="4" name="Image 0" descr="/sessions/stoic-pensive-bell/mnt/outputs/grafica1_entrada.png">    </p:cNvPr>
+          <p:cNvPr id="4" name="Image 0" descr="/sessions/stoic-pensive-bell/mnt/outputs/grafica1_entrada.png"/>
           <p:cNvPicPr>
             <a:picLocks noChangeAspect="1"/>
           </p:cNvPicPr>
           <p:nvPr/>
         </p:nvPicPr>
         <p:blipFill>
-          <a:blip r:embed="rId1"/>
+          <a:blip r:embed="rId3"/>
           <a:stretch>
             <a:fillRect/>
           </a:stretch>
@@ -7911,7 +11226,7 @@
           <a:bodyPr wrap="square" lIns="0" tIns="0" rIns="0" bIns="0" rtlCol="0" anchor="ctr"/>
           <a:lstStyle/>
           <a:p>
-            <a:pPr algn="ctr" indent="0" marL="0">
+            <a:pPr marL="0" indent="0" algn="ctr">
               <a:buNone/>
             </a:pPr>
             <a:r>
@@ -7937,7 +11252,7 @@
 </p:sld>
 </file>
 
-<file path=ppt/slides/slide7.xml><?xml version="1.0" encoding="utf-8"?>
+<file path=ppt/slides/slide8.xml><?xml version="1.0" encoding="utf-8"?>
 <p:sld xmlns:a="http://schemas.openxmlformats.org/drawingml/2006/main" xmlns:r="http://schemas.openxmlformats.org/officeDocument/2006/relationships" xmlns:p="http://schemas.openxmlformats.org/presentationml/2006/main">
   <p:cSld name="Slide 7">
     <p:bg>
@@ -7945,6 +11260,7 @@
         <a:solidFill>
           <a:srgbClr val="F8FBFD"/>
         </a:solidFill>
+        <a:effectLst/>
       </p:bgPr>
     </p:bg>
     <p:spTree>
@@ -7985,6 +11301,13 @@
             <a:prstDash val="solid"/>
           </a:ln>
         </p:spPr>
+        <p:txBody>
+          <a:bodyPr/>
+          <a:lstStyle/>
+          <a:p>
+            <a:endParaRPr lang="en-US"/>
+          </a:p>
+        </p:txBody>
       </p:sp>
       <p:sp>
         <p:nvSpPr>
@@ -8007,7 +11330,7 @@
           <a:bodyPr wrap="square" lIns="0" tIns="0" rIns="0" bIns="0" rtlCol="0" anchor="ctr"/>
           <a:lstStyle/>
           <a:p>
-            <a:pPr algn="l" indent="0" marL="0">
+            <a:pPr marL="0" indent="0" algn="l">
               <a:buNone/>
             </a:pPr>
             <a:r>
@@ -8027,14 +11350,14 @@
       </p:sp>
       <p:pic>
         <p:nvPicPr>
-          <p:cNvPr id="4" name="Image 0" descr="/sessions/stoic-pensive-bell/mnt/outputs/grafica2_salida.png">    </p:cNvPr>
+          <p:cNvPr id="4" name="Image 0" descr="/sessions/stoic-pensive-bell/mnt/outputs/grafica2_salida.png"/>
           <p:cNvPicPr>
             <a:picLocks noChangeAspect="1"/>
           </p:cNvPicPr>
           <p:nvPr/>
         </p:nvPicPr>
         <p:blipFill>
-          <a:blip r:embed="rId1"/>
+          <a:blip r:embed="rId3"/>
           <a:stretch>
             <a:fillRect/>
           </a:stretch>
@@ -8070,7 +11393,7 @@
           <a:bodyPr wrap="square" lIns="0" tIns="0" rIns="0" bIns="0" rtlCol="0" anchor="ctr"/>
           <a:lstStyle/>
           <a:p>
-            <a:pPr algn="ctr" indent="0" marL="0">
+            <a:pPr marL="0" indent="0" algn="ctr">
               <a:buNone/>
             </a:pPr>
             <a:r>
@@ -8096,7 +11419,7 @@
 </p:sld>
 </file>
 
-<file path=ppt/slides/slide8.xml><?xml version="1.0" encoding="utf-8"?>
+<file path=ppt/slides/slide9.xml><?xml version="1.0" encoding="utf-8"?>
 <p:sld xmlns:a="http://schemas.openxmlformats.org/drawingml/2006/main" xmlns:r="http://schemas.openxmlformats.org/officeDocument/2006/relationships" xmlns:p="http://schemas.openxmlformats.org/presentationml/2006/main">
   <p:cSld name="Slide 8">
     <p:bg>
@@ -8104,6 +11427,7 @@
         <a:solidFill>
           <a:srgbClr val="F8FBFD"/>
         </a:solidFill>
+        <a:effectLst/>
       </p:bgPr>
     </p:bg>
     <p:spTree>
@@ -8144,6 +11468,13 @@
             <a:prstDash val="solid"/>
           </a:ln>
         </p:spPr>
+        <p:txBody>
+          <a:bodyPr/>
+          <a:lstStyle/>
+          <a:p>
+            <a:endParaRPr lang="en-US"/>
+          </a:p>
+        </p:txBody>
       </p:sp>
       <p:sp>
         <p:nvSpPr>
@@ -8166,7 +11497,7 @@
           <a:bodyPr wrap="square" lIns="0" tIns="0" rIns="0" bIns="0" rtlCol="0" anchor="ctr"/>
           <a:lstStyle/>
           <a:p>
-            <a:pPr algn="l" indent="0" marL="0">
+            <a:pPr marL="0" indent="0" algn="l">
               <a:buNone/>
             </a:pPr>
             <a:r>
@@ -8186,14 +11517,14 @@
       </p:sp>
       <p:pic>
         <p:nvPicPr>
-          <p:cNvPr id="4" name="Image 0" descr="/sessions/stoic-pensive-bell/mnt/outputs/grafica3_conjuntos.png">    </p:cNvPr>
+          <p:cNvPr id="4" name="Image 0" descr="/sessions/stoic-pensive-bell/mnt/outputs/grafica3_conjuntos.png"/>
           <p:cNvPicPr>
             <a:picLocks noChangeAspect="1"/>
           </p:cNvPicPr>
           <p:nvPr/>
         </p:nvPicPr>
         <p:blipFill>
-          <a:blip r:embed="rId1"/>
+          <a:blip r:embed="rId3"/>
           <a:stretch>
             <a:fillRect/>
           </a:stretch>
@@ -8229,7 +11560,7 @@
           <a:bodyPr wrap="square" lIns="0" tIns="0" rIns="0" bIns="0" rtlCol="0" anchor="ctr"/>
           <a:lstStyle/>
           <a:p>
-            <a:pPr algn="ctr" indent="0" marL="0">
+            <a:pPr marL="0" indent="0" algn="ctr">
               <a:buNone/>
             </a:pPr>
             <a:r>
@@ -8244,2647 +11575,6 @@
               <a:t>Cada conjunto difuso representa un estado lingüístico de la presión arterial. Las anotaciones f= indican la constante T-S asociada a cada regla.</a:t>
             </a:r>
             <a:endParaRPr lang="en-US" sz="1100" dirty="0"/>
-          </a:p>
-        </p:txBody>
-      </p:sp>
-    </p:spTree>
-  </p:cSld>
-  <p:clrMapOvr>
-    <a:masterClrMapping/>
-  </p:clrMapOvr>
-</p:sld>
-</file>
-
-<file path=ppt/slides/slide9.xml><?xml version="1.0" encoding="utf-8"?>
-<p:sld xmlns:a="http://schemas.openxmlformats.org/drawingml/2006/main" xmlns:r="http://schemas.openxmlformats.org/officeDocument/2006/relationships" xmlns:p="http://schemas.openxmlformats.org/presentationml/2006/main">
-  <p:cSld name="Slide 9">
-    <p:bg>
-      <p:bgPr>
-        <a:solidFill>
-          <a:srgbClr val="F8FBFD"/>
-        </a:solidFill>
-      </p:bgPr>
-    </p:bg>
-    <p:spTree>
-      <p:nvGrpSpPr>
-        <p:cNvPr id="1" name=""/>
-        <p:cNvGrpSpPr/>
-        <p:nvPr/>
-      </p:nvGrpSpPr>
-      <p:grpSpPr>
-        <a:xfrm>
-          <a:off x="0" y="0"/>
-          <a:ext cx="0" cy="0"/>
-          <a:chOff x="0" y="0"/>
-          <a:chExt cx="0" cy="0"/>
-        </a:xfrm>
-      </p:grpSpPr>
-      <p:sp>
-        <p:nvSpPr>
-          <p:cNvPr id="2" name="Shape 0"/>
-          <p:cNvSpPr/>
-          <p:nvPr/>
-        </p:nvSpPr>
-        <p:spPr>
-          <a:xfrm>
-            <a:off x="0" y="0"/>
-            <a:ext cx="9144000" cy="777240"/>
-          </a:xfrm>
-          <a:prstGeom prst="rect">
-            <a:avLst/>
-          </a:prstGeom>
-          <a:solidFill>
-            <a:srgbClr val="142850"/>
-          </a:solidFill>
-          <a:ln w="12700">
-            <a:solidFill>
-              <a:srgbClr val="142850"/>
-            </a:solidFill>
-            <a:prstDash val="solid"/>
-          </a:ln>
-        </p:spPr>
-      </p:sp>
-      <p:sp>
-        <p:nvSpPr>
-          <p:cNvPr id="3" name="Text 1"/>
-          <p:cNvSpPr/>
-          <p:nvPr/>
-        </p:nvSpPr>
-        <p:spPr>
-          <a:xfrm>
-            <a:off x="365760" y="0"/>
-            <a:ext cx="8412480" cy="777240"/>
-          </a:xfrm>
-          <a:prstGeom prst="rect">
-            <a:avLst/>
-          </a:prstGeom>
-          <a:noFill/>
-          <a:ln/>
-        </p:spPr>
-        <p:txBody>
-          <a:bodyPr wrap="square" lIns="0" tIns="0" rIns="0" bIns="0" rtlCol="0" anchor="ctr"/>
-          <a:lstStyle/>
-          <a:p>
-            <a:pPr algn="l" indent="0" marL="0">
-              <a:buNone/>
-            </a:pPr>
-            <a:r>
-              <a:rPr lang="en-US" sz="2400" b="1" dirty="0">
-                <a:solidFill>
-                  <a:srgbClr val="FFFFFF"/>
-                </a:solidFill>
-                <a:latin typeface="Calibri" pitchFamily="34" charset="0"/>
-                <a:ea typeface="Calibri" pitchFamily="34" charset="-122"/>
-                <a:cs typeface="Calibri" pitchFamily="34" charset="-120"/>
-              </a:rPr>
-              <a:t>Ejemplos de Inferencia Puntual</a:t>
-            </a:r>
-            <a:endParaRPr lang="en-US" sz="2400" dirty="0"/>
-          </a:p>
-        </p:txBody>
-      </p:sp>
-      <p:graphicFrame>
-        <p:nvGraphicFramePr>
-          <p:cNvPr id="10" name="Table 0"/>
-          <p:cNvGraphicFramePr>
-            <a:graphicFrameLocks noGrp="1"/>
-          </p:cNvGraphicFramePr>
-          <p:nvPr>
-            <p:extLst>
-              <p:ext uri="{D42A27DB-BD31-4B8C-83A1-F6EECF244321}">
-                <p14:modId xmlns:p14="http://schemas.microsoft.com/office/powerpoint/2010/main" val="1579011935"/>
-              </p:ext>
-            </p:extLst>
-          </p:nvPr>
-        </p:nvGraphicFramePr>
-        <p:xfrm>
-          <a:off x="365760" y="914400"/>
-          <a:ext cx="8412480" cy="914400"/>
-        </p:xfrm>
-        <a:graphic>
-          <a:graphicData uri="http://schemas.openxmlformats.org/drawingml/2006/table">
-            <a:tbl>
-              <a:tblPr/>
-              <a:tblGrid>
-                <a:gridCol w="1371600"/>
-                <a:gridCol w="1097280"/>
-                <a:gridCol w="1097280"/>
-                <a:gridCol w="1097280"/>
-                <a:gridCol w="1097280"/>
-                <a:gridCol w="1188720"/>
-                <a:gridCol w="1463040"/>
-              </a:tblGrid>
-              <a:tr h="475488">
-                <a:tc>
-                  <a:txBody>
-                    <a:bodyPr/>
-                    <a:lstStyle/>
-                    <a:p>
-                      <a:pPr algn="ctr" indent="0" marL="0">
-                        <a:buNone/>
-                      </a:pPr>
-                      <a:r>
-                        <a:rPr lang="en-US" sz="1300" b="1" dirty="0">
-                          <a:solidFill>
-                            <a:srgbClr val="FFFFFF"/>
-                          </a:solidFill>
-                          <a:latin typeface="Calibri" pitchFamily="34" charset="0"/>
-                          <a:ea typeface="Calibri" pitchFamily="34" charset="-122"/>
-                          <a:cs typeface="Calibri" pitchFamily="34" charset="-120"/>
-                        </a:rPr>
-                        <a:t>Presión (mmHg)</a:t>
-                      </a:r>
-                      <a:endParaRPr lang="en-US" sz="1300" dirty="0">
-                        <a:latin typeface="Calibri" charset="0"/>
-                        <a:ea typeface="Calibri" charset="0"/>
-                        <a:cs typeface="Calibri" charset="0"/>
-                      </a:endParaRPr>
-                    </a:p>
-                  </a:txBody>
-                  <a:tcPr marL="91440" marR="91440" marT="45720" marB="45720">
-                    <a:lnL w="6350" cap="flat" cmpd="sng" algn="ctr">
-                      <a:solidFill>
-                        <a:srgbClr val="BDC3C7"/>
-                      </a:solidFill>
-                      <a:prstDash val="solid"/>
-                      <a:round/>
-                      <a:headEnd type="none" w="med" len="med"/>
-                      <a:tailEnd type="none" w="med" len="med"/>
-                    </a:lnL>
-                    <a:lnR w="6350" cap="flat" cmpd="sng" algn="ctr">
-                      <a:solidFill>
-                        <a:srgbClr val="BDC3C7"/>
-                      </a:solidFill>
-                      <a:prstDash val="solid"/>
-                      <a:round/>
-                      <a:headEnd type="none" w="med" len="med"/>
-                      <a:tailEnd type="none" w="med" len="med"/>
-                    </a:lnR>
-                    <a:lnT w="6350" cap="flat" cmpd="sng" algn="ctr">
-                      <a:solidFill>
-                        <a:srgbClr val="BDC3C7"/>
-                      </a:solidFill>
-                      <a:prstDash val="solid"/>
-                      <a:round/>
-                      <a:headEnd type="none" w="med" len="med"/>
-                      <a:tailEnd type="none" w="med" len="med"/>
-                    </a:lnT>
-                    <a:lnB w="6350" cap="flat" cmpd="sng" algn="ctr">
-                      <a:solidFill>
-                        <a:srgbClr val="BDC3C7"/>
-                      </a:solidFill>
-                      <a:prstDash val="solid"/>
-                      <a:round/>
-                      <a:headEnd type="none" w="med" len="med"/>
-                      <a:tailEnd type="none" w="med" len="med"/>
-                    </a:lnB>
-                    <a:solidFill>
-                      <a:srgbClr val="1F5C8B"/>
-                    </a:solidFill>
-                  </a:tcPr>
-                </a:tc>
-                <a:tc>
-                  <a:txBody>
-                    <a:bodyPr/>
-                    <a:lstStyle/>
-                    <a:p>
-                      <a:pPr algn="ctr" indent="0" marL="0">
-                        <a:buNone/>
-                      </a:pPr>
-                      <a:r>
-                        <a:rPr lang="en-US" sz="1300" b="1" dirty="0">
-                          <a:solidFill>
-                            <a:srgbClr val="FFFFFF"/>
-                          </a:solidFill>
-                          <a:latin typeface="Calibri" pitchFamily="34" charset="0"/>
-                          <a:ea typeface="Calibri" pitchFamily="34" charset="-122"/>
-                          <a:cs typeface="Calibri" pitchFamily="34" charset="-120"/>
-                        </a:rPr>
-                        <a:t>μ Normal</a:t>
-                      </a:r>
-                      <a:endParaRPr lang="en-US" sz="1300" dirty="0">
-                        <a:latin typeface="Calibri" charset="0"/>
-                        <a:ea typeface="Calibri" charset="0"/>
-                        <a:cs typeface="Calibri" charset="0"/>
-                      </a:endParaRPr>
-                    </a:p>
-                  </a:txBody>
-                  <a:tcPr marL="91440" marR="91440" marT="45720" marB="45720">
-                    <a:lnL w="6350" cap="flat" cmpd="sng" algn="ctr">
-                      <a:solidFill>
-                        <a:srgbClr val="BDC3C7"/>
-                      </a:solidFill>
-                      <a:prstDash val="solid"/>
-                      <a:round/>
-                      <a:headEnd type="none" w="med" len="med"/>
-                      <a:tailEnd type="none" w="med" len="med"/>
-                    </a:lnL>
-                    <a:lnR w="6350" cap="flat" cmpd="sng" algn="ctr">
-                      <a:solidFill>
-                        <a:srgbClr val="BDC3C7"/>
-                      </a:solidFill>
-                      <a:prstDash val="solid"/>
-                      <a:round/>
-                      <a:headEnd type="none" w="med" len="med"/>
-                      <a:tailEnd type="none" w="med" len="med"/>
-                    </a:lnR>
-                    <a:lnT w="6350" cap="flat" cmpd="sng" algn="ctr">
-                      <a:solidFill>
-                        <a:srgbClr val="BDC3C7"/>
-                      </a:solidFill>
-                      <a:prstDash val="solid"/>
-                      <a:round/>
-                      <a:headEnd type="none" w="med" len="med"/>
-                      <a:tailEnd type="none" w="med" len="med"/>
-                    </a:lnT>
-                    <a:lnB w="6350" cap="flat" cmpd="sng" algn="ctr">
-                      <a:solidFill>
-                        <a:srgbClr val="BDC3C7"/>
-                      </a:solidFill>
-                      <a:prstDash val="solid"/>
-                      <a:round/>
-                      <a:headEnd type="none" w="med" len="med"/>
-                      <a:tailEnd type="none" w="med" len="med"/>
-                    </a:lnB>
-                    <a:solidFill>
-                      <a:srgbClr val="1F5C8B"/>
-                    </a:solidFill>
-                  </a:tcPr>
-                </a:tc>
-                <a:tc>
-                  <a:txBody>
-                    <a:bodyPr/>
-                    <a:lstStyle/>
-                    <a:p>
-                      <a:pPr algn="ctr" indent="0" marL="0">
-                        <a:buNone/>
-                      </a:pPr>
-                      <a:r>
-                        <a:rPr lang="en-US" sz="1300" b="1" dirty="0">
-                          <a:solidFill>
-                            <a:srgbClr val="FFFFFF"/>
-                          </a:solidFill>
-                          <a:latin typeface="Calibri" pitchFamily="34" charset="0"/>
-                          <a:ea typeface="Calibri" pitchFamily="34" charset="-122"/>
-                          <a:cs typeface="Calibri" pitchFamily="34" charset="-120"/>
-                        </a:rPr>
-                        <a:t>μ Elevada</a:t>
-                      </a:r>
-                      <a:endParaRPr lang="en-US" sz="1300" dirty="0">
-                        <a:latin typeface="Calibri" charset="0"/>
-                        <a:ea typeface="Calibri" charset="0"/>
-                        <a:cs typeface="Calibri" charset="0"/>
-                      </a:endParaRPr>
-                    </a:p>
-                  </a:txBody>
-                  <a:tcPr marL="91440" marR="91440" marT="45720" marB="45720">
-                    <a:lnL w="6350" cap="flat" cmpd="sng" algn="ctr">
-                      <a:solidFill>
-                        <a:srgbClr val="BDC3C7"/>
-                      </a:solidFill>
-                      <a:prstDash val="solid"/>
-                      <a:round/>
-                      <a:headEnd type="none" w="med" len="med"/>
-                      <a:tailEnd type="none" w="med" len="med"/>
-                    </a:lnL>
-                    <a:lnR w="6350" cap="flat" cmpd="sng" algn="ctr">
-                      <a:solidFill>
-                        <a:srgbClr val="BDC3C7"/>
-                      </a:solidFill>
-                      <a:prstDash val="solid"/>
-                      <a:round/>
-                      <a:headEnd type="none" w="med" len="med"/>
-                      <a:tailEnd type="none" w="med" len="med"/>
-                    </a:lnR>
-                    <a:lnT w="6350" cap="flat" cmpd="sng" algn="ctr">
-                      <a:solidFill>
-                        <a:srgbClr val="BDC3C7"/>
-                      </a:solidFill>
-                      <a:prstDash val="solid"/>
-                      <a:round/>
-                      <a:headEnd type="none" w="med" len="med"/>
-                      <a:tailEnd type="none" w="med" len="med"/>
-                    </a:lnT>
-                    <a:lnB w="6350" cap="flat" cmpd="sng" algn="ctr">
-                      <a:solidFill>
-                        <a:srgbClr val="BDC3C7"/>
-                      </a:solidFill>
-                      <a:prstDash val="solid"/>
-                      <a:round/>
-                      <a:headEnd type="none" w="med" len="med"/>
-                      <a:tailEnd type="none" w="med" len="med"/>
-                    </a:lnB>
-                    <a:solidFill>
-                      <a:srgbClr val="1F5C8B"/>
-                    </a:solidFill>
-                  </a:tcPr>
-                </a:tc>
-                <a:tc>
-                  <a:txBody>
-                    <a:bodyPr/>
-                    <a:lstStyle/>
-                    <a:p>
-                      <a:pPr algn="ctr" indent="0" marL="0">
-                        <a:buNone/>
-                      </a:pPr>
-                      <a:r>
-                        <a:rPr lang="en-US" sz="1300" b="1" dirty="0">
-                          <a:solidFill>
-                            <a:srgbClr val="FFFFFF"/>
-                          </a:solidFill>
-                          <a:latin typeface="Calibri" pitchFamily="34" charset="0"/>
-                          <a:ea typeface="Calibri" pitchFamily="34" charset="-122"/>
-                          <a:cs typeface="Calibri" pitchFamily="34" charset="-120"/>
-                        </a:rPr>
-                        <a:t>μ Alta</a:t>
-                      </a:r>
-                      <a:endParaRPr lang="en-US" sz="1300" dirty="0">
-                        <a:latin typeface="Calibri" charset="0"/>
-                        <a:ea typeface="Calibri" charset="0"/>
-                        <a:cs typeface="Calibri" charset="0"/>
-                      </a:endParaRPr>
-                    </a:p>
-                  </a:txBody>
-                  <a:tcPr marL="91440" marR="91440" marT="45720" marB="45720">
-                    <a:lnL w="6350" cap="flat" cmpd="sng" algn="ctr">
-                      <a:solidFill>
-                        <a:srgbClr val="BDC3C7"/>
-                      </a:solidFill>
-                      <a:prstDash val="solid"/>
-                      <a:round/>
-                      <a:headEnd type="none" w="med" len="med"/>
-                      <a:tailEnd type="none" w="med" len="med"/>
-                    </a:lnL>
-                    <a:lnR w="6350" cap="flat" cmpd="sng" algn="ctr">
-                      <a:solidFill>
-                        <a:srgbClr val="BDC3C7"/>
-                      </a:solidFill>
-                      <a:prstDash val="solid"/>
-                      <a:round/>
-                      <a:headEnd type="none" w="med" len="med"/>
-                      <a:tailEnd type="none" w="med" len="med"/>
-                    </a:lnR>
-                    <a:lnT w="6350" cap="flat" cmpd="sng" algn="ctr">
-                      <a:solidFill>
-                        <a:srgbClr val="BDC3C7"/>
-                      </a:solidFill>
-                      <a:prstDash val="solid"/>
-                      <a:round/>
-                      <a:headEnd type="none" w="med" len="med"/>
-                      <a:tailEnd type="none" w="med" len="med"/>
-                    </a:lnT>
-                    <a:lnB w="6350" cap="flat" cmpd="sng" algn="ctr">
-                      <a:solidFill>
-                        <a:srgbClr val="BDC3C7"/>
-                      </a:solidFill>
-                      <a:prstDash val="solid"/>
-                      <a:round/>
-                      <a:headEnd type="none" w="med" len="med"/>
-                      <a:tailEnd type="none" w="med" len="med"/>
-                    </a:lnB>
-                    <a:solidFill>
-                      <a:srgbClr val="1F5C8B"/>
-                    </a:solidFill>
-                  </a:tcPr>
-                </a:tc>
-                <a:tc>
-                  <a:txBody>
-                    <a:bodyPr/>
-                    <a:lstStyle/>
-                    <a:p>
-                      <a:pPr algn="ctr" indent="0" marL="0">
-                        <a:buNone/>
-                      </a:pPr>
-                      <a:r>
-                        <a:rPr lang="en-US" sz="1300" b="1" dirty="0">
-                          <a:solidFill>
-                            <a:srgbClr val="FFFFFF"/>
-                          </a:solidFill>
-                          <a:latin typeface="Calibri" pitchFamily="34" charset="0"/>
-                          <a:ea typeface="Calibri" pitchFamily="34" charset="-122"/>
-                          <a:cs typeface="Calibri" pitchFamily="34" charset="-120"/>
-                        </a:rPr>
-                        <a:t>μ Muy Alta</a:t>
-                      </a:r>
-                      <a:endParaRPr lang="en-US" sz="1300" dirty="0">
-                        <a:latin typeface="Calibri" charset="0"/>
-                        <a:ea typeface="Calibri" charset="0"/>
-                        <a:cs typeface="Calibri" charset="0"/>
-                      </a:endParaRPr>
-                    </a:p>
-                  </a:txBody>
-                  <a:tcPr marL="91440" marR="91440" marT="45720" marB="45720">
-                    <a:lnL w="6350" cap="flat" cmpd="sng" algn="ctr">
-                      <a:solidFill>
-                        <a:srgbClr val="BDC3C7"/>
-                      </a:solidFill>
-                      <a:prstDash val="solid"/>
-                      <a:round/>
-                      <a:headEnd type="none" w="med" len="med"/>
-                      <a:tailEnd type="none" w="med" len="med"/>
-                    </a:lnL>
-                    <a:lnR w="6350" cap="flat" cmpd="sng" algn="ctr">
-                      <a:solidFill>
-                        <a:srgbClr val="BDC3C7"/>
-                      </a:solidFill>
-                      <a:prstDash val="solid"/>
-                      <a:round/>
-                      <a:headEnd type="none" w="med" len="med"/>
-                      <a:tailEnd type="none" w="med" len="med"/>
-                    </a:lnR>
-                    <a:lnT w="6350" cap="flat" cmpd="sng" algn="ctr">
-                      <a:solidFill>
-                        <a:srgbClr val="BDC3C7"/>
-                      </a:solidFill>
-                      <a:prstDash val="solid"/>
-                      <a:round/>
-                      <a:headEnd type="none" w="med" len="med"/>
-                      <a:tailEnd type="none" w="med" len="med"/>
-                    </a:lnT>
-                    <a:lnB w="6350" cap="flat" cmpd="sng" algn="ctr">
-                      <a:solidFill>
-                        <a:srgbClr val="BDC3C7"/>
-                      </a:solidFill>
-                      <a:prstDash val="solid"/>
-                      <a:round/>
-                      <a:headEnd type="none" w="med" len="med"/>
-                      <a:tailEnd type="none" w="med" len="med"/>
-                    </a:lnB>
-                    <a:solidFill>
-                      <a:srgbClr val="1F5C8B"/>
-                    </a:solidFill>
-                  </a:tcPr>
-                </a:tc>
-                <a:tc>
-                  <a:txBody>
-                    <a:bodyPr/>
-                    <a:lstStyle/>
-                    <a:p>
-                      <a:pPr algn="ctr" indent="0" marL="0">
-                        <a:buNone/>
-                      </a:pPr>
-                      <a:r>
-                        <a:rPr lang="en-US" sz="1300" b="1" dirty="0">
-                          <a:solidFill>
-                            <a:srgbClr val="FFFFFF"/>
-                          </a:solidFill>
-                          <a:latin typeface="Calibri" pitchFamily="34" charset="0"/>
-                          <a:ea typeface="Calibri" pitchFamily="34" charset="-122"/>
-                          <a:cs typeface="Calibri" pitchFamily="34" charset="-120"/>
-                        </a:rPr>
-                        <a:t>Riesgo</a:t>
-                      </a:r>
-                      <a:endParaRPr lang="en-US" sz="1300" dirty="0">
-                        <a:latin typeface="Calibri" charset="0"/>
-                        <a:ea typeface="Calibri" charset="0"/>
-                        <a:cs typeface="Calibri" charset="0"/>
-                      </a:endParaRPr>
-                    </a:p>
-                  </a:txBody>
-                  <a:tcPr marL="91440" marR="91440" marT="45720" marB="45720">
-                    <a:lnL w="6350" cap="flat" cmpd="sng" algn="ctr">
-                      <a:solidFill>
-                        <a:srgbClr val="BDC3C7"/>
-                      </a:solidFill>
-                      <a:prstDash val="solid"/>
-                      <a:round/>
-                      <a:headEnd type="none" w="med" len="med"/>
-                      <a:tailEnd type="none" w="med" len="med"/>
-                    </a:lnL>
-                    <a:lnR w="6350" cap="flat" cmpd="sng" algn="ctr">
-                      <a:solidFill>
-                        <a:srgbClr val="BDC3C7"/>
-                      </a:solidFill>
-                      <a:prstDash val="solid"/>
-                      <a:round/>
-                      <a:headEnd type="none" w="med" len="med"/>
-                      <a:tailEnd type="none" w="med" len="med"/>
-                    </a:lnR>
-                    <a:lnT w="6350" cap="flat" cmpd="sng" algn="ctr">
-                      <a:solidFill>
-                        <a:srgbClr val="BDC3C7"/>
-                      </a:solidFill>
-                      <a:prstDash val="solid"/>
-                      <a:round/>
-                      <a:headEnd type="none" w="med" len="med"/>
-                      <a:tailEnd type="none" w="med" len="med"/>
-                    </a:lnT>
-                    <a:lnB w="6350" cap="flat" cmpd="sng" algn="ctr">
-                      <a:solidFill>
-                        <a:srgbClr val="BDC3C7"/>
-                      </a:solidFill>
-                      <a:prstDash val="solid"/>
-                      <a:round/>
-                      <a:headEnd type="none" w="med" len="med"/>
-                      <a:tailEnd type="none" w="med" len="med"/>
-                    </a:lnB>
-                    <a:solidFill>
-                      <a:srgbClr val="1F5C8B"/>
-                    </a:solidFill>
-                  </a:tcPr>
-                </a:tc>
-                <a:tc>
-                  <a:txBody>
-                    <a:bodyPr/>
-                    <a:lstStyle/>
-                    <a:p>
-                      <a:pPr algn="ctr" indent="0" marL="0">
-                        <a:buNone/>
-                      </a:pPr>
-                      <a:r>
-                        <a:rPr lang="en-US" sz="1300" b="1" dirty="0">
-                          <a:solidFill>
-                            <a:srgbClr val="FFFFFF"/>
-                          </a:solidFill>
-                          <a:latin typeface="Calibri" pitchFamily="34" charset="0"/>
-                          <a:ea typeface="Calibri" pitchFamily="34" charset="-122"/>
-                          <a:cs typeface="Calibri" pitchFamily="34" charset="-120"/>
-                        </a:rPr>
-                        <a:t>Diagnóstico</a:t>
-                      </a:r>
-                      <a:endParaRPr lang="en-US" sz="1300" dirty="0">
-                        <a:latin typeface="Calibri" charset="0"/>
-                        <a:ea typeface="Calibri" charset="0"/>
-                        <a:cs typeface="Calibri" charset="0"/>
-                      </a:endParaRPr>
-                    </a:p>
-                  </a:txBody>
-                  <a:tcPr marL="91440" marR="91440" marT="45720" marB="45720">
-                    <a:lnL w="6350" cap="flat" cmpd="sng" algn="ctr">
-                      <a:solidFill>
-                        <a:srgbClr val="BDC3C7"/>
-                      </a:solidFill>
-                      <a:prstDash val="solid"/>
-                      <a:round/>
-                      <a:headEnd type="none" w="med" len="med"/>
-                      <a:tailEnd type="none" w="med" len="med"/>
-                    </a:lnL>
-                    <a:lnR w="6350" cap="flat" cmpd="sng" algn="ctr">
-                      <a:solidFill>
-                        <a:srgbClr val="BDC3C7"/>
-                      </a:solidFill>
-                      <a:prstDash val="solid"/>
-                      <a:round/>
-                      <a:headEnd type="none" w="med" len="med"/>
-                      <a:tailEnd type="none" w="med" len="med"/>
-                    </a:lnR>
-                    <a:lnT w="6350" cap="flat" cmpd="sng" algn="ctr">
-                      <a:solidFill>
-                        <a:srgbClr val="BDC3C7"/>
-                      </a:solidFill>
-                      <a:prstDash val="solid"/>
-                      <a:round/>
-                      <a:headEnd type="none" w="med" len="med"/>
-                      <a:tailEnd type="none" w="med" len="med"/>
-                    </a:lnT>
-                    <a:lnB w="6350" cap="flat" cmpd="sng" algn="ctr">
-                      <a:solidFill>
-                        <a:srgbClr val="BDC3C7"/>
-                      </a:solidFill>
-                      <a:prstDash val="solid"/>
-                      <a:round/>
-                      <a:headEnd type="none" w="med" len="med"/>
-                      <a:tailEnd type="none" w="med" len="med"/>
-                    </a:lnB>
-                    <a:solidFill>
-                      <a:srgbClr val="1F5C8B"/>
-                    </a:solidFill>
-                  </a:tcPr>
-                </a:tc>
-              </a:tr>
-              <a:tr h="475488">
-                <a:tc>
-                  <a:txBody>
-                    <a:bodyPr/>
-                    <a:lstStyle/>
-                    <a:p>
-                      <a:pPr algn="ctr" indent="0" marL="0">
-                        <a:buNone/>
-                      </a:pPr>
-                      <a:r>
-                        <a:rPr lang="en-US" sz="1300" dirty="0">
-                          <a:solidFill>
-                            <a:srgbClr val="000000"/>
-                          </a:solidFill>
-                          <a:latin typeface="Calibri" pitchFamily="34" charset="0"/>
-                          <a:ea typeface="Calibri" pitchFamily="34" charset="-122"/>
-                          <a:cs typeface="Calibri" pitchFamily="34" charset="-120"/>
-                        </a:rPr>
-                        <a:t>100</a:t>
-                      </a:r>
-                      <a:endParaRPr lang="en-US" sz="1300" dirty="0">
-                        <a:latin typeface="Calibri" charset="0"/>
-                        <a:ea typeface="Calibri" charset="0"/>
-                        <a:cs typeface="Calibri" charset="0"/>
-                      </a:endParaRPr>
-                    </a:p>
-                  </a:txBody>
-                  <a:tcPr marL="91440" marR="91440" marT="45720" marB="45720">
-                    <a:lnL w="6350" cap="flat" cmpd="sng" algn="ctr">
-                      <a:solidFill>
-                        <a:srgbClr val="BDC3C7"/>
-                      </a:solidFill>
-                      <a:prstDash val="solid"/>
-                      <a:round/>
-                      <a:headEnd type="none" w="med" len="med"/>
-                      <a:tailEnd type="none" w="med" len="med"/>
-                    </a:lnL>
-                    <a:lnR w="6350" cap="flat" cmpd="sng" algn="ctr">
-                      <a:solidFill>
-                        <a:srgbClr val="BDC3C7"/>
-                      </a:solidFill>
-                      <a:prstDash val="solid"/>
-                      <a:round/>
-                      <a:headEnd type="none" w="med" len="med"/>
-                      <a:tailEnd type="none" w="med" len="med"/>
-                    </a:lnR>
-                    <a:lnT w="6350" cap="flat" cmpd="sng" algn="ctr">
-                      <a:solidFill>
-                        <a:srgbClr val="BDC3C7"/>
-                      </a:solidFill>
-                      <a:prstDash val="solid"/>
-                      <a:round/>
-                      <a:headEnd type="none" w="med" len="med"/>
-                      <a:tailEnd type="none" w="med" len="med"/>
-                    </a:lnT>
-                    <a:lnB w="6350" cap="flat" cmpd="sng" algn="ctr">
-                      <a:solidFill>
-                        <a:srgbClr val="BDC3C7"/>
-                      </a:solidFill>
-                      <a:prstDash val="solid"/>
-                      <a:round/>
-                      <a:headEnd type="none" w="med" len="med"/>
-                      <a:tailEnd type="none" w="med" len="med"/>
-                    </a:lnB>
-                    <a:solidFill>
-                      <a:srgbClr val="FFFFFF"/>
-                    </a:solidFill>
-                  </a:tcPr>
-                </a:tc>
-                <a:tc>
-                  <a:txBody>
-                    <a:bodyPr/>
-                    <a:lstStyle/>
-                    <a:p>
-                      <a:pPr algn="ctr" indent="0" marL="0">
-                        <a:buNone/>
-                      </a:pPr>
-                      <a:r>
-                        <a:rPr lang="en-US" sz="1300" b="1" dirty="0">
-                          <a:solidFill>
-                            <a:srgbClr val="1E8449"/>
-                          </a:solidFill>
-                          <a:latin typeface="Calibri" pitchFamily="34" charset="0"/>
-                          <a:ea typeface="Calibri" pitchFamily="34" charset="-122"/>
-                          <a:cs typeface="Calibri" pitchFamily="34" charset="-120"/>
-                        </a:rPr>
-                        <a:t>1.00</a:t>
-                      </a:r>
-                      <a:endParaRPr lang="en-US" sz="1300" dirty="0">
-                        <a:latin typeface="Calibri" charset="0"/>
-                        <a:ea typeface="Calibri" charset="0"/>
-                        <a:cs typeface="Calibri" charset="0"/>
-                      </a:endParaRPr>
-                    </a:p>
-                  </a:txBody>
-                  <a:tcPr marL="91440" marR="91440" marT="45720" marB="45720">
-                    <a:lnL w="6350" cap="flat" cmpd="sng" algn="ctr">
-                      <a:solidFill>
-                        <a:srgbClr val="BDC3C7"/>
-                      </a:solidFill>
-                      <a:prstDash val="solid"/>
-                      <a:round/>
-                      <a:headEnd type="none" w="med" len="med"/>
-                      <a:tailEnd type="none" w="med" len="med"/>
-                    </a:lnL>
-                    <a:lnR w="6350" cap="flat" cmpd="sng" algn="ctr">
-                      <a:solidFill>
-                        <a:srgbClr val="BDC3C7"/>
-                      </a:solidFill>
-                      <a:prstDash val="solid"/>
-                      <a:round/>
-                      <a:headEnd type="none" w="med" len="med"/>
-                      <a:tailEnd type="none" w="med" len="med"/>
-                    </a:lnR>
-                    <a:lnT w="6350" cap="flat" cmpd="sng" algn="ctr">
-                      <a:solidFill>
-                        <a:srgbClr val="BDC3C7"/>
-                      </a:solidFill>
-                      <a:prstDash val="solid"/>
-                      <a:round/>
-                      <a:headEnd type="none" w="med" len="med"/>
-                      <a:tailEnd type="none" w="med" len="med"/>
-                    </a:lnT>
-                    <a:lnB w="6350" cap="flat" cmpd="sng" algn="ctr">
-                      <a:solidFill>
-                        <a:srgbClr val="BDC3C7"/>
-                      </a:solidFill>
-                      <a:prstDash val="solid"/>
-                      <a:round/>
-                      <a:headEnd type="none" w="med" len="med"/>
-                      <a:tailEnd type="none" w="med" len="med"/>
-                    </a:lnB>
-                    <a:solidFill>
-                      <a:srgbClr val="FFFFFF"/>
-                    </a:solidFill>
-                  </a:tcPr>
-                </a:tc>
-                <a:tc>
-                  <a:txBody>
-                    <a:bodyPr/>
-                    <a:lstStyle/>
-                    <a:p>
-                      <a:pPr algn="ctr" indent="0" marL="0">
-                        <a:buNone/>
-                      </a:pPr>
-                      <a:r>
-                        <a:rPr lang="en-US" sz="1300" dirty="0">
-                          <a:solidFill>
-                            <a:srgbClr val="000000"/>
-                          </a:solidFill>
-                          <a:latin typeface="Calibri" pitchFamily="34" charset="0"/>
-                          <a:ea typeface="Calibri" pitchFamily="34" charset="-122"/>
-                          <a:cs typeface="Calibri" pitchFamily="34" charset="-120"/>
-                        </a:rPr>
-                        <a:t>0.00</a:t>
-                      </a:r>
-                      <a:endParaRPr lang="en-US" sz="1300" dirty="0">
-                        <a:latin typeface="Calibri" charset="0"/>
-                        <a:ea typeface="Calibri" charset="0"/>
-                        <a:cs typeface="Calibri" charset="0"/>
-                      </a:endParaRPr>
-                    </a:p>
-                  </a:txBody>
-                  <a:tcPr marL="91440" marR="91440" marT="45720" marB="45720">
-                    <a:lnL w="6350" cap="flat" cmpd="sng" algn="ctr">
-                      <a:solidFill>
-                        <a:srgbClr val="BDC3C7"/>
-                      </a:solidFill>
-                      <a:prstDash val="solid"/>
-                      <a:round/>
-                      <a:headEnd type="none" w="med" len="med"/>
-                      <a:tailEnd type="none" w="med" len="med"/>
-                    </a:lnL>
-                    <a:lnR w="6350" cap="flat" cmpd="sng" algn="ctr">
-                      <a:solidFill>
-                        <a:srgbClr val="BDC3C7"/>
-                      </a:solidFill>
-                      <a:prstDash val="solid"/>
-                      <a:round/>
-                      <a:headEnd type="none" w="med" len="med"/>
-                      <a:tailEnd type="none" w="med" len="med"/>
-                    </a:lnR>
-                    <a:lnT w="6350" cap="flat" cmpd="sng" algn="ctr">
-                      <a:solidFill>
-                        <a:srgbClr val="BDC3C7"/>
-                      </a:solidFill>
-                      <a:prstDash val="solid"/>
-                      <a:round/>
-                      <a:headEnd type="none" w="med" len="med"/>
-                      <a:tailEnd type="none" w="med" len="med"/>
-                    </a:lnT>
-                    <a:lnB w="6350" cap="flat" cmpd="sng" algn="ctr">
-                      <a:solidFill>
-                        <a:srgbClr val="BDC3C7"/>
-                      </a:solidFill>
-                      <a:prstDash val="solid"/>
-                      <a:round/>
-                      <a:headEnd type="none" w="med" len="med"/>
-                      <a:tailEnd type="none" w="med" len="med"/>
-                    </a:lnB>
-                    <a:solidFill>
-                      <a:srgbClr val="FFFFFF"/>
-                    </a:solidFill>
-                  </a:tcPr>
-                </a:tc>
-                <a:tc>
-                  <a:txBody>
-                    <a:bodyPr/>
-                    <a:lstStyle/>
-                    <a:p>
-                      <a:pPr algn="ctr" indent="0" marL="0">
-                        <a:buNone/>
-                      </a:pPr>
-                      <a:r>
-                        <a:rPr lang="en-US" sz="1300" dirty="0">
-                          <a:solidFill>
-                            <a:srgbClr val="000000"/>
-                          </a:solidFill>
-                          <a:latin typeface="Calibri" pitchFamily="34" charset="0"/>
-                          <a:ea typeface="Calibri" pitchFamily="34" charset="-122"/>
-                          <a:cs typeface="Calibri" pitchFamily="34" charset="-120"/>
-                        </a:rPr>
-                        <a:t>0.00</a:t>
-                      </a:r>
-                      <a:endParaRPr lang="en-US" sz="1300" dirty="0">
-                        <a:latin typeface="Calibri" charset="0"/>
-                        <a:ea typeface="Calibri" charset="0"/>
-                        <a:cs typeface="Calibri" charset="0"/>
-                      </a:endParaRPr>
-                    </a:p>
-                  </a:txBody>
-                  <a:tcPr marL="91440" marR="91440" marT="45720" marB="45720">
-                    <a:lnL w="6350" cap="flat" cmpd="sng" algn="ctr">
-                      <a:solidFill>
-                        <a:srgbClr val="BDC3C7"/>
-                      </a:solidFill>
-                      <a:prstDash val="solid"/>
-                      <a:round/>
-                      <a:headEnd type="none" w="med" len="med"/>
-                      <a:tailEnd type="none" w="med" len="med"/>
-                    </a:lnL>
-                    <a:lnR w="6350" cap="flat" cmpd="sng" algn="ctr">
-                      <a:solidFill>
-                        <a:srgbClr val="BDC3C7"/>
-                      </a:solidFill>
-                      <a:prstDash val="solid"/>
-                      <a:round/>
-                      <a:headEnd type="none" w="med" len="med"/>
-                      <a:tailEnd type="none" w="med" len="med"/>
-                    </a:lnR>
-                    <a:lnT w="6350" cap="flat" cmpd="sng" algn="ctr">
-                      <a:solidFill>
-                        <a:srgbClr val="BDC3C7"/>
-                      </a:solidFill>
-                      <a:prstDash val="solid"/>
-                      <a:round/>
-                      <a:headEnd type="none" w="med" len="med"/>
-                      <a:tailEnd type="none" w="med" len="med"/>
-                    </a:lnT>
-                    <a:lnB w="6350" cap="flat" cmpd="sng" algn="ctr">
-                      <a:solidFill>
-                        <a:srgbClr val="BDC3C7"/>
-                      </a:solidFill>
-                      <a:prstDash val="solid"/>
-                      <a:round/>
-                      <a:headEnd type="none" w="med" len="med"/>
-                      <a:tailEnd type="none" w="med" len="med"/>
-                    </a:lnB>
-                    <a:solidFill>
-                      <a:srgbClr val="FFFFFF"/>
-                    </a:solidFill>
-                  </a:tcPr>
-                </a:tc>
-                <a:tc>
-                  <a:txBody>
-                    <a:bodyPr/>
-                    <a:lstStyle/>
-                    <a:p>
-                      <a:pPr algn="ctr" indent="0" marL="0">
-                        <a:buNone/>
-                      </a:pPr>
-                      <a:r>
-                        <a:rPr lang="en-US" sz="1300" dirty="0">
-                          <a:solidFill>
-                            <a:srgbClr val="000000"/>
-                          </a:solidFill>
-                          <a:latin typeface="Calibri" pitchFamily="34" charset="0"/>
-                          <a:ea typeface="Calibri" pitchFamily="34" charset="-122"/>
-                          <a:cs typeface="Calibri" pitchFamily="34" charset="-120"/>
-                        </a:rPr>
-                        <a:t>0.00</a:t>
-                      </a:r>
-                      <a:endParaRPr lang="en-US" sz="1300" dirty="0">
-                        <a:latin typeface="Calibri" charset="0"/>
-                        <a:ea typeface="Calibri" charset="0"/>
-                        <a:cs typeface="Calibri" charset="0"/>
-                      </a:endParaRPr>
-                    </a:p>
-                  </a:txBody>
-                  <a:tcPr marL="91440" marR="91440" marT="45720" marB="45720">
-                    <a:lnL w="6350" cap="flat" cmpd="sng" algn="ctr">
-                      <a:solidFill>
-                        <a:srgbClr val="BDC3C7"/>
-                      </a:solidFill>
-                      <a:prstDash val="solid"/>
-                      <a:round/>
-                      <a:headEnd type="none" w="med" len="med"/>
-                      <a:tailEnd type="none" w="med" len="med"/>
-                    </a:lnL>
-                    <a:lnR w="6350" cap="flat" cmpd="sng" algn="ctr">
-                      <a:solidFill>
-                        <a:srgbClr val="BDC3C7"/>
-                      </a:solidFill>
-                      <a:prstDash val="solid"/>
-                      <a:round/>
-                      <a:headEnd type="none" w="med" len="med"/>
-                      <a:tailEnd type="none" w="med" len="med"/>
-                    </a:lnR>
-                    <a:lnT w="6350" cap="flat" cmpd="sng" algn="ctr">
-                      <a:solidFill>
-                        <a:srgbClr val="BDC3C7"/>
-                      </a:solidFill>
-                      <a:prstDash val="solid"/>
-                      <a:round/>
-                      <a:headEnd type="none" w="med" len="med"/>
-                      <a:tailEnd type="none" w="med" len="med"/>
-                    </a:lnT>
-                    <a:lnB w="6350" cap="flat" cmpd="sng" algn="ctr">
-                      <a:solidFill>
-                        <a:srgbClr val="BDC3C7"/>
-                      </a:solidFill>
-                      <a:prstDash val="solid"/>
-                      <a:round/>
-                      <a:headEnd type="none" w="med" len="med"/>
-                      <a:tailEnd type="none" w="med" len="med"/>
-                    </a:lnB>
-                    <a:solidFill>
-                      <a:srgbClr val="FFFFFF"/>
-                    </a:solidFill>
-                  </a:tcPr>
-                </a:tc>
-                <a:tc>
-                  <a:txBody>
-                    <a:bodyPr/>
-                    <a:lstStyle/>
-                    <a:p>
-                      <a:pPr algn="ctr" indent="0" marL="0">
-                        <a:buNone/>
-                      </a:pPr>
-                      <a:r>
-                        <a:rPr lang="en-US" sz="1300" b="1" dirty="0">
-                          <a:solidFill>
-                            <a:srgbClr val="1E8449"/>
-                          </a:solidFill>
-                          <a:latin typeface="Calibri" pitchFamily="34" charset="0"/>
-                          <a:ea typeface="Calibri" pitchFamily="34" charset="-122"/>
-                          <a:cs typeface="Calibri" pitchFamily="34" charset="-120"/>
-                        </a:rPr>
-                        <a:t>1.50</a:t>
-                      </a:r>
-                      <a:endParaRPr lang="en-US" sz="1300" dirty="0">
-                        <a:latin typeface="Calibri" charset="0"/>
-                        <a:ea typeface="Calibri" charset="0"/>
-                        <a:cs typeface="Calibri" charset="0"/>
-                      </a:endParaRPr>
-                    </a:p>
-                  </a:txBody>
-                  <a:tcPr marL="91440" marR="91440" marT="45720" marB="45720">
-                    <a:lnL w="6350" cap="flat" cmpd="sng" algn="ctr">
-                      <a:solidFill>
-                        <a:srgbClr val="BDC3C7"/>
-                      </a:solidFill>
-                      <a:prstDash val="solid"/>
-                      <a:round/>
-                      <a:headEnd type="none" w="med" len="med"/>
-                      <a:tailEnd type="none" w="med" len="med"/>
-                    </a:lnL>
-                    <a:lnR w="6350" cap="flat" cmpd="sng" algn="ctr">
-                      <a:solidFill>
-                        <a:srgbClr val="BDC3C7"/>
-                      </a:solidFill>
-                      <a:prstDash val="solid"/>
-                      <a:round/>
-                      <a:headEnd type="none" w="med" len="med"/>
-                      <a:tailEnd type="none" w="med" len="med"/>
-                    </a:lnR>
-                    <a:lnT w="6350" cap="flat" cmpd="sng" algn="ctr">
-                      <a:solidFill>
-                        <a:srgbClr val="BDC3C7"/>
-                      </a:solidFill>
-                      <a:prstDash val="solid"/>
-                      <a:round/>
-                      <a:headEnd type="none" w="med" len="med"/>
-                      <a:tailEnd type="none" w="med" len="med"/>
-                    </a:lnT>
-                    <a:lnB w="6350" cap="flat" cmpd="sng" algn="ctr">
-                      <a:solidFill>
-                        <a:srgbClr val="BDC3C7"/>
-                      </a:solidFill>
-                      <a:prstDash val="solid"/>
-                      <a:round/>
-                      <a:headEnd type="none" w="med" len="med"/>
-                      <a:tailEnd type="none" w="med" len="med"/>
-                    </a:lnB>
-                    <a:solidFill>
-                      <a:srgbClr val="FFFFFF"/>
-                    </a:solidFill>
-                  </a:tcPr>
-                </a:tc>
-                <a:tc>
-                  <a:txBody>
-                    <a:bodyPr/>
-                    <a:lstStyle/>
-                    <a:p>
-                      <a:pPr algn="ctr" indent="0" marL="0">
-                        <a:buNone/>
-                      </a:pPr>
-                      <a:r>
-                        <a:rPr lang="en-US" sz="1300" dirty="0">
-                          <a:solidFill>
-                            <a:srgbClr val="1E8449"/>
-                          </a:solidFill>
-                          <a:latin typeface="Calibri" pitchFamily="34" charset="0"/>
-                          <a:ea typeface="Calibri" pitchFamily="34" charset="-122"/>
-                          <a:cs typeface="Calibri" pitchFamily="34" charset="-120"/>
-                        </a:rPr>
-                        <a:t>Normal</a:t>
-                      </a:r>
-                      <a:endParaRPr lang="en-US" sz="1300" dirty="0">
-                        <a:latin typeface="Calibri" charset="0"/>
-                        <a:ea typeface="Calibri" charset="0"/>
-                        <a:cs typeface="Calibri" charset="0"/>
-                      </a:endParaRPr>
-                    </a:p>
-                  </a:txBody>
-                  <a:tcPr marL="91440" marR="91440" marT="45720" marB="45720">
-                    <a:lnL w="6350" cap="flat" cmpd="sng" algn="ctr">
-                      <a:solidFill>
-                        <a:srgbClr val="BDC3C7"/>
-                      </a:solidFill>
-                      <a:prstDash val="solid"/>
-                      <a:round/>
-                      <a:headEnd type="none" w="med" len="med"/>
-                      <a:tailEnd type="none" w="med" len="med"/>
-                    </a:lnL>
-                    <a:lnR w="6350" cap="flat" cmpd="sng" algn="ctr">
-                      <a:solidFill>
-                        <a:srgbClr val="BDC3C7"/>
-                      </a:solidFill>
-                      <a:prstDash val="solid"/>
-                      <a:round/>
-                      <a:headEnd type="none" w="med" len="med"/>
-                      <a:tailEnd type="none" w="med" len="med"/>
-                    </a:lnR>
-                    <a:lnT w="6350" cap="flat" cmpd="sng" algn="ctr">
-                      <a:solidFill>
-                        <a:srgbClr val="BDC3C7"/>
-                      </a:solidFill>
-                      <a:prstDash val="solid"/>
-                      <a:round/>
-                      <a:headEnd type="none" w="med" len="med"/>
-                      <a:tailEnd type="none" w="med" len="med"/>
-                    </a:lnT>
-                    <a:lnB w="6350" cap="flat" cmpd="sng" algn="ctr">
-                      <a:solidFill>
-                        <a:srgbClr val="BDC3C7"/>
-                      </a:solidFill>
-                      <a:prstDash val="solid"/>
-                      <a:round/>
-                      <a:headEnd type="none" w="med" len="med"/>
-                      <a:tailEnd type="none" w="med" len="med"/>
-                    </a:lnB>
-                    <a:solidFill>
-                      <a:srgbClr val="FFFFFF"/>
-                    </a:solidFill>
-                  </a:tcPr>
-                </a:tc>
-              </a:tr>
-              <a:tr h="475488">
-                <a:tc>
-                  <a:txBody>
-                    <a:bodyPr/>
-                    <a:lstStyle/>
-                    <a:p>
-                      <a:pPr algn="ctr" indent="0" marL="0">
-                        <a:buNone/>
-                      </a:pPr>
-                      <a:r>
-                        <a:rPr lang="en-US" sz="1300" dirty="0">
-                          <a:solidFill>
-                            <a:srgbClr val="000000"/>
-                          </a:solidFill>
-                          <a:latin typeface="Calibri" pitchFamily="34" charset="0"/>
-                          <a:ea typeface="Calibri" pitchFamily="34" charset="-122"/>
-                          <a:cs typeface="Calibri" pitchFamily="34" charset="-120"/>
-                        </a:rPr>
-                        <a:t>128</a:t>
-                      </a:r>
-                      <a:endParaRPr lang="en-US" sz="1300" dirty="0">
-                        <a:latin typeface="Calibri" charset="0"/>
-                        <a:ea typeface="Calibri" charset="0"/>
-                        <a:cs typeface="Calibri" charset="0"/>
-                      </a:endParaRPr>
-                    </a:p>
-                  </a:txBody>
-                  <a:tcPr marL="91440" marR="91440" marT="45720" marB="45720">
-                    <a:lnL w="6350" cap="flat" cmpd="sng" algn="ctr">
-                      <a:solidFill>
-                        <a:srgbClr val="BDC3C7"/>
-                      </a:solidFill>
-                      <a:prstDash val="solid"/>
-                      <a:round/>
-                      <a:headEnd type="none" w="med" len="med"/>
-                      <a:tailEnd type="none" w="med" len="med"/>
-                    </a:lnL>
-                    <a:lnR w="6350" cap="flat" cmpd="sng" algn="ctr">
-                      <a:solidFill>
-                        <a:srgbClr val="BDC3C7"/>
-                      </a:solidFill>
-                      <a:prstDash val="solid"/>
-                      <a:round/>
-                      <a:headEnd type="none" w="med" len="med"/>
-                      <a:tailEnd type="none" w="med" len="med"/>
-                    </a:lnR>
-                    <a:lnT w="6350" cap="flat" cmpd="sng" algn="ctr">
-                      <a:solidFill>
-                        <a:srgbClr val="BDC3C7"/>
-                      </a:solidFill>
-                      <a:prstDash val="solid"/>
-                      <a:round/>
-                      <a:headEnd type="none" w="med" len="med"/>
-                      <a:tailEnd type="none" w="med" len="med"/>
-                    </a:lnT>
-                    <a:lnB w="6350" cap="flat" cmpd="sng" algn="ctr">
-                      <a:solidFill>
-                        <a:srgbClr val="BDC3C7"/>
-                      </a:solidFill>
-                      <a:prstDash val="solid"/>
-                      <a:round/>
-                      <a:headEnd type="none" w="med" len="med"/>
-                      <a:tailEnd type="none" w="med" len="med"/>
-                    </a:lnB>
-                    <a:solidFill>
-                      <a:srgbClr val="FFFFFF"/>
-                    </a:solidFill>
-                  </a:tcPr>
-                </a:tc>
-                <a:tc>
-                  <a:txBody>
-                    <a:bodyPr/>
-                    <a:lstStyle/>
-                    <a:p>
-                      <a:pPr algn="ctr" indent="0" marL="0">
-                        <a:buNone/>
-                      </a:pPr>
-                      <a:r>
-                        <a:rPr lang="en-US" sz="1300" dirty="0">
-                          <a:solidFill>
-                            <a:srgbClr val="000000"/>
-                          </a:solidFill>
-                          <a:latin typeface="Calibri" pitchFamily="34" charset="0"/>
-                          <a:ea typeface="Calibri" pitchFamily="34" charset="-122"/>
-                          <a:cs typeface="Calibri" pitchFamily="34" charset="-120"/>
-                        </a:rPr>
-                        <a:t>0.00</a:t>
-                      </a:r>
-                      <a:endParaRPr lang="en-US" sz="1300" dirty="0">
-                        <a:latin typeface="Calibri" charset="0"/>
-                        <a:ea typeface="Calibri" charset="0"/>
-                        <a:cs typeface="Calibri" charset="0"/>
-                      </a:endParaRPr>
-                    </a:p>
-                  </a:txBody>
-                  <a:tcPr marL="91440" marR="91440" marT="45720" marB="45720">
-                    <a:lnL w="6350" cap="flat" cmpd="sng" algn="ctr">
-                      <a:solidFill>
-                        <a:srgbClr val="BDC3C7"/>
-                      </a:solidFill>
-                      <a:prstDash val="solid"/>
-                      <a:round/>
-                      <a:headEnd type="none" w="med" len="med"/>
-                      <a:tailEnd type="none" w="med" len="med"/>
-                    </a:lnL>
-                    <a:lnR w="6350" cap="flat" cmpd="sng" algn="ctr">
-                      <a:solidFill>
-                        <a:srgbClr val="BDC3C7"/>
-                      </a:solidFill>
-                      <a:prstDash val="solid"/>
-                      <a:round/>
-                      <a:headEnd type="none" w="med" len="med"/>
-                      <a:tailEnd type="none" w="med" len="med"/>
-                    </a:lnR>
-                    <a:lnT w="6350" cap="flat" cmpd="sng" algn="ctr">
-                      <a:solidFill>
-                        <a:srgbClr val="BDC3C7"/>
-                      </a:solidFill>
-                      <a:prstDash val="solid"/>
-                      <a:round/>
-                      <a:headEnd type="none" w="med" len="med"/>
-                      <a:tailEnd type="none" w="med" len="med"/>
-                    </a:lnT>
-                    <a:lnB w="6350" cap="flat" cmpd="sng" algn="ctr">
-                      <a:solidFill>
-                        <a:srgbClr val="BDC3C7"/>
-                      </a:solidFill>
-                      <a:prstDash val="solid"/>
-                      <a:round/>
-                      <a:headEnd type="none" w="med" len="med"/>
-                      <a:tailEnd type="none" w="med" len="med"/>
-                    </a:lnB>
-                    <a:solidFill>
-                      <a:srgbClr val="FFFFFF"/>
-                    </a:solidFill>
-                  </a:tcPr>
-                </a:tc>
-                <a:tc>
-                  <a:txBody>
-                    <a:bodyPr/>
-                    <a:lstStyle/>
-                    <a:p>
-                      <a:pPr algn="ctr" indent="0" marL="0">
-                        <a:buNone/>
-                      </a:pPr>
-                      <a:r>
-                        <a:rPr lang="en-US" sz="1300" b="1" dirty="0">
-                          <a:solidFill>
-                            <a:srgbClr val="9A7D0A"/>
-                          </a:solidFill>
-                          <a:latin typeface="Calibri" pitchFamily="34" charset="0"/>
-                          <a:ea typeface="Calibri" pitchFamily="34" charset="-122"/>
-                          <a:cs typeface="Calibri" pitchFamily="34" charset="-120"/>
-                        </a:rPr>
-                        <a:t>0.87</a:t>
-                      </a:r>
-                      <a:endParaRPr lang="en-US" sz="1300" dirty="0">
-                        <a:latin typeface="Calibri" charset="0"/>
-                        <a:ea typeface="Calibri" charset="0"/>
-                        <a:cs typeface="Calibri" charset="0"/>
-                      </a:endParaRPr>
-                    </a:p>
-                  </a:txBody>
-                  <a:tcPr marL="91440" marR="91440" marT="45720" marB="45720">
-                    <a:lnL w="6350" cap="flat" cmpd="sng" algn="ctr">
-                      <a:solidFill>
-                        <a:srgbClr val="BDC3C7"/>
-                      </a:solidFill>
-                      <a:prstDash val="solid"/>
-                      <a:round/>
-                      <a:headEnd type="none" w="med" len="med"/>
-                      <a:tailEnd type="none" w="med" len="med"/>
-                    </a:lnL>
-                    <a:lnR w="6350" cap="flat" cmpd="sng" algn="ctr">
-                      <a:solidFill>
-                        <a:srgbClr val="BDC3C7"/>
-                      </a:solidFill>
-                      <a:prstDash val="solid"/>
-                      <a:round/>
-                      <a:headEnd type="none" w="med" len="med"/>
-                      <a:tailEnd type="none" w="med" len="med"/>
-                    </a:lnR>
-                    <a:lnT w="6350" cap="flat" cmpd="sng" algn="ctr">
-                      <a:solidFill>
-                        <a:srgbClr val="BDC3C7"/>
-                      </a:solidFill>
-                      <a:prstDash val="solid"/>
-                      <a:round/>
-                      <a:headEnd type="none" w="med" len="med"/>
-                      <a:tailEnd type="none" w="med" len="med"/>
-                    </a:lnT>
-                    <a:lnB w="6350" cap="flat" cmpd="sng" algn="ctr">
-                      <a:solidFill>
-                        <a:srgbClr val="BDC3C7"/>
-                      </a:solidFill>
-                      <a:prstDash val="solid"/>
-                      <a:round/>
-                      <a:headEnd type="none" w="med" len="med"/>
-                      <a:tailEnd type="none" w="med" len="med"/>
-                    </a:lnB>
-                    <a:solidFill>
-                      <a:srgbClr val="FFFFFF"/>
-                    </a:solidFill>
-                  </a:tcPr>
-                </a:tc>
-                <a:tc>
-                  <a:txBody>
-                    <a:bodyPr/>
-                    <a:lstStyle/>
-                    <a:p>
-                      <a:pPr algn="ctr" indent="0" marL="0">
-                        <a:buNone/>
-                      </a:pPr>
-                      <a:r>
-                        <a:rPr lang="en-US" sz="1300" dirty="0">
-                          <a:solidFill>
-                            <a:srgbClr val="000000"/>
-                          </a:solidFill>
-                          <a:latin typeface="Calibri" pitchFamily="34" charset="0"/>
-                          <a:ea typeface="Calibri" pitchFamily="34" charset="-122"/>
-                          <a:cs typeface="Calibri" pitchFamily="34" charset="-120"/>
-                        </a:rPr>
-                        <a:t>0.00</a:t>
-                      </a:r>
-                      <a:endParaRPr lang="en-US" sz="1300" dirty="0">
-                        <a:latin typeface="Calibri" charset="0"/>
-                        <a:ea typeface="Calibri" charset="0"/>
-                        <a:cs typeface="Calibri" charset="0"/>
-                      </a:endParaRPr>
-                    </a:p>
-                  </a:txBody>
-                  <a:tcPr marL="91440" marR="91440" marT="45720" marB="45720">
-                    <a:lnL w="6350" cap="flat" cmpd="sng" algn="ctr">
-                      <a:solidFill>
-                        <a:srgbClr val="BDC3C7"/>
-                      </a:solidFill>
-                      <a:prstDash val="solid"/>
-                      <a:round/>
-                      <a:headEnd type="none" w="med" len="med"/>
-                      <a:tailEnd type="none" w="med" len="med"/>
-                    </a:lnL>
-                    <a:lnR w="6350" cap="flat" cmpd="sng" algn="ctr">
-                      <a:solidFill>
-                        <a:srgbClr val="BDC3C7"/>
-                      </a:solidFill>
-                      <a:prstDash val="solid"/>
-                      <a:round/>
-                      <a:headEnd type="none" w="med" len="med"/>
-                      <a:tailEnd type="none" w="med" len="med"/>
-                    </a:lnR>
-                    <a:lnT w="6350" cap="flat" cmpd="sng" algn="ctr">
-                      <a:solidFill>
-                        <a:srgbClr val="BDC3C7"/>
-                      </a:solidFill>
-                      <a:prstDash val="solid"/>
-                      <a:round/>
-                      <a:headEnd type="none" w="med" len="med"/>
-                      <a:tailEnd type="none" w="med" len="med"/>
-                    </a:lnT>
-                    <a:lnB w="6350" cap="flat" cmpd="sng" algn="ctr">
-                      <a:solidFill>
-                        <a:srgbClr val="BDC3C7"/>
-                      </a:solidFill>
-                      <a:prstDash val="solid"/>
-                      <a:round/>
-                      <a:headEnd type="none" w="med" len="med"/>
-                      <a:tailEnd type="none" w="med" len="med"/>
-                    </a:lnB>
-                    <a:solidFill>
-                      <a:srgbClr val="FFFFFF"/>
-                    </a:solidFill>
-                  </a:tcPr>
-                </a:tc>
-                <a:tc>
-                  <a:txBody>
-                    <a:bodyPr/>
-                    <a:lstStyle/>
-                    <a:p>
-                      <a:pPr algn="ctr" indent="0" marL="0">
-                        <a:buNone/>
-                      </a:pPr>
-                      <a:r>
-                        <a:rPr lang="en-US" sz="1300" dirty="0">
-                          <a:solidFill>
-                            <a:srgbClr val="000000"/>
-                          </a:solidFill>
-                          <a:latin typeface="Calibri" pitchFamily="34" charset="0"/>
-                          <a:ea typeface="Calibri" pitchFamily="34" charset="-122"/>
-                          <a:cs typeface="Calibri" pitchFamily="34" charset="-120"/>
-                        </a:rPr>
-                        <a:t>0.00</a:t>
-                      </a:r>
-                      <a:endParaRPr lang="en-US" sz="1300" dirty="0">
-                        <a:latin typeface="Calibri" charset="0"/>
-                        <a:ea typeface="Calibri" charset="0"/>
-                        <a:cs typeface="Calibri" charset="0"/>
-                      </a:endParaRPr>
-                    </a:p>
-                  </a:txBody>
-                  <a:tcPr marL="91440" marR="91440" marT="45720" marB="45720">
-                    <a:lnL w="6350" cap="flat" cmpd="sng" algn="ctr">
-                      <a:solidFill>
-                        <a:srgbClr val="BDC3C7"/>
-                      </a:solidFill>
-                      <a:prstDash val="solid"/>
-                      <a:round/>
-                      <a:headEnd type="none" w="med" len="med"/>
-                      <a:tailEnd type="none" w="med" len="med"/>
-                    </a:lnL>
-                    <a:lnR w="6350" cap="flat" cmpd="sng" algn="ctr">
-                      <a:solidFill>
-                        <a:srgbClr val="BDC3C7"/>
-                      </a:solidFill>
-                      <a:prstDash val="solid"/>
-                      <a:round/>
-                      <a:headEnd type="none" w="med" len="med"/>
-                      <a:tailEnd type="none" w="med" len="med"/>
-                    </a:lnR>
-                    <a:lnT w="6350" cap="flat" cmpd="sng" algn="ctr">
-                      <a:solidFill>
-                        <a:srgbClr val="BDC3C7"/>
-                      </a:solidFill>
-                      <a:prstDash val="solid"/>
-                      <a:round/>
-                      <a:headEnd type="none" w="med" len="med"/>
-                      <a:tailEnd type="none" w="med" len="med"/>
-                    </a:lnT>
-                    <a:lnB w="6350" cap="flat" cmpd="sng" algn="ctr">
-                      <a:solidFill>
-                        <a:srgbClr val="BDC3C7"/>
-                      </a:solidFill>
-                      <a:prstDash val="solid"/>
-                      <a:round/>
-                      <a:headEnd type="none" w="med" len="med"/>
-                      <a:tailEnd type="none" w="med" len="med"/>
-                    </a:lnB>
-                    <a:solidFill>
-                      <a:srgbClr val="FFFFFF"/>
-                    </a:solidFill>
-                  </a:tcPr>
-                </a:tc>
-                <a:tc>
-                  <a:txBody>
-                    <a:bodyPr/>
-                    <a:lstStyle/>
-                    <a:p>
-                      <a:pPr algn="ctr" indent="0" marL="0">
-                        <a:buNone/>
-                      </a:pPr>
-                      <a:r>
-                        <a:rPr lang="en-US" sz="1300" b="1" dirty="0">
-                          <a:solidFill>
-                            <a:srgbClr val="9A7D0A"/>
-                          </a:solidFill>
-                          <a:latin typeface="Calibri" pitchFamily="34" charset="0"/>
-                          <a:ea typeface="Calibri" pitchFamily="34" charset="-122"/>
-                          <a:cs typeface="Calibri" pitchFamily="34" charset="-120"/>
-                        </a:rPr>
-                        <a:t>4.00</a:t>
-                      </a:r>
-                      <a:endParaRPr lang="en-US" sz="1300" dirty="0">
-                        <a:latin typeface="Calibri" charset="0"/>
-                        <a:ea typeface="Calibri" charset="0"/>
-                        <a:cs typeface="Calibri" charset="0"/>
-                      </a:endParaRPr>
-                    </a:p>
-                  </a:txBody>
-                  <a:tcPr marL="91440" marR="91440" marT="45720" marB="45720">
-                    <a:lnL w="6350" cap="flat" cmpd="sng" algn="ctr">
-                      <a:solidFill>
-                        <a:srgbClr val="BDC3C7"/>
-                      </a:solidFill>
-                      <a:prstDash val="solid"/>
-                      <a:round/>
-                      <a:headEnd type="none" w="med" len="med"/>
-                      <a:tailEnd type="none" w="med" len="med"/>
-                    </a:lnL>
-                    <a:lnR w="6350" cap="flat" cmpd="sng" algn="ctr">
-                      <a:solidFill>
-                        <a:srgbClr val="BDC3C7"/>
-                      </a:solidFill>
-                      <a:prstDash val="solid"/>
-                      <a:round/>
-                      <a:headEnd type="none" w="med" len="med"/>
-                      <a:tailEnd type="none" w="med" len="med"/>
-                    </a:lnR>
-                    <a:lnT w="6350" cap="flat" cmpd="sng" algn="ctr">
-                      <a:solidFill>
-                        <a:srgbClr val="BDC3C7"/>
-                      </a:solidFill>
-                      <a:prstDash val="solid"/>
-                      <a:round/>
-                      <a:headEnd type="none" w="med" len="med"/>
-                      <a:tailEnd type="none" w="med" len="med"/>
-                    </a:lnT>
-                    <a:lnB w="6350" cap="flat" cmpd="sng" algn="ctr">
-                      <a:solidFill>
-                        <a:srgbClr val="BDC3C7"/>
-                      </a:solidFill>
-                      <a:prstDash val="solid"/>
-                      <a:round/>
-                      <a:headEnd type="none" w="med" len="med"/>
-                      <a:tailEnd type="none" w="med" len="med"/>
-                    </a:lnB>
-                    <a:solidFill>
-                      <a:srgbClr val="FFFFFF"/>
-                    </a:solidFill>
-                  </a:tcPr>
-                </a:tc>
-                <a:tc>
-                  <a:txBody>
-                    <a:bodyPr/>
-                    <a:lstStyle/>
-                    <a:p>
-                      <a:pPr algn="ctr" indent="0" marL="0">
-                        <a:buNone/>
-                      </a:pPr>
-                      <a:r>
-                        <a:rPr lang="en-US" sz="1300" dirty="0">
-                          <a:solidFill>
-                            <a:srgbClr val="9A7D0A"/>
-                          </a:solidFill>
-                          <a:latin typeface="Calibri" pitchFamily="34" charset="0"/>
-                          <a:ea typeface="Calibri" pitchFamily="34" charset="-122"/>
-                          <a:cs typeface="Calibri" pitchFamily="34" charset="-120"/>
-                        </a:rPr>
-                        <a:t>Elevada</a:t>
-                      </a:r>
-                      <a:endParaRPr lang="en-US" sz="1300" dirty="0">
-                        <a:latin typeface="Calibri" charset="0"/>
-                        <a:ea typeface="Calibri" charset="0"/>
-                        <a:cs typeface="Calibri" charset="0"/>
-                      </a:endParaRPr>
-                    </a:p>
-                  </a:txBody>
-                  <a:tcPr marL="91440" marR="91440" marT="45720" marB="45720">
-                    <a:lnL w="6350" cap="flat" cmpd="sng" algn="ctr">
-                      <a:solidFill>
-                        <a:srgbClr val="BDC3C7"/>
-                      </a:solidFill>
-                      <a:prstDash val="solid"/>
-                      <a:round/>
-                      <a:headEnd type="none" w="med" len="med"/>
-                      <a:tailEnd type="none" w="med" len="med"/>
-                    </a:lnL>
-                    <a:lnR w="6350" cap="flat" cmpd="sng" algn="ctr">
-                      <a:solidFill>
-                        <a:srgbClr val="BDC3C7"/>
-                      </a:solidFill>
-                      <a:prstDash val="solid"/>
-                      <a:round/>
-                      <a:headEnd type="none" w="med" len="med"/>
-                      <a:tailEnd type="none" w="med" len="med"/>
-                    </a:lnR>
-                    <a:lnT w="6350" cap="flat" cmpd="sng" algn="ctr">
-                      <a:solidFill>
-                        <a:srgbClr val="BDC3C7"/>
-                      </a:solidFill>
-                      <a:prstDash val="solid"/>
-                      <a:round/>
-                      <a:headEnd type="none" w="med" len="med"/>
-                      <a:tailEnd type="none" w="med" len="med"/>
-                    </a:lnT>
-                    <a:lnB w="6350" cap="flat" cmpd="sng" algn="ctr">
-                      <a:solidFill>
-                        <a:srgbClr val="BDC3C7"/>
-                      </a:solidFill>
-                      <a:prstDash val="solid"/>
-                      <a:round/>
-                      <a:headEnd type="none" w="med" len="med"/>
-                      <a:tailEnd type="none" w="med" len="med"/>
-                    </a:lnB>
-                    <a:solidFill>
-                      <a:srgbClr val="FFFFFF"/>
-                    </a:solidFill>
-                  </a:tcPr>
-                </a:tc>
-              </a:tr>
-              <a:tr h="475488">
-                <a:tc>
-                  <a:txBody>
-                    <a:bodyPr/>
-                    <a:lstStyle/>
-                    <a:p>
-                      <a:pPr algn="ctr" indent="0" marL="0">
-                        <a:buNone/>
-                      </a:pPr>
-                      <a:r>
-                        <a:rPr lang="en-US" sz="1300" dirty="0">
-                          <a:solidFill>
-                            <a:srgbClr val="000000"/>
-                          </a:solidFill>
-                          <a:latin typeface="Calibri" pitchFamily="34" charset="0"/>
-                          <a:ea typeface="Calibri" pitchFamily="34" charset="-122"/>
-                          <a:cs typeface="Calibri" pitchFamily="34" charset="-120"/>
-                        </a:rPr>
-                        <a:t>150</a:t>
-                      </a:r>
-                      <a:endParaRPr lang="en-US" sz="1300" dirty="0">
-                        <a:latin typeface="Calibri" charset="0"/>
-                        <a:ea typeface="Calibri" charset="0"/>
-                        <a:cs typeface="Calibri" charset="0"/>
-                      </a:endParaRPr>
-                    </a:p>
-                  </a:txBody>
-                  <a:tcPr marL="91440" marR="91440" marT="45720" marB="45720">
-                    <a:lnL w="6350" cap="flat" cmpd="sng" algn="ctr">
-                      <a:solidFill>
-                        <a:srgbClr val="BDC3C7"/>
-                      </a:solidFill>
-                      <a:prstDash val="solid"/>
-                      <a:round/>
-                      <a:headEnd type="none" w="med" len="med"/>
-                      <a:tailEnd type="none" w="med" len="med"/>
-                    </a:lnL>
-                    <a:lnR w="6350" cap="flat" cmpd="sng" algn="ctr">
-                      <a:solidFill>
-                        <a:srgbClr val="BDC3C7"/>
-                      </a:solidFill>
-                      <a:prstDash val="solid"/>
-                      <a:round/>
-                      <a:headEnd type="none" w="med" len="med"/>
-                      <a:tailEnd type="none" w="med" len="med"/>
-                    </a:lnR>
-                    <a:lnT w="6350" cap="flat" cmpd="sng" algn="ctr">
-                      <a:solidFill>
-                        <a:srgbClr val="BDC3C7"/>
-                      </a:solidFill>
-                      <a:prstDash val="solid"/>
-                      <a:round/>
-                      <a:headEnd type="none" w="med" len="med"/>
-                      <a:tailEnd type="none" w="med" len="med"/>
-                    </a:lnT>
-                    <a:lnB w="6350" cap="flat" cmpd="sng" algn="ctr">
-                      <a:solidFill>
-                        <a:srgbClr val="BDC3C7"/>
-                      </a:solidFill>
-                      <a:prstDash val="solid"/>
-                      <a:round/>
-                      <a:headEnd type="none" w="med" len="med"/>
-                      <a:tailEnd type="none" w="med" len="med"/>
-                    </a:lnB>
-                    <a:solidFill>
-                      <a:srgbClr val="FFFFFF"/>
-                    </a:solidFill>
-                  </a:tcPr>
-                </a:tc>
-                <a:tc>
-                  <a:txBody>
-                    <a:bodyPr/>
-                    <a:lstStyle/>
-                    <a:p>
-                      <a:pPr algn="ctr" indent="0" marL="0">
-                        <a:buNone/>
-                      </a:pPr>
-                      <a:r>
-                        <a:rPr lang="en-US" sz="1300" dirty="0">
-                          <a:solidFill>
-                            <a:srgbClr val="000000"/>
-                          </a:solidFill>
-                          <a:latin typeface="Calibri" pitchFamily="34" charset="0"/>
-                          <a:ea typeface="Calibri" pitchFamily="34" charset="-122"/>
-                          <a:cs typeface="Calibri" pitchFamily="34" charset="-120"/>
-                        </a:rPr>
-                        <a:t>0.00</a:t>
-                      </a:r>
-                      <a:endParaRPr lang="en-US" sz="1300" dirty="0">
-                        <a:latin typeface="Calibri" charset="0"/>
-                        <a:ea typeface="Calibri" charset="0"/>
-                        <a:cs typeface="Calibri" charset="0"/>
-                      </a:endParaRPr>
-                    </a:p>
-                  </a:txBody>
-                  <a:tcPr marL="91440" marR="91440" marT="45720" marB="45720">
-                    <a:lnL w="6350" cap="flat" cmpd="sng" algn="ctr">
-                      <a:solidFill>
-                        <a:srgbClr val="BDC3C7"/>
-                      </a:solidFill>
-                      <a:prstDash val="solid"/>
-                      <a:round/>
-                      <a:headEnd type="none" w="med" len="med"/>
-                      <a:tailEnd type="none" w="med" len="med"/>
-                    </a:lnL>
-                    <a:lnR w="6350" cap="flat" cmpd="sng" algn="ctr">
-                      <a:solidFill>
-                        <a:srgbClr val="BDC3C7"/>
-                      </a:solidFill>
-                      <a:prstDash val="solid"/>
-                      <a:round/>
-                      <a:headEnd type="none" w="med" len="med"/>
-                      <a:tailEnd type="none" w="med" len="med"/>
-                    </a:lnR>
-                    <a:lnT w="6350" cap="flat" cmpd="sng" algn="ctr">
-                      <a:solidFill>
-                        <a:srgbClr val="BDC3C7"/>
-                      </a:solidFill>
-                      <a:prstDash val="solid"/>
-                      <a:round/>
-                      <a:headEnd type="none" w="med" len="med"/>
-                      <a:tailEnd type="none" w="med" len="med"/>
-                    </a:lnT>
-                    <a:lnB w="6350" cap="flat" cmpd="sng" algn="ctr">
-                      <a:solidFill>
-                        <a:srgbClr val="BDC3C7"/>
-                      </a:solidFill>
-                      <a:prstDash val="solid"/>
-                      <a:round/>
-                      <a:headEnd type="none" w="med" len="med"/>
-                      <a:tailEnd type="none" w="med" len="med"/>
-                    </a:lnB>
-                    <a:solidFill>
-                      <a:srgbClr val="FFFFFF"/>
-                    </a:solidFill>
-                  </a:tcPr>
-                </a:tc>
-                <a:tc>
-                  <a:txBody>
-                    <a:bodyPr/>
-                    <a:lstStyle/>
-                    <a:p>
-                      <a:pPr algn="ctr" indent="0" marL="0">
-                        <a:buNone/>
-                      </a:pPr>
-                      <a:r>
-                        <a:rPr lang="en-US" sz="1300" dirty="0">
-                          <a:solidFill>
-                            <a:srgbClr val="000000"/>
-                          </a:solidFill>
-                          <a:latin typeface="Calibri" pitchFamily="34" charset="0"/>
-                          <a:ea typeface="Calibri" pitchFamily="34" charset="-122"/>
-                          <a:cs typeface="Calibri" pitchFamily="34" charset="-120"/>
-                        </a:rPr>
-                        <a:t>0.00</a:t>
-                      </a:r>
-                      <a:endParaRPr lang="en-US" sz="1300" dirty="0">
-                        <a:latin typeface="Calibri" charset="0"/>
-                        <a:ea typeface="Calibri" charset="0"/>
-                        <a:cs typeface="Calibri" charset="0"/>
-                      </a:endParaRPr>
-                    </a:p>
-                  </a:txBody>
-                  <a:tcPr marL="91440" marR="91440" marT="45720" marB="45720">
-                    <a:lnL w="6350" cap="flat" cmpd="sng" algn="ctr">
-                      <a:solidFill>
-                        <a:srgbClr val="BDC3C7"/>
-                      </a:solidFill>
-                      <a:prstDash val="solid"/>
-                      <a:round/>
-                      <a:headEnd type="none" w="med" len="med"/>
-                      <a:tailEnd type="none" w="med" len="med"/>
-                    </a:lnL>
-                    <a:lnR w="6350" cap="flat" cmpd="sng" algn="ctr">
-                      <a:solidFill>
-                        <a:srgbClr val="BDC3C7"/>
-                      </a:solidFill>
-                      <a:prstDash val="solid"/>
-                      <a:round/>
-                      <a:headEnd type="none" w="med" len="med"/>
-                      <a:tailEnd type="none" w="med" len="med"/>
-                    </a:lnR>
-                    <a:lnT w="6350" cap="flat" cmpd="sng" algn="ctr">
-                      <a:solidFill>
-                        <a:srgbClr val="BDC3C7"/>
-                      </a:solidFill>
-                      <a:prstDash val="solid"/>
-                      <a:round/>
-                      <a:headEnd type="none" w="med" len="med"/>
-                      <a:tailEnd type="none" w="med" len="med"/>
-                    </a:lnT>
-                    <a:lnB w="6350" cap="flat" cmpd="sng" algn="ctr">
-                      <a:solidFill>
-                        <a:srgbClr val="BDC3C7"/>
-                      </a:solidFill>
-                      <a:prstDash val="solid"/>
-                      <a:round/>
-                      <a:headEnd type="none" w="med" len="med"/>
-                      <a:tailEnd type="none" w="med" len="med"/>
-                    </a:lnB>
-                    <a:solidFill>
-                      <a:srgbClr val="FFFFFF"/>
-                    </a:solidFill>
-                  </a:tcPr>
-                </a:tc>
-                <a:tc>
-                  <a:txBody>
-                    <a:bodyPr/>
-                    <a:lstStyle/>
-                    <a:p>
-                      <a:pPr algn="ctr" indent="0" marL="0">
-                        <a:buNone/>
-                      </a:pPr>
-                      <a:r>
-                        <a:rPr lang="en-US" sz="1300" b="1" dirty="0">
-                          <a:solidFill>
-                            <a:srgbClr val="A04000"/>
-                          </a:solidFill>
-                          <a:latin typeface="Calibri" pitchFamily="34" charset="0"/>
-                          <a:ea typeface="Calibri" pitchFamily="34" charset="-122"/>
-                          <a:cs typeface="Calibri" pitchFamily="34" charset="-120"/>
-                        </a:rPr>
-                        <a:t>1.00</a:t>
-                      </a:r>
-                      <a:endParaRPr lang="en-US" sz="1300" dirty="0">
-                        <a:latin typeface="Calibri" charset="0"/>
-                        <a:ea typeface="Calibri" charset="0"/>
-                        <a:cs typeface="Calibri" charset="0"/>
-                      </a:endParaRPr>
-                    </a:p>
-                  </a:txBody>
-                  <a:tcPr marL="91440" marR="91440" marT="45720" marB="45720">
-                    <a:lnL w="6350" cap="flat" cmpd="sng" algn="ctr">
-                      <a:solidFill>
-                        <a:srgbClr val="BDC3C7"/>
-                      </a:solidFill>
-                      <a:prstDash val="solid"/>
-                      <a:round/>
-                      <a:headEnd type="none" w="med" len="med"/>
-                      <a:tailEnd type="none" w="med" len="med"/>
-                    </a:lnL>
-                    <a:lnR w="6350" cap="flat" cmpd="sng" algn="ctr">
-                      <a:solidFill>
-                        <a:srgbClr val="BDC3C7"/>
-                      </a:solidFill>
-                      <a:prstDash val="solid"/>
-                      <a:round/>
-                      <a:headEnd type="none" w="med" len="med"/>
-                      <a:tailEnd type="none" w="med" len="med"/>
-                    </a:lnR>
-                    <a:lnT w="6350" cap="flat" cmpd="sng" algn="ctr">
-                      <a:solidFill>
-                        <a:srgbClr val="BDC3C7"/>
-                      </a:solidFill>
-                      <a:prstDash val="solid"/>
-                      <a:round/>
-                      <a:headEnd type="none" w="med" len="med"/>
-                      <a:tailEnd type="none" w="med" len="med"/>
-                    </a:lnT>
-                    <a:lnB w="6350" cap="flat" cmpd="sng" algn="ctr">
-                      <a:solidFill>
-                        <a:srgbClr val="BDC3C7"/>
-                      </a:solidFill>
-                      <a:prstDash val="solid"/>
-                      <a:round/>
-                      <a:headEnd type="none" w="med" len="med"/>
-                      <a:tailEnd type="none" w="med" len="med"/>
-                    </a:lnB>
-                    <a:solidFill>
-                      <a:srgbClr val="FFFFFF"/>
-                    </a:solidFill>
-                  </a:tcPr>
-                </a:tc>
-                <a:tc>
-                  <a:txBody>
-                    <a:bodyPr/>
-                    <a:lstStyle/>
-                    <a:p>
-                      <a:pPr algn="ctr" indent="0" marL="0">
-                        <a:buNone/>
-                      </a:pPr>
-                      <a:r>
-                        <a:rPr lang="en-US" sz="1300" dirty="0">
-                          <a:solidFill>
-                            <a:srgbClr val="000000"/>
-                          </a:solidFill>
-                          <a:latin typeface="Calibri" pitchFamily="34" charset="0"/>
-                          <a:ea typeface="Calibri" pitchFamily="34" charset="-122"/>
-                          <a:cs typeface="Calibri" pitchFamily="34" charset="-120"/>
-                        </a:rPr>
-                        <a:t>0.00</a:t>
-                      </a:r>
-                      <a:endParaRPr lang="en-US" sz="1300" dirty="0">
-                        <a:latin typeface="Calibri" charset="0"/>
-                        <a:ea typeface="Calibri" charset="0"/>
-                        <a:cs typeface="Calibri" charset="0"/>
-                      </a:endParaRPr>
-                    </a:p>
-                  </a:txBody>
-                  <a:tcPr marL="91440" marR="91440" marT="45720" marB="45720">
-                    <a:lnL w="6350" cap="flat" cmpd="sng" algn="ctr">
-                      <a:solidFill>
-                        <a:srgbClr val="BDC3C7"/>
-                      </a:solidFill>
-                      <a:prstDash val="solid"/>
-                      <a:round/>
-                      <a:headEnd type="none" w="med" len="med"/>
-                      <a:tailEnd type="none" w="med" len="med"/>
-                    </a:lnL>
-                    <a:lnR w="6350" cap="flat" cmpd="sng" algn="ctr">
-                      <a:solidFill>
-                        <a:srgbClr val="BDC3C7"/>
-                      </a:solidFill>
-                      <a:prstDash val="solid"/>
-                      <a:round/>
-                      <a:headEnd type="none" w="med" len="med"/>
-                      <a:tailEnd type="none" w="med" len="med"/>
-                    </a:lnR>
-                    <a:lnT w="6350" cap="flat" cmpd="sng" algn="ctr">
-                      <a:solidFill>
-                        <a:srgbClr val="BDC3C7"/>
-                      </a:solidFill>
-                      <a:prstDash val="solid"/>
-                      <a:round/>
-                      <a:headEnd type="none" w="med" len="med"/>
-                      <a:tailEnd type="none" w="med" len="med"/>
-                    </a:lnT>
-                    <a:lnB w="6350" cap="flat" cmpd="sng" algn="ctr">
-                      <a:solidFill>
-                        <a:srgbClr val="BDC3C7"/>
-                      </a:solidFill>
-                      <a:prstDash val="solid"/>
-                      <a:round/>
-                      <a:headEnd type="none" w="med" len="med"/>
-                      <a:tailEnd type="none" w="med" len="med"/>
-                    </a:lnB>
-                    <a:solidFill>
-                      <a:srgbClr val="FFFFFF"/>
-                    </a:solidFill>
-                  </a:tcPr>
-                </a:tc>
-                <a:tc>
-                  <a:txBody>
-                    <a:bodyPr/>
-                    <a:lstStyle/>
-                    <a:p>
-                      <a:pPr algn="ctr" indent="0" marL="0">
-                        <a:buNone/>
-                      </a:pPr>
-                      <a:r>
-                        <a:rPr lang="en-US" sz="1300" b="1" dirty="0">
-                          <a:solidFill>
-                            <a:srgbClr val="A04000"/>
-                          </a:solidFill>
-                          <a:latin typeface="Calibri" pitchFamily="34" charset="0"/>
-                          <a:ea typeface="Calibri" pitchFamily="34" charset="-122"/>
-                          <a:cs typeface="Calibri" pitchFamily="34" charset="-120"/>
-                        </a:rPr>
-                        <a:t>6.50</a:t>
-                      </a:r>
-                      <a:endParaRPr lang="en-US" sz="1300" dirty="0">
-                        <a:latin typeface="Calibri" charset="0"/>
-                        <a:ea typeface="Calibri" charset="0"/>
-                        <a:cs typeface="Calibri" charset="0"/>
-                      </a:endParaRPr>
-                    </a:p>
-                  </a:txBody>
-                  <a:tcPr marL="91440" marR="91440" marT="45720" marB="45720">
-                    <a:lnL w="6350" cap="flat" cmpd="sng" algn="ctr">
-                      <a:solidFill>
-                        <a:srgbClr val="BDC3C7"/>
-                      </a:solidFill>
-                      <a:prstDash val="solid"/>
-                      <a:round/>
-                      <a:headEnd type="none" w="med" len="med"/>
-                      <a:tailEnd type="none" w="med" len="med"/>
-                    </a:lnL>
-                    <a:lnR w="6350" cap="flat" cmpd="sng" algn="ctr">
-                      <a:solidFill>
-                        <a:srgbClr val="BDC3C7"/>
-                      </a:solidFill>
-                      <a:prstDash val="solid"/>
-                      <a:round/>
-                      <a:headEnd type="none" w="med" len="med"/>
-                      <a:tailEnd type="none" w="med" len="med"/>
-                    </a:lnR>
-                    <a:lnT w="6350" cap="flat" cmpd="sng" algn="ctr">
-                      <a:solidFill>
-                        <a:srgbClr val="BDC3C7"/>
-                      </a:solidFill>
-                      <a:prstDash val="solid"/>
-                      <a:round/>
-                      <a:headEnd type="none" w="med" len="med"/>
-                      <a:tailEnd type="none" w="med" len="med"/>
-                    </a:lnT>
-                    <a:lnB w="6350" cap="flat" cmpd="sng" algn="ctr">
-                      <a:solidFill>
-                        <a:srgbClr val="BDC3C7"/>
-                      </a:solidFill>
-                      <a:prstDash val="solid"/>
-                      <a:round/>
-                      <a:headEnd type="none" w="med" len="med"/>
-                      <a:tailEnd type="none" w="med" len="med"/>
-                    </a:lnB>
-                    <a:solidFill>
-                      <a:srgbClr val="FFFFFF"/>
-                    </a:solidFill>
-                  </a:tcPr>
-                </a:tc>
-                <a:tc>
-                  <a:txBody>
-                    <a:bodyPr/>
-                    <a:lstStyle/>
-                    <a:p>
-                      <a:pPr algn="ctr" indent="0" marL="0">
-                        <a:buNone/>
-                      </a:pPr>
-                      <a:r>
-                        <a:rPr lang="en-US" sz="1300" dirty="0">
-                          <a:solidFill>
-                            <a:srgbClr val="A04000"/>
-                          </a:solidFill>
-                          <a:latin typeface="Calibri" pitchFamily="34" charset="0"/>
-                          <a:ea typeface="Calibri" pitchFamily="34" charset="-122"/>
-                          <a:cs typeface="Calibri" pitchFamily="34" charset="-120"/>
-                        </a:rPr>
-                        <a:t>Alta</a:t>
-                      </a:r>
-                      <a:endParaRPr lang="en-US" sz="1300" dirty="0">
-                        <a:latin typeface="Calibri" charset="0"/>
-                        <a:ea typeface="Calibri" charset="0"/>
-                        <a:cs typeface="Calibri" charset="0"/>
-                      </a:endParaRPr>
-                    </a:p>
-                  </a:txBody>
-                  <a:tcPr marL="91440" marR="91440" marT="45720" marB="45720">
-                    <a:lnL w="6350" cap="flat" cmpd="sng" algn="ctr">
-                      <a:solidFill>
-                        <a:srgbClr val="BDC3C7"/>
-                      </a:solidFill>
-                      <a:prstDash val="solid"/>
-                      <a:round/>
-                      <a:headEnd type="none" w="med" len="med"/>
-                      <a:tailEnd type="none" w="med" len="med"/>
-                    </a:lnL>
-                    <a:lnR w="6350" cap="flat" cmpd="sng" algn="ctr">
-                      <a:solidFill>
-                        <a:srgbClr val="BDC3C7"/>
-                      </a:solidFill>
-                      <a:prstDash val="solid"/>
-                      <a:round/>
-                      <a:headEnd type="none" w="med" len="med"/>
-                      <a:tailEnd type="none" w="med" len="med"/>
-                    </a:lnR>
-                    <a:lnT w="6350" cap="flat" cmpd="sng" algn="ctr">
-                      <a:solidFill>
-                        <a:srgbClr val="BDC3C7"/>
-                      </a:solidFill>
-                      <a:prstDash val="solid"/>
-                      <a:round/>
-                      <a:headEnd type="none" w="med" len="med"/>
-                      <a:tailEnd type="none" w="med" len="med"/>
-                    </a:lnT>
-                    <a:lnB w="6350" cap="flat" cmpd="sng" algn="ctr">
-                      <a:solidFill>
-                        <a:srgbClr val="BDC3C7"/>
-                      </a:solidFill>
-                      <a:prstDash val="solid"/>
-                      <a:round/>
-                      <a:headEnd type="none" w="med" len="med"/>
-                      <a:tailEnd type="none" w="med" len="med"/>
-                    </a:lnB>
-                    <a:solidFill>
-                      <a:srgbClr val="FFFFFF"/>
-                    </a:solidFill>
-                  </a:tcPr>
-                </a:tc>
-              </a:tr>
-              <a:tr h="475488">
-                <a:tc>
-                  <a:txBody>
-                    <a:bodyPr/>
-                    <a:lstStyle/>
-                    <a:p>
-                      <a:pPr algn="ctr" indent="0" marL="0">
-                        <a:buNone/>
-                      </a:pPr>
-                      <a:r>
-                        <a:rPr lang="en-US" sz="1300" dirty="0">
-                          <a:solidFill>
-                            <a:srgbClr val="000000"/>
-                          </a:solidFill>
-                          <a:latin typeface="Calibri" pitchFamily="34" charset="0"/>
-                          <a:ea typeface="Calibri" pitchFamily="34" charset="-122"/>
-                          <a:cs typeface="Calibri" pitchFamily="34" charset="-120"/>
-                        </a:rPr>
-                        <a:t>185</a:t>
-                      </a:r>
-                      <a:endParaRPr lang="en-US" sz="1300" dirty="0">
-                        <a:latin typeface="Calibri" charset="0"/>
-                        <a:ea typeface="Calibri" charset="0"/>
-                        <a:cs typeface="Calibri" charset="0"/>
-                      </a:endParaRPr>
-                    </a:p>
-                  </a:txBody>
-                  <a:tcPr marL="91440" marR="91440" marT="45720" marB="45720">
-                    <a:lnL w="6350" cap="flat" cmpd="sng" algn="ctr">
-                      <a:solidFill>
-                        <a:srgbClr val="BDC3C7"/>
-                      </a:solidFill>
-                      <a:prstDash val="solid"/>
-                      <a:round/>
-                      <a:headEnd type="none" w="med" len="med"/>
-                      <a:tailEnd type="none" w="med" len="med"/>
-                    </a:lnL>
-                    <a:lnR w="6350" cap="flat" cmpd="sng" algn="ctr">
-                      <a:solidFill>
-                        <a:srgbClr val="BDC3C7"/>
-                      </a:solidFill>
-                      <a:prstDash val="solid"/>
-                      <a:round/>
-                      <a:headEnd type="none" w="med" len="med"/>
-                      <a:tailEnd type="none" w="med" len="med"/>
-                    </a:lnR>
-                    <a:lnT w="6350" cap="flat" cmpd="sng" algn="ctr">
-                      <a:solidFill>
-                        <a:srgbClr val="BDC3C7"/>
-                      </a:solidFill>
-                      <a:prstDash val="solid"/>
-                      <a:round/>
-                      <a:headEnd type="none" w="med" len="med"/>
-                      <a:tailEnd type="none" w="med" len="med"/>
-                    </a:lnT>
-                    <a:lnB w="6350" cap="flat" cmpd="sng" algn="ctr">
-                      <a:solidFill>
-                        <a:srgbClr val="BDC3C7"/>
-                      </a:solidFill>
-                      <a:prstDash val="solid"/>
-                      <a:round/>
-                      <a:headEnd type="none" w="med" len="med"/>
-                      <a:tailEnd type="none" w="med" len="med"/>
-                    </a:lnB>
-                    <a:solidFill>
-                      <a:srgbClr val="FFFFFF"/>
-                    </a:solidFill>
-                  </a:tcPr>
-                </a:tc>
-                <a:tc>
-                  <a:txBody>
-                    <a:bodyPr/>
-                    <a:lstStyle/>
-                    <a:p>
-                      <a:pPr algn="ctr" indent="0" marL="0">
-                        <a:buNone/>
-                      </a:pPr>
-                      <a:r>
-                        <a:rPr lang="en-US" sz="1300" dirty="0">
-                          <a:solidFill>
-                            <a:srgbClr val="000000"/>
-                          </a:solidFill>
-                          <a:latin typeface="Calibri" pitchFamily="34" charset="0"/>
-                          <a:ea typeface="Calibri" pitchFamily="34" charset="-122"/>
-                          <a:cs typeface="Calibri" pitchFamily="34" charset="-120"/>
-                        </a:rPr>
-                        <a:t>0.00</a:t>
-                      </a:r>
-                      <a:endParaRPr lang="en-US" sz="1300" dirty="0">
-                        <a:latin typeface="Calibri" charset="0"/>
-                        <a:ea typeface="Calibri" charset="0"/>
-                        <a:cs typeface="Calibri" charset="0"/>
-                      </a:endParaRPr>
-                    </a:p>
-                  </a:txBody>
-                  <a:tcPr marL="91440" marR="91440" marT="45720" marB="45720">
-                    <a:lnL w="6350" cap="flat" cmpd="sng" algn="ctr">
-                      <a:solidFill>
-                        <a:srgbClr val="BDC3C7"/>
-                      </a:solidFill>
-                      <a:prstDash val="solid"/>
-                      <a:round/>
-                      <a:headEnd type="none" w="med" len="med"/>
-                      <a:tailEnd type="none" w="med" len="med"/>
-                    </a:lnL>
-                    <a:lnR w="6350" cap="flat" cmpd="sng" algn="ctr">
-                      <a:solidFill>
-                        <a:srgbClr val="BDC3C7"/>
-                      </a:solidFill>
-                      <a:prstDash val="solid"/>
-                      <a:round/>
-                      <a:headEnd type="none" w="med" len="med"/>
-                      <a:tailEnd type="none" w="med" len="med"/>
-                    </a:lnR>
-                    <a:lnT w="6350" cap="flat" cmpd="sng" algn="ctr">
-                      <a:solidFill>
-                        <a:srgbClr val="BDC3C7"/>
-                      </a:solidFill>
-                      <a:prstDash val="solid"/>
-                      <a:round/>
-                      <a:headEnd type="none" w="med" len="med"/>
-                      <a:tailEnd type="none" w="med" len="med"/>
-                    </a:lnT>
-                    <a:lnB w="6350" cap="flat" cmpd="sng" algn="ctr">
-                      <a:solidFill>
-                        <a:srgbClr val="BDC3C7"/>
-                      </a:solidFill>
-                      <a:prstDash val="solid"/>
-                      <a:round/>
-                      <a:headEnd type="none" w="med" len="med"/>
-                      <a:tailEnd type="none" w="med" len="med"/>
-                    </a:lnB>
-                    <a:solidFill>
-                      <a:srgbClr val="FFFFFF"/>
-                    </a:solidFill>
-                  </a:tcPr>
-                </a:tc>
-                <a:tc>
-                  <a:txBody>
-                    <a:bodyPr/>
-                    <a:lstStyle/>
-                    <a:p>
-                      <a:pPr algn="ctr" indent="0" marL="0">
-                        <a:buNone/>
-                      </a:pPr>
-                      <a:r>
-                        <a:rPr lang="en-US" sz="1300" dirty="0">
-                          <a:solidFill>
-                            <a:srgbClr val="000000"/>
-                          </a:solidFill>
-                          <a:latin typeface="Calibri" pitchFamily="34" charset="0"/>
-                          <a:ea typeface="Calibri" pitchFamily="34" charset="-122"/>
-                          <a:cs typeface="Calibri" pitchFamily="34" charset="-120"/>
-                        </a:rPr>
-                        <a:t>0.00</a:t>
-                      </a:r>
-                      <a:endParaRPr lang="en-US" sz="1300" dirty="0">
-                        <a:latin typeface="Calibri" charset="0"/>
-                        <a:ea typeface="Calibri" charset="0"/>
-                        <a:cs typeface="Calibri" charset="0"/>
-                      </a:endParaRPr>
-                    </a:p>
-                  </a:txBody>
-                  <a:tcPr marL="91440" marR="91440" marT="45720" marB="45720">
-                    <a:lnL w="6350" cap="flat" cmpd="sng" algn="ctr">
-                      <a:solidFill>
-                        <a:srgbClr val="BDC3C7"/>
-                      </a:solidFill>
-                      <a:prstDash val="solid"/>
-                      <a:round/>
-                      <a:headEnd type="none" w="med" len="med"/>
-                      <a:tailEnd type="none" w="med" len="med"/>
-                    </a:lnL>
-                    <a:lnR w="6350" cap="flat" cmpd="sng" algn="ctr">
-                      <a:solidFill>
-                        <a:srgbClr val="BDC3C7"/>
-                      </a:solidFill>
-                      <a:prstDash val="solid"/>
-                      <a:round/>
-                      <a:headEnd type="none" w="med" len="med"/>
-                      <a:tailEnd type="none" w="med" len="med"/>
-                    </a:lnR>
-                    <a:lnT w="6350" cap="flat" cmpd="sng" algn="ctr">
-                      <a:solidFill>
-                        <a:srgbClr val="BDC3C7"/>
-                      </a:solidFill>
-                      <a:prstDash val="solid"/>
-                      <a:round/>
-                      <a:headEnd type="none" w="med" len="med"/>
-                      <a:tailEnd type="none" w="med" len="med"/>
-                    </a:lnT>
-                    <a:lnB w="6350" cap="flat" cmpd="sng" algn="ctr">
-                      <a:solidFill>
-                        <a:srgbClr val="BDC3C7"/>
-                      </a:solidFill>
-                      <a:prstDash val="solid"/>
-                      <a:round/>
-                      <a:headEnd type="none" w="med" len="med"/>
-                      <a:tailEnd type="none" w="med" len="med"/>
-                    </a:lnB>
-                    <a:solidFill>
-                      <a:srgbClr val="FFFFFF"/>
-                    </a:solidFill>
-                  </a:tcPr>
-                </a:tc>
-                <a:tc>
-                  <a:txBody>
-                    <a:bodyPr/>
-                    <a:lstStyle/>
-                    <a:p>
-                      <a:pPr algn="ctr" indent="0" marL="0">
-                        <a:buNone/>
-                      </a:pPr>
-                      <a:r>
-                        <a:rPr lang="en-US" sz="1300" dirty="0">
-                          <a:solidFill>
-                            <a:srgbClr val="000000"/>
-                          </a:solidFill>
-                          <a:latin typeface="Calibri" pitchFamily="34" charset="0"/>
-                          <a:ea typeface="Calibri" pitchFamily="34" charset="-122"/>
-                          <a:cs typeface="Calibri" pitchFamily="34" charset="-120"/>
-                        </a:rPr>
-                        <a:t>0.00</a:t>
-                      </a:r>
-                      <a:endParaRPr lang="en-US" sz="1300" dirty="0">
-                        <a:latin typeface="Calibri" charset="0"/>
-                        <a:ea typeface="Calibri" charset="0"/>
-                        <a:cs typeface="Calibri" charset="0"/>
-                      </a:endParaRPr>
-                    </a:p>
-                  </a:txBody>
-                  <a:tcPr marL="91440" marR="91440" marT="45720" marB="45720">
-                    <a:lnL w="6350" cap="flat" cmpd="sng" algn="ctr">
-                      <a:solidFill>
-                        <a:srgbClr val="BDC3C7"/>
-                      </a:solidFill>
-                      <a:prstDash val="solid"/>
-                      <a:round/>
-                      <a:headEnd type="none" w="med" len="med"/>
-                      <a:tailEnd type="none" w="med" len="med"/>
-                    </a:lnL>
-                    <a:lnR w="6350" cap="flat" cmpd="sng" algn="ctr">
-                      <a:solidFill>
-                        <a:srgbClr val="BDC3C7"/>
-                      </a:solidFill>
-                      <a:prstDash val="solid"/>
-                      <a:round/>
-                      <a:headEnd type="none" w="med" len="med"/>
-                      <a:tailEnd type="none" w="med" len="med"/>
-                    </a:lnR>
-                    <a:lnT w="6350" cap="flat" cmpd="sng" algn="ctr">
-                      <a:solidFill>
-                        <a:srgbClr val="BDC3C7"/>
-                      </a:solidFill>
-                      <a:prstDash val="solid"/>
-                      <a:round/>
-                      <a:headEnd type="none" w="med" len="med"/>
-                      <a:tailEnd type="none" w="med" len="med"/>
-                    </a:lnT>
-                    <a:lnB w="6350" cap="flat" cmpd="sng" algn="ctr">
-                      <a:solidFill>
-                        <a:srgbClr val="BDC3C7"/>
-                      </a:solidFill>
-                      <a:prstDash val="solid"/>
-                      <a:round/>
-                      <a:headEnd type="none" w="med" len="med"/>
-                      <a:tailEnd type="none" w="med" len="med"/>
-                    </a:lnB>
-                    <a:solidFill>
-                      <a:srgbClr val="FFFFFF"/>
-                    </a:solidFill>
-                  </a:tcPr>
-                </a:tc>
-                <a:tc>
-                  <a:txBody>
-                    <a:bodyPr/>
-                    <a:lstStyle/>
-                    <a:p>
-                      <a:pPr algn="ctr" indent="0" marL="0">
-                        <a:buNone/>
-                      </a:pPr>
-                      <a:r>
-                        <a:rPr lang="en-US" sz="1300" b="1" dirty="0">
-                          <a:solidFill>
-                            <a:srgbClr val="C0392B"/>
-                          </a:solidFill>
-                          <a:latin typeface="Calibri" pitchFamily="34" charset="0"/>
-                          <a:ea typeface="Calibri" pitchFamily="34" charset="-122"/>
-                          <a:cs typeface="Calibri" pitchFamily="34" charset="-120"/>
-                        </a:rPr>
-                        <a:t>1.00</a:t>
-                      </a:r>
-                      <a:endParaRPr lang="en-US" sz="1300" dirty="0">
-                        <a:latin typeface="Calibri" charset="0"/>
-                        <a:ea typeface="Calibri" charset="0"/>
-                        <a:cs typeface="Calibri" charset="0"/>
-                      </a:endParaRPr>
-                    </a:p>
-                  </a:txBody>
-                  <a:tcPr marL="91440" marR="91440" marT="45720" marB="45720">
-                    <a:lnL w="6350" cap="flat" cmpd="sng" algn="ctr">
-                      <a:solidFill>
-                        <a:srgbClr val="BDC3C7"/>
-                      </a:solidFill>
-                      <a:prstDash val="solid"/>
-                      <a:round/>
-                      <a:headEnd type="none" w="med" len="med"/>
-                      <a:tailEnd type="none" w="med" len="med"/>
-                    </a:lnL>
-                    <a:lnR w="6350" cap="flat" cmpd="sng" algn="ctr">
-                      <a:solidFill>
-                        <a:srgbClr val="BDC3C7"/>
-                      </a:solidFill>
-                      <a:prstDash val="solid"/>
-                      <a:round/>
-                      <a:headEnd type="none" w="med" len="med"/>
-                      <a:tailEnd type="none" w="med" len="med"/>
-                    </a:lnR>
-                    <a:lnT w="6350" cap="flat" cmpd="sng" algn="ctr">
-                      <a:solidFill>
-                        <a:srgbClr val="BDC3C7"/>
-                      </a:solidFill>
-                      <a:prstDash val="solid"/>
-                      <a:round/>
-                      <a:headEnd type="none" w="med" len="med"/>
-                      <a:tailEnd type="none" w="med" len="med"/>
-                    </a:lnT>
-                    <a:lnB w="6350" cap="flat" cmpd="sng" algn="ctr">
-                      <a:solidFill>
-                        <a:srgbClr val="BDC3C7"/>
-                      </a:solidFill>
-                      <a:prstDash val="solid"/>
-                      <a:round/>
-                      <a:headEnd type="none" w="med" len="med"/>
-                      <a:tailEnd type="none" w="med" len="med"/>
-                    </a:lnB>
-                    <a:solidFill>
-                      <a:srgbClr val="FFFFFF"/>
-                    </a:solidFill>
-                  </a:tcPr>
-                </a:tc>
-                <a:tc>
-                  <a:txBody>
-                    <a:bodyPr/>
-                    <a:lstStyle/>
-                    <a:p>
-                      <a:pPr algn="ctr" indent="0" marL="0">
-                        <a:buNone/>
-                      </a:pPr>
-                      <a:r>
-                        <a:rPr lang="en-US" sz="1300" b="1" dirty="0">
-                          <a:solidFill>
-                            <a:srgbClr val="C0392B"/>
-                          </a:solidFill>
-                          <a:latin typeface="Calibri" pitchFamily="34" charset="0"/>
-                          <a:ea typeface="Calibri" pitchFamily="34" charset="-122"/>
-                          <a:cs typeface="Calibri" pitchFamily="34" charset="-120"/>
-                        </a:rPr>
-                        <a:t>9.00</a:t>
-                      </a:r>
-                      <a:endParaRPr lang="en-US" sz="1300" dirty="0">
-                        <a:latin typeface="Calibri" charset="0"/>
-                        <a:ea typeface="Calibri" charset="0"/>
-                        <a:cs typeface="Calibri" charset="0"/>
-                      </a:endParaRPr>
-                    </a:p>
-                  </a:txBody>
-                  <a:tcPr marL="91440" marR="91440" marT="45720" marB="45720">
-                    <a:lnL w="6350" cap="flat" cmpd="sng" algn="ctr">
-                      <a:solidFill>
-                        <a:srgbClr val="BDC3C7"/>
-                      </a:solidFill>
-                      <a:prstDash val="solid"/>
-                      <a:round/>
-                      <a:headEnd type="none" w="med" len="med"/>
-                      <a:tailEnd type="none" w="med" len="med"/>
-                    </a:lnL>
-                    <a:lnR w="6350" cap="flat" cmpd="sng" algn="ctr">
-                      <a:solidFill>
-                        <a:srgbClr val="BDC3C7"/>
-                      </a:solidFill>
-                      <a:prstDash val="solid"/>
-                      <a:round/>
-                      <a:headEnd type="none" w="med" len="med"/>
-                      <a:tailEnd type="none" w="med" len="med"/>
-                    </a:lnR>
-                    <a:lnT w="6350" cap="flat" cmpd="sng" algn="ctr">
-                      <a:solidFill>
-                        <a:srgbClr val="BDC3C7"/>
-                      </a:solidFill>
-                      <a:prstDash val="solid"/>
-                      <a:round/>
-                      <a:headEnd type="none" w="med" len="med"/>
-                      <a:tailEnd type="none" w="med" len="med"/>
-                    </a:lnT>
-                    <a:lnB w="6350" cap="flat" cmpd="sng" algn="ctr">
-                      <a:solidFill>
-                        <a:srgbClr val="BDC3C7"/>
-                      </a:solidFill>
-                      <a:prstDash val="solid"/>
-                      <a:round/>
-                      <a:headEnd type="none" w="med" len="med"/>
-                      <a:tailEnd type="none" w="med" len="med"/>
-                    </a:lnB>
-                    <a:solidFill>
-                      <a:srgbClr val="FFFFFF"/>
-                    </a:solidFill>
-                  </a:tcPr>
-                </a:tc>
-                <a:tc>
-                  <a:txBody>
-                    <a:bodyPr/>
-                    <a:lstStyle/>
-                    <a:p>
-                      <a:pPr algn="ctr" indent="0" marL="0">
-                        <a:buNone/>
-                      </a:pPr>
-                      <a:r>
-                        <a:rPr lang="en-US" sz="1300" dirty="0">
-                          <a:solidFill>
-                            <a:srgbClr val="C0392B"/>
-                          </a:solidFill>
-                          <a:latin typeface="Calibri" pitchFamily="34" charset="0"/>
-                          <a:ea typeface="Calibri" pitchFamily="34" charset="-122"/>
-                          <a:cs typeface="Calibri" pitchFamily="34" charset="-120"/>
-                        </a:rPr>
-                        <a:t>Crisis</a:t>
-                      </a:r>
-                      <a:endParaRPr lang="en-US" sz="1300" dirty="0">
-                        <a:latin typeface="Calibri" charset="0"/>
-                        <a:ea typeface="Calibri" charset="0"/>
-                        <a:cs typeface="Calibri" charset="0"/>
-                      </a:endParaRPr>
-                    </a:p>
-                  </a:txBody>
-                  <a:tcPr marL="91440" marR="91440" marT="45720" marB="45720">
-                    <a:lnL w="6350" cap="flat" cmpd="sng" algn="ctr">
-                      <a:solidFill>
-                        <a:srgbClr val="BDC3C7"/>
-                      </a:solidFill>
-                      <a:prstDash val="solid"/>
-                      <a:round/>
-                      <a:headEnd type="none" w="med" len="med"/>
-                      <a:tailEnd type="none" w="med" len="med"/>
-                    </a:lnL>
-                    <a:lnR w="6350" cap="flat" cmpd="sng" algn="ctr">
-                      <a:solidFill>
-                        <a:srgbClr val="BDC3C7"/>
-                      </a:solidFill>
-                      <a:prstDash val="solid"/>
-                      <a:round/>
-                      <a:headEnd type="none" w="med" len="med"/>
-                      <a:tailEnd type="none" w="med" len="med"/>
-                    </a:lnR>
-                    <a:lnT w="6350" cap="flat" cmpd="sng" algn="ctr">
-                      <a:solidFill>
-                        <a:srgbClr val="BDC3C7"/>
-                      </a:solidFill>
-                      <a:prstDash val="solid"/>
-                      <a:round/>
-                      <a:headEnd type="none" w="med" len="med"/>
-                      <a:tailEnd type="none" w="med" len="med"/>
-                    </a:lnT>
-                    <a:lnB w="6350" cap="flat" cmpd="sng" algn="ctr">
-                      <a:solidFill>
-                        <a:srgbClr val="BDC3C7"/>
-                      </a:solidFill>
-                      <a:prstDash val="solid"/>
-                      <a:round/>
-                      <a:headEnd type="none" w="med" len="med"/>
-                      <a:tailEnd type="none" w="med" len="med"/>
-                    </a:lnB>
-                    <a:solidFill>
-                      <a:srgbClr val="FFFFFF"/>
-                    </a:solidFill>
-                  </a:tcPr>
-                </a:tc>
-              </a:tr>
-            </a:tbl>
-          </a:graphicData>
-        </a:graphic>
-      </p:graphicFrame>
-      <p:sp>
-        <p:nvSpPr>
-          <p:cNvPr id="5" name="Shape 2"/>
-          <p:cNvSpPr/>
-          <p:nvPr/>
-        </p:nvSpPr>
-        <p:spPr>
-          <a:xfrm>
-            <a:off x="365760" y="3520440"/>
-            <a:ext cx="8412480" cy="1280160"/>
-          </a:xfrm>
-          <a:prstGeom prst="rect">
-            <a:avLst/>
-          </a:prstGeom>
-          <a:solidFill>
-            <a:srgbClr val="D6E4F0"/>
-          </a:solidFill>
-          <a:ln w="9525">
-            <a:solidFill>
-              <a:srgbClr val="1F5C8B"/>
-            </a:solidFill>
-            <a:prstDash val="solid"/>
-          </a:ln>
-        </p:spPr>
-      </p:sp>
-      <p:sp>
-        <p:nvSpPr>
-          <p:cNvPr id="6" name="Text 3"/>
-          <p:cNvSpPr/>
-          <p:nvPr/>
-        </p:nvSpPr>
-        <p:spPr>
-          <a:xfrm>
-            <a:off x="548640" y="3611880"/>
-            <a:ext cx="8046720" cy="347472"/>
-          </a:xfrm>
-          <a:prstGeom prst="rect">
-            <a:avLst/>
-          </a:prstGeom>
-          <a:noFill/>
-          <a:ln/>
-        </p:spPr>
-        <p:txBody>
-          <a:bodyPr wrap="square" lIns="0" tIns="0" rIns="0" bIns="0" rtlCol="0" anchor="ctr"/>
-          <a:lstStyle/>
-          <a:p>
-            <a:pPr indent="0" marL="0">
-              <a:buNone/>
-            </a:pPr>
-            <a:r>
-              <a:rPr lang="en-US" sz="1400" b="1" dirty="0">
-                <a:solidFill>
-                  <a:srgbClr val="142850"/>
-                </a:solidFill>
-                <a:latin typeface="Calibri" pitchFamily="34" charset="0"/>
-                <a:ea typeface="Calibri" pitchFamily="34" charset="-122"/>
-                <a:cs typeface="Calibri" pitchFamily="34" charset="-120"/>
-              </a:rPr>
-              <a:t>Ejemplo de zona de transición (interpolación):</a:t>
-            </a:r>
-            <a:endParaRPr lang="en-US" sz="1400" dirty="0"/>
-          </a:p>
-        </p:txBody>
-      </p:sp>
-      <p:sp>
-        <p:nvSpPr>
-          <p:cNvPr id="7" name="Text 4"/>
-          <p:cNvSpPr/>
-          <p:nvPr/>
-        </p:nvSpPr>
-        <p:spPr>
-          <a:xfrm>
-            <a:off x="548640" y="3977640"/>
-            <a:ext cx="8046720" cy="731520"/>
-          </a:xfrm>
-          <a:prstGeom prst="rect">
-            <a:avLst/>
-          </a:prstGeom>
-          <a:noFill/>
-          <a:ln/>
-        </p:spPr>
-        <p:txBody>
-          <a:bodyPr wrap="square" lIns="0" tIns="0" rIns="0" bIns="0" rtlCol="0" anchor="ctr"/>
-          <a:lstStyle/>
-          <a:p>
-            <a:pPr indent="0" marL="0">
-              <a:buNone/>
-            </a:pPr>
-            <a:r>
-              <a:rPr lang="en-US" sz="1300" dirty="0">
-                <a:solidFill>
-                  <a:srgbClr val="142850"/>
-                </a:solidFill>
-                <a:latin typeface="Calibri" pitchFamily="34" charset="0"/>
-                <a:ea typeface="Calibri" pitchFamily="34" charset="-122"/>
-                <a:cs typeface="Calibri" pitchFamily="34" charset="-120"/>
-              </a:rPr>
-              <a:t>Para x = 120 mmHg: μ_Normal = 0.50, μ_Elevada = 0.33 → w̄_N = 0.60, w̄_E = 0.40</a:t>
-            </a:r>
-            <a:endParaRPr lang="en-US" sz="1300" dirty="0"/>
-          </a:p>
-          <a:p>
-            <a:pPr indent="0" marL="0">
-              <a:buNone/>
-            </a:pPr>
-            <a:r>
-              <a:rPr lang="en-US" sz="1300" dirty="0">
-                <a:solidFill>
-                  <a:srgbClr val="142850"/>
-                </a:solidFill>
-                <a:latin typeface="Calibri" pitchFamily="34" charset="0"/>
-                <a:ea typeface="Calibri" pitchFamily="34" charset="-122"/>
-                <a:cs typeface="Calibri" pitchFamily="34" charset="-120"/>
-              </a:rPr>
-              <a:t>Salida = 0.60 × 1.5 + 0.40 × 4.0 = 0.90 + 1.60 = 2.50  (interpolación suave entre Normal y Elevada)</a:t>
-            </a:r>
-            <a:endParaRPr lang="en-US" sz="1300" dirty="0"/>
           </a:p>
         </p:txBody>
       </p:sp>
@@ -11189,4 +11879,319 @@
     </a:ext>
   </a:extLst>
 </a:theme>
+</file>
+
+<file path=ppt/theme/theme2.xml><?xml version="1.0" encoding="utf-8"?>
+<a:theme xmlns:a="http://schemas.openxmlformats.org/drawingml/2006/main" name="Office Theme">
+  <a:themeElements>
+    <a:clrScheme name="Office">
+      <a:dk1>
+        <a:sysClr val="windowText" lastClr="000000"/>
+      </a:dk1>
+      <a:lt1>
+        <a:sysClr val="window" lastClr="FFFFFF"/>
+      </a:lt1>
+      <a:dk2>
+        <a:srgbClr val="0E2841"/>
+      </a:dk2>
+      <a:lt2>
+        <a:srgbClr val="E8E8E8"/>
+      </a:lt2>
+      <a:accent1>
+        <a:srgbClr val="156082"/>
+      </a:accent1>
+      <a:accent2>
+        <a:srgbClr val="E97132"/>
+      </a:accent2>
+      <a:accent3>
+        <a:srgbClr val="196B24"/>
+      </a:accent3>
+      <a:accent4>
+        <a:srgbClr val="0F9ED5"/>
+      </a:accent4>
+      <a:accent5>
+        <a:srgbClr val="A02B93"/>
+      </a:accent5>
+      <a:accent6>
+        <a:srgbClr val="4EA72E"/>
+      </a:accent6>
+      <a:hlink>
+        <a:srgbClr val="467886"/>
+      </a:hlink>
+      <a:folHlink>
+        <a:srgbClr val="96607D"/>
+      </a:folHlink>
+    </a:clrScheme>
+    <a:fontScheme name="Office">
+      <a:majorFont>
+        <a:latin typeface="Aptos Display" panose="02110004020202020204"/>
+        <a:ea typeface=""/>
+        <a:cs typeface=""/>
+        <a:font script="Jpan" typeface="游ゴシック Light"/>
+        <a:font script="Hang" typeface="맑은 고딕"/>
+        <a:font script="Hans" typeface="等线 Light"/>
+        <a:font script="Hant" typeface="新細明體"/>
+        <a:font script="Arab" typeface="Times New Roman"/>
+        <a:font script="Hebr" typeface="Times New Roman"/>
+        <a:font script="Thai" typeface="Angsana New"/>
+        <a:font script="Ethi" typeface="Nyala"/>
+        <a:font script="Beng" typeface="Vrinda"/>
+        <a:font script="Gujr" typeface="Shruti"/>
+        <a:font script="Khmr" typeface="MoolBoran"/>
+        <a:font script="Knda" typeface="Tunga"/>
+        <a:font script="Guru" typeface="Raavi"/>
+        <a:font script="Cans" typeface="Euphemia"/>
+        <a:font script="Cher" typeface="Plantagenet Cherokee"/>
+        <a:font script="Yiii" typeface="Microsoft Yi Baiti"/>
+        <a:font script="Tibt" typeface="Microsoft Himalaya"/>
+        <a:font script="Thaa" typeface="MV Boli"/>
+        <a:font script="Deva" typeface="Mangal"/>
+        <a:font script="Telu" typeface="Gautami"/>
+        <a:font script="Taml" typeface="Latha"/>
+        <a:font script="Syrc" typeface="Estrangelo Edessa"/>
+        <a:font script="Orya" typeface="Kalinga"/>
+        <a:font script="Mlym" typeface="Kartika"/>
+        <a:font script="Laoo" typeface="DokChampa"/>
+        <a:font script="Sinh" typeface="Iskoola Pota"/>
+        <a:font script="Mong" typeface="Mongolian Baiti"/>
+        <a:font script="Viet" typeface="Times New Roman"/>
+        <a:font script="Uigh" typeface="Microsoft Uighur"/>
+        <a:font script="Geor" typeface="Sylfaen"/>
+        <a:font script="Armn" typeface="Arial"/>
+        <a:font script="Bugi" typeface="Leelawadee UI"/>
+        <a:font script="Bopo" typeface="Microsoft JhengHei"/>
+        <a:font script="Java" typeface="Javanese Text"/>
+        <a:font script="Lisu" typeface="Segoe UI"/>
+        <a:font script="Mymr" typeface="Myanmar Text"/>
+        <a:font script="Nkoo" typeface="Ebrima"/>
+        <a:font script="Olck" typeface="Nirmala UI"/>
+        <a:font script="Osma" typeface="Ebrima"/>
+        <a:font script="Phag" typeface="Phagspa"/>
+        <a:font script="Syrn" typeface="Estrangelo Edessa"/>
+        <a:font script="Syrj" typeface="Estrangelo Edessa"/>
+        <a:font script="Syre" typeface="Estrangelo Edessa"/>
+        <a:font script="Sora" typeface="Nirmala UI"/>
+        <a:font script="Tale" typeface="Microsoft Tai Le"/>
+        <a:font script="Talu" typeface="Microsoft New Tai Lue"/>
+        <a:font script="Tfng" typeface="Ebrima"/>
+      </a:majorFont>
+      <a:minorFont>
+        <a:latin typeface="Aptos" panose="02110004020202020204"/>
+        <a:ea typeface=""/>
+        <a:cs typeface=""/>
+        <a:font script="Jpan" typeface="游ゴシック"/>
+        <a:font script="Hang" typeface="맑은 고딕"/>
+        <a:font script="Hans" typeface="等线"/>
+        <a:font script="Hant" typeface="新細明體"/>
+        <a:font script="Arab" typeface="Arial"/>
+        <a:font script="Hebr" typeface="Arial"/>
+        <a:font script="Thai" typeface="Cordia New"/>
+        <a:font script="Ethi" typeface="Nyala"/>
+        <a:font script="Beng" typeface="Vrinda"/>
+        <a:font script="Gujr" typeface="Shruti"/>
+        <a:font script="Khmr" typeface="DaunPenh"/>
+        <a:font script="Knda" typeface="Tunga"/>
+        <a:font script="Guru" typeface="Raavi"/>
+        <a:font script="Cans" typeface="Euphemia"/>
+        <a:font script="Cher" typeface="Plantagenet Cherokee"/>
+        <a:font script="Yiii" typeface="Microsoft Yi Baiti"/>
+        <a:font script="Tibt" typeface="Microsoft Himalaya"/>
+        <a:font script="Thaa" typeface="MV Boli"/>
+        <a:font script="Deva" typeface="Mangal"/>
+        <a:font script="Telu" typeface="Gautami"/>
+        <a:font script="Taml" typeface="Latha"/>
+        <a:font script="Syrc" typeface="Estrangelo Edessa"/>
+        <a:font script="Orya" typeface="Kalinga"/>
+        <a:font script="Mlym" typeface="Kartika"/>
+        <a:font script="Laoo" typeface="DokChampa"/>
+        <a:font script="Sinh" typeface="Iskoola Pota"/>
+        <a:font script="Mong" typeface="Mongolian Baiti"/>
+        <a:font script="Viet" typeface="Arial"/>
+        <a:font script="Uigh" typeface="Microsoft Uighur"/>
+        <a:font script="Geor" typeface="Sylfaen"/>
+        <a:font script="Armn" typeface="Arial"/>
+        <a:font script="Bugi" typeface="Leelawadee UI"/>
+        <a:font script="Bopo" typeface="Microsoft JhengHei"/>
+        <a:font script="Java" typeface="Javanese Text"/>
+        <a:font script="Lisu" typeface="Segoe UI"/>
+        <a:font script="Mymr" typeface="Myanmar Text"/>
+        <a:font script="Nkoo" typeface="Ebrima"/>
+        <a:font script="Olck" typeface="Nirmala UI"/>
+        <a:font script="Osma" typeface="Ebrima"/>
+        <a:font script="Phag" typeface="Phagspa"/>
+        <a:font script="Syrn" typeface="Estrangelo Edessa"/>
+        <a:font script="Syrj" typeface="Estrangelo Edessa"/>
+        <a:font script="Syre" typeface="Estrangelo Edessa"/>
+        <a:font script="Sora" typeface="Nirmala UI"/>
+        <a:font script="Tale" typeface="Microsoft Tai Le"/>
+        <a:font script="Talu" typeface="Microsoft New Tai Lue"/>
+        <a:font script="Tfng" typeface="Ebrima"/>
+      </a:minorFont>
+    </a:fontScheme>
+    <a:fmtScheme name="Office">
+      <a:fillStyleLst>
+        <a:solidFill>
+          <a:schemeClr val="phClr"/>
+        </a:solidFill>
+        <a:gradFill rotWithShape="1">
+          <a:gsLst>
+            <a:gs pos="0">
+              <a:schemeClr val="phClr">
+                <a:lumMod val="110000"/>
+                <a:satMod val="105000"/>
+                <a:tint val="67000"/>
+              </a:schemeClr>
+            </a:gs>
+            <a:gs pos="50000">
+              <a:schemeClr val="phClr">
+                <a:lumMod val="105000"/>
+                <a:satMod val="103000"/>
+                <a:tint val="73000"/>
+              </a:schemeClr>
+            </a:gs>
+            <a:gs pos="100000">
+              <a:schemeClr val="phClr">
+                <a:lumMod val="105000"/>
+                <a:satMod val="109000"/>
+                <a:tint val="81000"/>
+              </a:schemeClr>
+            </a:gs>
+          </a:gsLst>
+          <a:lin ang="5400000" scaled="0"/>
+        </a:gradFill>
+        <a:gradFill rotWithShape="1">
+          <a:gsLst>
+            <a:gs pos="0">
+              <a:schemeClr val="phClr">
+                <a:satMod val="103000"/>
+                <a:lumMod val="102000"/>
+                <a:tint val="94000"/>
+              </a:schemeClr>
+            </a:gs>
+            <a:gs pos="50000">
+              <a:schemeClr val="phClr">
+                <a:satMod val="110000"/>
+                <a:lumMod val="100000"/>
+                <a:shade val="100000"/>
+              </a:schemeClr>
+            </a:gs>
+            <a:gs pos="100000">
+              <a:schemeClr val="phClr">
+                <a:lumMod val="99000"/>
+                <a:satMod val="120000"/>
+                <a:shade val="78000"/>
+              </a:schemeClr>
+            </a:gs>
+          </a:gsLst>
+          <a:lin ang="5400000" scaled="0"/>
+        </a:gradFill>
+      </a:fillStyleLst>
+      <a:lnStyleLst>
+        <a:ln w="12700" cap="flat" cmpd="sng" algn="ctr">
+          <a:solidFill>
+            <a:schemeClr val="phClr"/>
+          </a:solidFill>
+          <a:prstDash val="solid"/>
+          <a:miter lim="800000"/>
+        </a:ln>
+        <a:ln w="19050" cap="flat" cmpd="sng" algn="ctr">
+          <a:solidFill>
+            <a:schemeClr val="phClr"/>
+          </a:solidFill>
+          <a:prstDash val="solid"/>
+          <a:miter lim="800000"/>
+        </a:ln>
+        <a:ln w="25400" cap="flat" cmpd="sng" algn="ctr">
+          <a:solidFill>
+            <a:schemeClr val="phClr"/>
+          </a:solidFill>
+          <a:prstDash val="solid"/>
+          <a:miter lim="800000"/>
+        </a:ln>
+      </a:lnStyleLst>
+      <a:effectStyleLst>
+        <a:effectStyle>
+          <a:effectLst/>
+        </a:effectStyle>
+        <a:effectStyle>
+          <a:effectLst/>
+        </a:effectStyle>
+        <a:effectStyle>
+          <a:effectLst>
+            <a:outerShdw blurRad="57150" dist="19050" dir="5400000" algn="ctr" rotWithShape="0">
+              <a:srgbClr val="000000">
+                <a:alpha val="63000"/>
+              </a:srgbClr>
+            </a:outerShdw>
+          </a:effectLst>
+        </a:effectStyle>
+      </a:effectStyleLst>
+      <a:bgFillStyleLst>
+        <a:solidFill>
+          <a:schemeClr val="phClr"/>
+        </a:solidFill>
+        <a:solidFill>
+          <a:schemeClr val="phClr">
+            <a:tint val="95000"/>
+            <a:satMod val="170000"/>
+          </a:schemeClr>
+        </a:solidFill>
+        <a:gradFill rotWithShape="1">
+          <a:gsLst>
+            <a:gs pos="0">
+              <a:schemeClr val="phClr">
+                <a:tint val="93000"/>
+                <a:satMod val="150000"/>
+                <a:shade val="98000"/>
+                <a:lumMod val="102000"/>
+              </a:schemeClr>
+            </a:gs>
+            <a:gs pos="50000">
+              <a:schemeClr val="phClr">
+                <a:tint val="98000"/>
+                <a:satMod val="130000"/>
+                <a:shade val="90000"/>
+                <a:lumMod val="103000"/>
+              </a:schemeClr>
+            </a:gs>
+            <a:gs pos="100000">
+              <a:schemeClr val="phClr">
+                <a:shade val="63000"/>
+                <a:satMod val="120000"/>
+              </a:schemeClr>
+            </a:gs>
+          </a:gsLst>
+          <a:lin ang="5400000" scaled="0"/>
+        </a:gradFill>
+      </a:bgFillStyleLst>
+    </a:fmtScheme>
+  </a:themeElements>
+  <a:objectDefaults>
+    <a:lnDef>
+      <a:spPr/>
+      <a:bodyPr/>
+      <a:lstStyle/>
+      <a:style>
+        <a:lnRef idx="2">
+          <a:schemeClr val="accent1"/>
+        </a:lnRef>
+        <a:fillRef idx="0">
+          <a:schemeClr val="accent1"/>
+        </a:fillRef>
+        <a:effectRef idx="1">
+          <a:schemeClr val="accent1"/>
+        </a:effectRef>
+        <a:fontRef idx="minor">
+          <a:schemeClr val="tx1"/>
+        </a:fontRef>
+      </a:style>
+    </a:lnDef>
+  </a:objectDefaults>
+  <a:extraClrSchemeLst/>
+  <a:extLst>
+    <a:ext uri="{05A4C25C-085E-4340-85A3-A5531E510DB2}">
+      <thm15:themeFamily xmlns:thm15="http://schemas.microsoft.com/office/thememl/2012/main" name="Office Theme" id="{2E142A2C-CD16-42D6-873A-C26D2A0506FA}" vid="{1BDDFF52-6CD6-40A5-AB3C-68EB2F1E4D0A}"/>
+    </a:ext>
+  </a:extLst>
+</a:theme>
 </file>